--- a/decks/the-comparison-trap-lesson-v2.pptx
+++ b/decks/the-comparison-trap-lesson-v2.pptx
@@ -18,6 +18,7 @@
     <p:sldId id="266" r:id="rId18"/>
     <p:sldId id="267" r:id="rId19"/>
     <p:sldId id="268" r:id="rId20"/>
+    <p:sldId id="269" r:id="rId21"/>
   </p:sldIdLst>
   <p:sldSz cx="12192000" cy="6858000" type="screen4x3"/>
   <p:notesSz cx="6858000" cy="9144000"/>
@@ -514,7 +515,7 @@
           <a:lstStyle/>
           <a:p>
             <a:r>
-              <a:t>This page and the next three are hidden. They stay in the deck for you and are skipped when you present.</a:t>
+              <a:t>This page is hidden and skipped when you present. The full plan, care notes and research are on the hidden pages at the end of the deck, if you want them.</a:t>
             </a:r>
           </a:p>
         </p:txBody>
@@ -585,6 +586,76 @@
           <a:p>
             <a:r>
               <a:t>2 MINUTES. Mention the Penn study if there's time: a 10-minute-per-app limit for three weeks lowered loneliness and depression symptoms. Share the take-home link. It has the four questions, the moves, a private check-in, and who to talk to.</a:t>
+            </a:r>
+          </a:p>
+        </p:txBody>
+      </p:sp>
+      <p:sp>
+        <p:nvSpPr>
+          <p:cNvPr id="4" name="Slide Number Placeholder 3"/>
+          <p:cNvSpPr>
+            <a:spLocks noGrp="1"/>
+          </p:cNvSpPr>
+          <p:nvPr>
+            <p:ph type="sldNum" idx="5" sz="quarter"/>
+          </p:nvPr>
+        </p:nvSpPr>
+        <p:spPr/>
+      </p:sp>
+    </p:spTree>
+  </p:cSld>
+  <p:clrMapOvr>
+    <a:masterClrMapping/>
+  </p:clrMapOvr>
+</p:notes>
+</file>
+
+<file path=ppt/notesSlides/notesSlide11.xml><?xml version="1.0" encoding="utf-8"?>
+<p:notes xmlns:a="http://schemas.openxmlformats.org/drawingml/2006/main" xmlns:p="http://schemas.openxmlformats.org/presentationml/2006/main" xmlns:r="http://schemas.openxmlformats.org/officeDocument/2006/relationships">
+  <p:cSld>
+    <p:spTree>
+      <p:nvGrpSpPr>
+        <p:cNvPr id="1" name=""/>
+        <p:cNvGrpSpPr/>
+        <p:nvPr/>
+      </p:nvGrpSpPr>
+      <p:grpSpPr>
+        <a:xfrm>
+          <a:off x="0" y="0"/>
+          <a:ext cx="0" cy="0"/>
+          <a:chOff x="0" y="0"/>
+          <a:chExt cx="0" cy="0"/>
+        </a:xfrm>
+      </p:grpSpPr>
+      <p:sp>
+        <p:nvSpPr>
+          <p:cNvPr id="2" name="Slide Image Placeholder 1"/>
+          <p:cNvSpPr>
+            <a:spLocks noGrp="1"/>
+          </p:cNvSpPr>
+          <p:nvPr>
+            <p:ph type="sldImg" idx="2"/>
+          </p:nvPr>
+        </p:nvSpPr>
+        <p:spPr/>
+      </p:sp>
+      <p:sp>
+        <p:nvSpPr>
+          <p:cNvPr id="3" name="Notes Placeholder 2"/>
+          <p:cNvSpPr>
+            <a:spLocks noGrp="1"/>
+          </p:cNvSpPr>
+          <p:nvPr>
+            <p:ph type="body" idx="3" sz="quarter"/>
+          </p:nvPr>
+        </p:nvSpPr>
+        <p:spPr/>
+        <p:txBody>
+          <a:bodyPr/>
+          <a:lstStyle/>
+          <a:p>
+            <a:r>
+              <a:t>If you want more: this page and the next three are hidden and skipped when you present.</a:t>
             </a:r>
           </a:p>
         </p:txBody>
@@ -4236,7 +4307,7 @@
                 </a:solidFill>
                 <a:latin typeface="Inter Tight"/>
               </a:rPr>
-              <a:t>TEACHER PAGE  ·  skipped when you present  ·  Lesson plan</a:t>
+              <a:t>TEACHER PAGE  ·  skipped when you present  ·  Before you start</a:t>
             </a:r>
           </a:p>
         </p:txBody>
@@ -4327,8 +4398,8 @@
         </p:nvSpPr>
         <p:spPr>
           <a:xfrm>
-            <a:off x="548640" y="1828800"/>
-            <a:ext cx="5120640" cy="4389120"/>
+            <a:off x="548640" y="2011680"/>
+            <a:ext cx="11064240" cy="4206240"/>
           </a:xfrm>
           <a:prstGeom prst="rect">
             <a:avLst/>
@@ -4343,43 +4414,43 @@
           <a:p>
             <a:pPr algn="l">
               <a:spcAft>
-                <a:spcPts val="675"/>
-              </a:spcAft>
-            </a:pPr>
-            <a:r>
-              <a:rPr sz="1100" b="1" i="0">
+                <a:spcPts val="810"/>
+              </a:spcAft>
+            </a:pPr>
+            <a:r>
+              <a:rPr sz="1200" b="1" i="0">
                 <a:solidFill>
                   <a:srgbClr val="0B2D5B"/>
                 </a:solidFill>
                 <a:latin typeface="Inter Tight"/>
               </a:rPr>
-              <a:t>GOAL</a:t>
-            </a:r>
-          </a:p>
-          <a:p>
-            <a:pPr algn="l">
-              <a:spcAft>
-                <a:spcPts val="675"/>
-              </a:spcAft>
-            </a:pPr>
-            <a:r>
-              <a:rPr sz="1500" b="0" i="0">
+              <a:t>BEFORE YOU START</a:t>
+            </a:r>
+          </a:p>
+          <a:p>
+            <a:pPr algn="l">
+              <a:spcAft>
+                <a:spcPts val="810"/>
+              </a:spcAft>
+            </a:pPr>
+            <a:r>
+              <a:rPr sz="1800" b="0" i="0">
                 <a:solidFill>
                   <a:srgbClr val="1C1B19"/>
                 </a:solidFill>
                 <a:latin typeface="Source Serif 4"/>
               </a:rPr>
-              <a:t>Students can explain why comparing to a feed feels worse than reality (the highlight filter and hidden struggle), use a four-question check on a post that stings, and choose one change to what they see.</a:t>
-            </a:r>
-          </a:p>
-          <a:p>
-            <a:pPr algn="l">
-              <a:spcAft>
-                <a:spcPts val="675"/>
-              </a:spcAft>
-            </a:pPr>
-            <a:r>
-              <a:rPr sz="1500" b="0" i="0">
+              <a:t>Students learn why comparing to a feed feels worse than reality and use a four-question check on a post that stings, then choose one change to what they see. Bring index cards, keep the account audit private, and keep every example about the feeling, never bodies.</a:t>
+            </a:r>
+          </a:p>
+          <a:p>
+            <a:pPr algn="l">
+              <a:spcAft>
+                <a:spcPts val="810"/>
+              </a:spcAft>
+            </a:pPr>
+            <a:r>
+              <a:rPr sz="1800" b="0" i="0">
                 <a:solidFill>
                   <a:srgbClr val="1C1B19"/>
                 </a:solidFill>
@@ -4391,321 +4462,75 @@
           <a:p>
             <a:pPr algn="l">
               <a:spcAft>
-                <a:spcPts val="675"/>
-              </a:spcAft>
-            </a:pPr>
-            <a:r>
-              <a:rPr sz="1100" b="1" i="0">
+                <a:spcPts val="810"/>
+              </a:spcAft>
+            </a:pPr>
+            <a:r>
+              <a:rPr sz="1200" b="1" i="0">
                 <a:solidFill>
                   <a:srgbClr val="0B2D5B"/>
                 </a:solidFill>
                 <a:latin typeface="Inter Tight"/>
               </a:rPr>
-              <a:t>MATERIALS</a:t>
-            </a:r>
-          </a:p>
-          <a:p>
-            <a:pPr algn="l">
-              <a:spcAft>
-                <a:spcPts val="675"/>
-              </a:spcAft>
-            </a:pPr>
-            <a:r>
-              <a:rPr sz="1500" b="0" i="0">
+              <a:t>EVERY STUDENT IN THE ROOM</a:t>
+            </a:r>
+          </a:p>
+          <a:p>
+            <a:pPr algn="l">
+              <a:spcAft>
+                <a:spcPts val="810"/>
+              </a:spcAft>
+            </a:pPr>
+            <a:r>
+              <a:rPr sz="1800" b="0" i="0">
                 <a:solidFill>
                   <a:srgbClr val="1C1B19"/>
                 </a:solidFill>
                 <a:latin typeface="Source Serif 4"/>
               </a:rPr>
-              <a:t>Scrap paper for the opening guess</a:t>
-            </a:r>
-          </a:p>
-          <a:p>
-            <a:pPr algn="l">
-              <a:spcAft>
-                <a:spcPts val="675"/>
-              </a:spcAft>
-            </a:pPr>
-            <a:r>
-              <a:rPr sz="1500" b="0" i="0">
+              <a:t>Jae's scenario carries the equity piece: work and caring for siblings count as building something real, and some students aren't online at all.</a:t>
+            </a:r>
+          </a:p>
+          <a:p>
+            <a:pPr algn="l">
+              <a:spcAft>
+                <a:spcPts val="810"/>
+              </a:spcAft>
+            </a:pPr>
+            <a:r>
+              <a:rPr sz="1800" b="0" i="0">
                 <a:solidFill>
                   <a:srgbClr val="1C1B19"/>
                 </a:solidFill>
                 <a:latin typeface="Source Serif 4"/>
               </a:rPr>
-              <a:t>Index cards for the private account audit</a:t>
-            </a:r>
-          </a:p>
-          <a:p>
-            <a:pPr algn="l">
-              <a:spcAft>
-                <a:spcPts val="675"/>
-              </a:spcAft>
-            </a:pPr>
-            <a:r>
-              <a:rPr sz="1500" b="0" i="0">
-                <a:solidFill>
-                  <a:srgbClr val="1C1B19"/>
-                </a:solidFill>
-                <a:latin typeface="Source Serif 4"/>
-              </a:rPr>
-              <a:t>The take-home link (last slide) to share after class</a:t>
-            </a:r>
-          </a:p>
-        </p:txBody>
-      </p:sp>
-      <p:sp>
-        <p:nvSpPr>
-          <p:cNvPr id="7" name="TextBox 6"/>
-          <p:cNvSpPr txBox="1"/>
-          <p:nvPr/>
-        </p:nvSpPr>
-        <p:spPr>
-          <a:xfrm>
-            <a:off x="6126480" y="1828800"/>
-            <a:ext cx="5486400" cy="4389120"/>
-          </a:xfrm>
-          <a:prstGeom prst="rect">
-            <a:avLst/>
-          </a:prstGeom>
-          <a:noFill/>
-        </p:spPr>
-        <p:txBody>
-          <a:bodyPr wrap="square" anchor="t" lIns="0" rIns="0" tIns="0" bIns="0">
-            <a:spAutoFit/>
-          </a:bodyPr>
-          <a:lstStyle/>
-          <a:p>
-            <a:pPr algn="l">
-              <a:spcAft>
-                <a:spcPts val="630"/>
-              </a:spcAft>
-            </a:pPr>
-            <a:r>
-              <a:rPr sz="1100" b="1" i="0">
+              <a:t/>
+            </a:r>
+          </a:p>
+          <a:p>
+            <a:pPr algn="l">
+              <a:spcAft>
+                <a:spcPts val="810"/>
+              </a:spcAft>
+            </a:pPr>
+            <a:r>
+              <a:rPr sz="1200" b="1" i="0">
                 <a:solidFill>
                   <a:srgbClr val="0B2D5B"/>
                 </a:solidFill>
                 <a:latin typeface="Inter Tight"/>
               </a:rPr>
-              <a:t>FLOW</a:t>
-            </a:r>
-          </a:p>
-          <a:p>
-            <a:pPr algn="l">
-              <a:spcAft>
-                <a:spcPts val="630"/>
-              </a:spcAft>
-            </a:pPr>
-            <a:r>
-              <a:rPr sz="1300" b="1" i="0">
-                <a:solidFill>
-                  <a:srgbClr val="F47B20"/>
-                </a:solidFill>
-                <a:latin typeface="Inter Tight"/>
-              </a:rPr>
-              <a:t>5 min   </a:t>
-            </a:r>
-            <a:r>
-              <a:rPr sz="1400" b="0" i="0">
-                <a:solidFill>
-                  <a:srgbClr val="1C1B19"/>
-                </a:solidFill>
-                <a:latin typeface="Source Serif 4"/>
-              </a:rPr>
-              <a:t>The guess (anonymous tally)</a:t>
-            </a:r>
-          </a:p>
-          <a:p>
-            <a:pPr algn="l">
-              <a:spcAft>
-                <a:spcPts val="630"/>
-              </a:spcAft>
-            </a:pPr>
-            <a:r>
-              <a:rPr sz="1300" b="1" i="0">
-                <a:solidFill>
-                  <a:srgbClr val="F47B20"/>
-                </a:solidFill>
-                <a:latin typeface="Inter Tight"/>
-              </a:rPr>
-              <a:t>8 min   </a:t>
-            </a:r>
-            <a:r>
-              <a:rPr sz="1400" b="0" i="0">
-                <a:solidFill>
-                  <a:srgbClr val="1C1B19"/>
-                </a:solidFill>
-                <a:latin typeface="Source Serif 4"/>
-              </a:rPr>
-              <a:t>The highlight filter</a:t>
-            </a:r>
-          </a:p>
-          <a:p>
-            <a:pPr algn="l">
-              <a:spcAft>
-                <a:spcPts val="630"/>
-              </a:spcAft>
-            </a:pPr>
-            <a:r>
-              <a:rPr sz="1300" b="1" i="0">
-                <a:solidFill>
-                  <a:srgbClr val="F47B20"/>
-                </a:solidFill>
-                <a:latin typeface="Inter Tight"/>
-              </a:rPr>
-              <a:t>10 min   </a:t>
-            </a:r>
-            <a:r>
-              <a:rPr sz="1400" b="0" i="0">
-                <a:solidFill>
-                  <a:srgbClr val="1C1B19"/>
-                </a:solidFill>
-                <a:latin typeface="Source Serif 4"/>
-              </a:rPr>
-              <a:t>The four-question check on a sample post</a:t>
-            </a:r>
-          </a:p>
-          <a:p>
-            <a:pPr algn="l">
-              <a:spcAft>
-                <a:spcPts val="630"/>
-              </a:spcAft>
-            </a:pPr>
-            <a:r>
-              <a:rPr sz="1300" b="1" i="0">
-                <a:solidFill>
-                  <a:srgbClr val="F47B20"/>
-                </a:solidFill>
-                <a:latin typeface="Inter Tight"/>
-              </a:rPr>
-              <a:t>7 min   </a:t>
-            </a:r>
-            <a:r>
-              <a:rPr sz="1400" b="0" i="0">
-                <a:solidFill>
-                  <a:srgbClr val="1C1B19"/>
-                </a:solidFill>
-                <a:latin typeface="Source Serif 4"/>
-              </a:rPr>
-              <a:t>Private account audit</a:t>
-            </a:r>
-          </a:p>
-          <a:p>
-            <a:pPr algn="l">
-              <a:spcAft>
-                <a:spcPts val="630"/>
-              </a:spcAft>
-            </a:pPr>
-            <a:r>
-              <a:rPr sz="1300" b="1" i="0">
-                <a:solidFill>
-                  <a:srgbClr val="F47B20"/>
-                </a:solidFill>
-                <a:latin typeface="Inter Tight"/>
-              </a:rPr>
-              <a:t>8 min   </a:t>
-            </a:r>
-            <a:r>
-              <a:rPr sz="1400" b="0" i="0">
-                <a:solidFill>
-                  <a:srgbClr val="1C1B19"/>
-                </a:solidFill>
-                <a:latin typeface="Source Serif 4"/>
-              </a:rPr>
-              <a:t>Three moments (small groups)</a:t>
-            </a:r>
-          </a:p>
-          <a:p>
-            <a:pPr algn="l">
-              <a:spcAft>
-                <a:spcPts val="630"/>
-              </a:spcAft>
-            </a:pPr>
-            <a:r>
-              <a:rPr sz="1300" b="1" i="0">
-                <a:solidFill>
-                  <a:srgbClr val="F47B20"/>
-                </a:solidFill>
-                <a:latin typeface="Inter Tight"/>
-              </a:rPr>
-              <a:t>5 min   </a:t>
-            </a:r>
-            <a:r>
-              <a:rPr sz="1400" b="0" i="0">
-                <a:solidFill>
-                  <a:srgbClr val="1C1B19"/>
-                </a:solidFill>
-                <a:latin typeface="Source Serif 4"/>
-              </a:rPr>
-              <a:t>Comparison you didn't pick (optional reflection)</a:t>
-            </a:r>
-          </a:p>
-          <a:p>
-            <a:pPr algn="l">
-              <a:spcAft>
-                <a:spcPts val="630"/>
-              </a:spcAft>
-            </a:pPr>
-            <a:r>
-              <a:rPr sz="1300" b="1" i="0">
-                <a:solidFill>
-                  <a:srgbClr val="F47B20"/>
-                </a:solidFill>
-                <a:latin typeface="Inter Tight"/>
-              </a:rPr>
-              <a:t>2 min   </a:t>
-            </a:r>
-            <a:r>
-              <a:rPr sz="1400" b="0" i="0">
-                <a:solidFill>
-                  <a:srgbClr val="1C1B19"/>
-                </a:solidFill>
-                <a:latin typeface="Source Serif 4"/>
-              </a:rPr>
-              <a:t>One change, and the take-home link</a:t>
-            </a:r>
-          </a:p>
-          <a:p>
-            <a:pPr algn="l">
-              <a:spcAft>
-                <a:spcPts val="630"/>
-              </a:spcAft>
-            </a:pPr>
-            <a:r>
-              <a:rPr sz="1400" b="0" i="0">
-                <a:solidFill>
-                  <a:srgbClr val="1C1B19"/>
-                </a:solidFill>
-                <a:latin typeface="Source Serif 4"/>
-              </a:rPr>
-              <a:t/>
-            </a:r>
-          </a:p>
-          <a:p>
-            <a:pPr algn="l">
-              <a:spcAft>
-                <a:spcPts val="630"/>
-              </a:spcAft>
-            </a:pPr>
-            <a:r>
-              <a:rPr sz="1100" b="1" i="0">
-                <a:solidFill>
-                  <a:srgbClr val="0B2D5B"/>
-                </a:solidFill>
-                <a:latin typeface="Inter Tight"/>
-              </a:rPr>
               <a:t>SHORT ON TIME (20-MINUTE ADVISORY)</a:t>
             </a:r>
           </a:p>
           <a:p>
             <a:pPr algn="l">
               <a:spcAft>
-                <a:spcPts val="630"/>
-              </a:spcAft>
-            </a:pPr>
-            <a:r>
-              <a:rPr sz="1400" b="0" i="0">
+                <a:spcPts val="810"/>
+              </a:spcAft>
+            </a:pPr>
+            <a:r>
+              <a:rPr sz="1800" b="0" i="0">
                 <a:solidFill>
                   <a:srgbClr val="1C1B19"/>
                 </a:solidFill>
@@ -4820,7 +4645,7 @@
                 </a:solidFill>
                 <a:latin typeface="Inter Tight"/>
               </a:rPr>
-              <a:t>PRIVATE ACCOUNT AUDIT</a:t>
+              <a:t>BEFORE YOU GO</a:t>
             </a:r>
           </a:p>
         </p:txBody>
@@ -4872,7 +4697,7 @@
         </p:nvSpPr>
         <p:spPr>
           <a:xfrm>
-            <a:off x="822960" y="1005840"/>
+            <a:off x="822960" y="1188720"/>
             <a:ext cx="10515600" cy="914400"/>
           </a:xfrm>
           <a:prstGeom prst="rect">
@@ -4888,31 +4713,70 @@
           <a:p>
             <a:pPr algn="l">
               <a:spcAft>
-                <a:spcPts val="1530"/>
-              </a:spcAft>
-            </a:pPr>
-            <a:r>
-              <a:rPr sz="3400" b="1" i="0">
+                <a:spcPts val="1620"/>
+              </a:spcAft>
+            </a:pPr>
+            <a:r>
+              <a:rPr sz="3600" b="1" i="0">
                 <a:solidFill>
                   <a:srgbClr val="1C1B19"/>
                 </a:solidFill>
                 <a:latin typeface="Source Serif 4"/>
               </a:rPr>
-              <a:t>Think of the five accounts you see most.</a:t>
-            </a:r>
-          </a:p>
-        </p:txBody>
-      </p:sp>
-      <p:sp>
-        <p:nvSpPr>
-          <p:cNvPr id="6" name="Rectangle 5"/>
+              <a:t>One change</a:t>
+            </a:r>
+          </a:p>
+        </p:txBody>
+      </p:sp>
+      <p:sp>
+        <p:nvSpPr>
+          <p:cNvPr id="6" name="TextBox 5"/>
+          <p:cNvSpPr txBox="1"/>
+          <p:nvPr/>
+        </p:nvSpPr>
+        <p:spPr>
+          <a:xfrm>
+            <a:off x="822960" y="2286000"/>
+            <a:ext cx="10515600" cy="1463040"/>
+          </a:xfrm>
+          <a:prstGeom prst="rect">
+            <a:avLst/>
+          </a:prstGeom>
+          <a:noFill/>
+        </p:spPr>
+        <p:txBody>
+          <a:bodyPr wrap="square" anchor="t" lIns="0" rIns="0" tIns="0" bIns="0">
+            <a:spAutoFit/>
+          </a:bodyPr>
+          <a:lstStyle/>
+          <a:p>
+            <a:pPr algn="l">
+              <a:spcAft>
+                <a:spcPts val="1080"/>
+              </a:spcAft>
+            </a:pPr>
+            <a:r>
+              <a:rPr sz="2400" b="0" i="0">
+                <a:solidFill>
+                  <a:srgbClr val="1C1B19"/>
+                </a:solidFill>
+                <a:latin typeface="Source Serif 4"/>
+              </a:rPr>
+              <a:t>Mute one account, hide like counts, or put a ceiling on your worst app. Which one, starting when?</a:t>
+            </a:r>
+          </a:p>
+        </p:txBody>
+      </p:sp>
+      <p:sp>
+        <p:nvSpPr>
+          <p:cNvPr id="7" name="Rectangle 6"/>
           <p:cNvSpPr/>
           <p:nvPr/>
         </p:nvSpPr>
         <p:spPr>
           <a:xfrm>
-            <a:off x="822960" y="2103120"/>
-            <a:ext cx="5120640" cy="3931920"/>
+            <a:off x="822960" y="4023360"/>
+            <a:ext cx="10515600" cy="1371600"/>
           </a:xfrm>
           <a:prstGeom prst="rect">
             <a:avLst/>
@@ -4922,7 +4786,7 @@
           </a:solidFill>
           <a:ln w="15875">
             <a:solidFill>
-              <a:srgbClr val="D8D2C6"/>
+              <a:srgbClr val="1C1B19"/>
             </a:solidFill>
           </a:ln>
           <a:effectLst/>
@@ -4951,14 +4815,14 @@
       </p:sp>
       <p:sp>
         <p:nvSpPr>
-          <p:cNvPr id="7" name="TextBox 6"/>
+          <p:cNvPr id="8" name="TextBox 7"/>
           <p:cNvSpPr txBox="1"/>
           <p:nvPr/>
         </p:nvSpPr>
         <p:spPr>
           <a:xfrm>
-            <a:off x="1097280" y="2286000"/>
-            <a:ext cx="4572000" cy="457200"/>
+            <a:off x="1097280" y="4206240"/>
+            <a:ext cx="10058400" cy="365760"/>
           </a:xfrm>
           <a:prstGeom prst="rect">
             <a:avLst/>
@@ -4973,31 +4837,31 @@
           <a:p>
             <a:pPr algn="l">
               <a:spcAft>
-                <a:spcPts val="585"/>
-              </a:spcAft>
-            </a:pPr>
-            <a:r>
-              <a:rPr sz="1300" b="1" i="0">
+                <a:spcPts val="540"/>
+              </a:spcAft>
+            </a:pPr>
+            <a:r>
+              <a:rPr sz="1200" b="1" i="0">
                 <a:solidFill>
                   <a:srgbClr val="0B2D5B"/>
                 </a:solidFill>
                 <a:latin typeface="Inter Tight"/>
               </a:rPr>
-              <a:t>KEEP</a:t>
-            </a:r>
-          </a:p>
-        </p:txBody>
-      </p:sp>
-      <p:sp>
-        <p:nvSpPr>
-          <p:cNvPr id="8" name="TextBox 7"/>
+              <a:t>TAKE-HOME SHEET</a:t>
+            </a:r>
+          </a:p>
+        </p:txBody>
+      </p:sp>
+      <p:sp>
+        <p:nvSpPr>
+          <p:cNvPr id="9" name="TextBox 8"/>
           <p:cNvSpPr txBox="1"/>
           <p:nvPr/>
         </p:nvSpPr>
         <p:spPr>
           <a:xfrm>
-            <a:off x="1097280" y="2788920"/>
-            <a:ext cx="4572000" cy="3108960"/>
+            <a:off x="1097280" y="4617720"/>
+            <a:ext cx="10058400" cy="640080"/>
           </a:xfrm>
           <a:prstGeom prst="rect">
             <a:avLst/>
@@ -5012,90 +4876,66 @@
           <a:p>
             <a:pPr algn="l">
               <a:spcAft>
-                <a:spcPts val="855"/>
-              </a:spcAft>
-            </a:pPr>
-            <a:r>
-              <a:rPr sz="1900" b="0" i="0">
+                <a:spcPts val="900"/>
+              </a:spcAft>
+            </a:pPr>
+            <a:r>
+              <a:rPr sz="2000" b="0" i="0">
                 <a:solidFill>
                   <a:srgbClr val="1C1B19"/>
                 </a:solidFill>
-                <a:latin typeface="Source Serif 4"/>
-              </a:rPr>
-              <a:t>Makes me laugh</a:t>
-            </a:r>
-          </a:p>
-          <a:p>
-            <a:pPr algn="l">
-              <a:spcAft>
-                <a:spcPts val="855"/>
-              </a:spcAft>
-            </a:pPr>
-            <a:r>
-              <a:rPr sz="1900" b="0" i="0">
-                <a:solidFill>
-                  <a:srgbClr val="1C1B19"/>
-                </a:solidFill>
-                <a:latin typeface="Source Serif 4"/>
-              </a:rPr>
-              <a:t>Teaches me something I use</a:t>
-            </a:r>
-          </a:p>
-          <a:p>
-            <a:pPr algn="l">
-              <a:spcAft>
-                <a:spcPts val="855"/>
-              </a:spcAft>
-            </a:pPr>
-            <a:r>
-              <a:rPr sz="1900" b="0" i="0">
-                <a:solidFill>
-                  <a:srgbClr val="1C1B19"/>
-                </a:solidFill>
-                <a:latin typeface="Source Serif 4"/>
-              </a:rPr>
-              <a:t>Real people, real life</a:t>
-            </a:r>
-          </a:p>
-          <a:p>
-            <a:pPr algn="l">
-              <a:spcAft>
-                <a:spcPts val="855"/>
-              </a:spcAft>
-            </a:pPr>
-            <a:r>
-              <a:rPr sz="1900" b="0" i="0">
-                <a:solidFill>
-                  <a:srgbClr val="1C1B19"/>
-                </a:solidFill>
-                <a:latin typeface="Source Serif 4"/>
-              </a:rPr>
-              <a:t>Makes me want to go do something</a:t>
-            </a:r>
-          </a:p>
-        </p:txBody>
-      </p:sp>
-      <p:sp>
-        <p:nvSpPr>
-          <p:cNvPr id="9" name="Rectangle 8"/>
+                <a:latin typeface="Inter Tight"/>
+              </a:rPr>
+              <a:t>https://rmwtoolkit.github.io/bcds-toolkit/the-comparison-trap-high-school.html</a:t>
+            </a:r>
+          </a:p>
+        </p:txBody>
+      </p:sp>
+    </p:spTree>
+  </p:cSld>
+  <p:clrMapOvr>
+    <a:masterClrMapping/>
+  </p:clrMapOvr>
+</p:sld>
+</file>
+
+<file path=ppt/slides/slide11.xml><?xml version="1.0" encoding="utf-8"?>
+<p:sld xmlns:a="http://schemas.openxmlformats.org/drawingml/2006/main" xmlns:p="http://schemas.openxmlformats.org/presentationml/2006/main" xmlns:r="http://schemas.openxmlformats.org/officeDocument/2006/relationships" show="0">
+  <p:cSld>
+    <p:bg>
+      <p:bgPr>
+        <a:solidFill>
+          <a:srgbClr val="EEEBE4"/>
+        </a:solidFill>
+        <a:effectLst/>
+      </p:bgPr>
+    </p:bg>
+    <p:spTree>
+      <p:nvGrpSpPr>
+        <p:cNvPr id="1" name=""/>
+        <p:cNvGrpSpPr/>
+        <p:nvPr/>
+      </p:nvGrpSpPr>
+      <p:grpSpPr/>
+      <p:sp>
+        <p:nvSpPr>
+          <p:cNvPr id="2" name="Rectangle 1"/>
           <p:cNvSpPr/>
           <p:nvPr/>
         </p:nvSpPr>
         <p:spPr>
           <a:xfrm>
-            <a:off x="6309360" y="2103120"/>
-            <a:ext cx="5120640" cy="3931920"/>
+            <a:off x="0" y="0"/>
+            <a:ext cx="12191695" cy="384048"/>
           </a:xfrm>
           <a:prstGeom prst="rect">
             <a:avLst/>
           </a:prstGeom>
           <a:solidFill>
-            <a:srgbClr val="FFFFFF"/>
+            <a:srgbClr val="0B2D5B"/>
           </a:solidFill>
-          <a:ln w="15875">
-            <a:solidFill>
-              <a:srgbClr val="D8D2C6"/>
-            </a:solidFill>
+          <a:ln>
+            <a:noFill/>
           </a:ln>
           <a:effectLst/>
         </p:spPr>
@@ -5123,14 +4963,14 @@
       </p:sp>
       <p:sp>
         <p:nvSpPr>
-          <p:cNvPr id="10" name="TextBox 9"/>
+          <p:cNvPr id="3" name="TextBox 2"/>
           <p:cNvSpPr txBox="1"/>
           <p:nvPr/>
         </p:nvSpPr>
         <p:spPr>
           <a:xfrm>
-            <a:off x="6583680" y="2286000"/>
-            <a:ext cx="4572000" cy="457200"/>
+            <a:off x="548640" y="100584"/>
+            <a:ext cx="10972800" cy="274320"/>
           </a:xfrm>
           <a:prstGeom prst="rect">
             <a:avLst/>
@@ -5145,31 +4985,31 @@
           <a:p>
             <a:pPr algn="l">
               <a:spcAft>
-                <a:spcPts val="585"/>
-              </a:spcAft>
-            </a:pPr>
-            <a:r>
-              <a:rPr sz="1300" b="1" i="0">
-                <a:solidFill>
-                  <a:srgbClr val="0B2D5B"/>
+                <a:spcPts val="495"/>
+              </a:spcAft>
+            </a:pPr>
+            <a:r>
+              <a:rPr sz="1100" b="1" i="0">
+                <a:solidFill>
+                  <a:srgbClr val="FFFFFF"/>
                 </a:solidFill>
                 <a:latin typeface="Inter Tight"/>
               </a:rPr>
-              <a:t>MUTE</a:t>
-            </a:r>
-          </a:p>
-        </p:txBody>
-      </p:sp>
-      <p:sp>
-        <p:nvSpPr>
-          <p:cNvPr id="11" name="TextBox 10"/>
+              <a:t>TEACHER PAGE  ·  skipped when you present  ·  Lesson plan</a:t>
+            </a:r>
+          </a:p>
+        </p:txBody>
+      </p:sp>
+      <p:sp>
+        <p:nvSpPr>
+          <p:cNvPr id="4" name="TextBox 3"/>
           <p:cNvSpPr txBox="1"/>
           <p:nvPr/>
         </p:nvSpPr>
         <p:spPr>
           <a:xfrm>
-            <a:off x="6583680" y="2788920"/>
-            <a:ext cx="4572000" cy="3108960"/>
+            <a:off x="548640" y="685800"/>
+            <a:ext cx="10972800" cy="731520"/>
           </a:xfrm>
           <a:prstGeom prst="rect">
             <a:avLst/>
@@ -5184,65 +5024,453 @@
           <a:p>
             <a:pPr algn="l">
               <a:spcAft>
-                <a:spcPts val="855"/>
-              </a:spcAft>
-            </a:pPr>
-            <a:r>
-              <a:rPr sz="1900" b="0" i="0">
+                <a:spcPts val="1530"/>
+              </a:spcAft>
+            </a:pPr>
+            <a:r>
+              <a:rPr sz="3400" b="1" i="0">
                 <a:solidFill>
                   <a:srgbClr val="1C1B19"/>
                 </a:solidFill>
                 <a:latin typeface="Source Serif 4"/>
               </a:rPr>
-              <a:t>Leaves me feeling not enough</a:t>
-            </a:r>
-          </a:p>
-          <a:p>
-            <a:pPr algn="l">
-              <a:spcAft>
-                <a:spcPts val="855"/>
-              </a:spcAft>
-            </a:pPr>
-            <a:r>
-              <a:rPr sz="1900" b="0" i="0">
+              <a:t>The Comparison Trap</a:t>
+            </a:r>
+          </a:p>
+        </p:txBody>
+      </p:sp>
+      <p:sp>
+        <p:nvSpPr>
+          <p:cNvPr id="5" name="TextBox 4"/>
+          <p:cNvSpPr txBox="1"/>
+          <p:nvPr/>
+        </p:nvSpPr>
+        <p:spPr>
+          <a:xfrm>
+            <a:off x="548640" y="1325880"/>
+            <a:ext cx="10972800" cy="365760"/>
+          </a:xfrm>
+          <a:prstGeom prst="rect">
+            <a:avLst/>
+          </a:prstGeom>
+          <a:noFill/>
+        </p:spPr>
+        <p:txBody>
+          <a:bodyPr wrap="square" anchor="t" lIns="0" rIns="0" tIns="0" bIns="0">
+            <a:spAutoFit/>
+          </a:bodyPr>
+          <a:lstStyle/>
+          <a:p>
+            <a:pPr algn="l">
+              <a:spcAft>
+                <a:spcPts val="630"/>
+              </a:spcAft>
+            </a:pPr>
+            <a:r>
+              <a:rPr sz="1400" b="0" i="0">
+                <a:solidFill>
+                  <a:srgbClr val="5D5A54"/>
+                </a:solidFill>
+                <a:latin typeface="Inter Tight"/>
+              </a:rPr>
+              <a:t>Upper School  ·  45 minutes (20-minute advisory version below)  ·  Health class, advisory, or a counselor-led group</a:t>
+            </a:r>
+          </a:p>
+        </p:txBody>
+      </p:sp>
+      <p:sp>
+        <p:nvSpPr>
+          <p:cNvPr id="6" name="TextBox 5"/>
+          <p:cNvSpPr txBox="1"/>
+          <p:nvPr/>
+        </p:nvSpPr>
+        <p:spPr>
+          <a:xfrm>
+            <a:off x="548640" y="1828800"/>
+            <a:ext cx="5120640" cy="4389120"/>
+          </a:xfrm>
+          <a:prstGeom prst="rect">
+            <a:avLst/>
+          </a:prstGeom>
+          <a:noFill/>
+        </p:spPr>
+        <p:txBody>
+          <a:bodyPr wrap="square" anchor="t" lIns="0" rIns="0" tIns="0" bIns="0">
+            <a:spAutoFit/>
+          </a:bodyPr>
+          <a:lstStyle/>
+          <a:p>
+            <a:pPr algn="l">
+              <a:spcAft>
+                <a:spcPts val="675"/>
+              </a:spcAft>
+            </a:pPr>
+            <a:r>
+              <a:rPr sz="1100" b="1" i="0">
+                <a:solidFill>
+                  <a:srgbClr val="0B2D5B"/>
+                </a:solidFill>
+                <a:latin typeface="Inter Tight"/>
+              </a:rPr>
+              <a:t>GOAL</a:t>
+            </a:r>
+          </a:p>
+          <a:p>
+            <a:pPr algn="l">
+              <a:spcAft>
+                <a:spcPts val="675"/>
+              </a:spcAft>
+            </a:pPr>
+            <a:r>
+              <a:rPr sz="1500" b="0" i="0">
                 <a:solidFill>
                   <a:srgbClr val="1C1B19"/>
                 </a:solidFill>
                 <a:latin typeface="Source Serif 4"/>
               </a:rPr>
-              <a:t>Leaves me feeling left out</a:t>
-            </a:r>
-          </a:p>
-          <a:p>
-            <a:pPr algn="l">
-              <a:spcAft>
-                <a:spcPts val="855"/>
-              </a:spcAft>
-            </a:pPr>
-            <a:r>
-              <a:rPr sz="1900" b="0" i="0">
+              <a:t>Students can explain why comparing to a feed feels worse than reality (the highlight filter and hidden struggle), use a four-question check on a post that stings, and choose one change to what they see.</a:t>
+            </a:r>
+          </a:p>
+          <a:p>
+            <a:pPr algn="l">
+              <a:spcAft>
+                <a:spcPts val="675"/>
+              </a:spcAft>
+            </a:pPr>
+            <a:r>
+              <a:rPr sz="1500" b="0" i="0">
                 <a:solidFill>
                   <a:srgbClr val="1C1B19"/>
                 </a:solidFill>
                 <a:latin typeface="Source Serif 4"/>
               </a:rPr>
-              <a:t>Makes me want to buy something to fix myself</a:t>
-            </a:r>
-          </a:p>
-          <a:p>
-            <a:pPr algn="l">
-              <a:spcAft>
-                <a:spcPts val="855"/>
-              </a:spcAft>
-            </a:pPr>
-            <a:r>
-              <a:rPr sz="1900" b="0" i="0">
+              <a:t/>
+            </a:r>
+          </a:p>
+          <a:p>
+            <a:pPr algn="l">
+              <a:spcAft>
+                <a:spcPts val="675"/>
+              </a:spcAft>
+            </a:pPr>
+            <a:r>
+              <a:rPr sz="1100" b="1" i="0">
+                <a:solidFill>
+                  <a:srgbClr val="0B2D5B"/>
+                </a:solidFill>
+                <a:latin typeface="Inter Tight"/>
+              </a:rPr>
+              <a:t>MATERIALS</a:t>
+            </a:r>
+          </a:p>
+          <a:p>
+            <a:pPr algn="l">
+              <a:spcAft>
+                <a:spcPts val="675"/>
+              </a:spcAft>
+            </a:pPr>
+            <a:r>
+              <a:rPr sz="1500" b="0" i="0">
                 <a:solidFill>
                   <a:srgbClr val="1C1B19"/>
                 </a:solidFill>
                 <a:latin typeface="Source Serif 4"/>
               </a:rPr>
-              <a:t>Leaves me anxious or angry</a:t>
+              <a:t>Scrap paper for the opening guess</a:t>
+            </a:r>
+          </a:p>
+          <a:p>
+            <a:pPr algn="l">
+              <a:spcAft>
+                <a:spcPts val="675"/>
+              </a:spcAft>
+            </a:pPr>
+            <a:r>
+              <a:rPr sz="1500" b="0" i="0">
+                <a:solidFill>
+                  <a:srgbClr val="1C1B19"/>
+                </a:solidFill>
+                <a:latin typeface="Source Serif 4"/>
+              </a:rPr>
+              <a:t>Index cards for the private account audit</a:t>
+            </a:r>
+          </a:p>
+          <a:p>
+            <a:pPr algn="l">
+              <a:spcAft>
+                <a:spcPts val="675"/>
+              </a:spcAft>
+            </a:pPr>
+            <a:r>
+              <a:rPr sz="1500" b="0" i="0">
+                <a:solidFill>
+                  <a:srgbClr val="1C1B19"/>
+                </a:solidFill>
+                <a:latin typeface="Source Serif 4"/>
+              </a:rPr>
+              <a:t>The take-home link (last slide) to share after class</a:t>
+            </a:r>
+          </a:p>
+        </p:txBody>
+      </p:sp>
+      <p:sp>
+        <p:nvSpPr>
+          <p:cNvPr id="7" name="TextBox 6"/>
+          <p:cNvSpPr txBox="1"/>
+          <p:nvPr/>
+        </p:nvSpPr>
+        <p:spPr>
+          <a:xfrm>
+            <a:off x="6126480" y="1828800"/>
+            <a:ext cx="5486400" cy="4389120"/>
+          </a:xfrm>
+          <a:prstGeom prst="rect">
+            <a:avLst/>
+          </a:prstGeom>
+          <a:noFill/>
+        </p:spPr>
+        <p:txBody>
+          <a:bodyPr wrap="square" anchor="t" lIns="0" rIns="0" tIns="0" bIns="0">
+            <a:spAutoFit/>
+          </a:bodyPr>
+          <a:lstStyle/>
+          <a:p>
+            <a:pPr algn="l">
+              <a:spcAft>
+                <a:spcPts val="630"/>
+              </a:spcAft>
+            </a:pPr>
+            <a:r>
+              <a:rPr sz="1100" b="1" i="0">
+                <a:solidFill>
+                  <a:srgbClr val="0B2D5B"/>
+                </a:solidFill>
+                <a:latin typeface="Inter Tight"/>
+              </a:rPr>
+              <a:t>FLOW</a:t>
+            </a:r>
+          </a:p>
+          <a:p>
+            <a:pPr algn="l">
+              <a:spcAft>
+                <a:spcPts val="630"/>
+              </a:spcAft>
+            </a:pPr>
+            <a:r>
+              <a:rPr sz="1300" b="1" i="0">
+                <a:solidFill>
+                  <a:srgbClr val="F47B20"/>
+                </a:solidFill>
+                <a:latin typeface="Inter Tight"/>
+              </a:rPr>
+              <a:t>5 min   </a:t>
+            </a:r>
+            <a:r>
+              <a:rPr sz="1400" b="0" i="0">
+                <a:solidFill>
+                  <a:srgbClr val="1C1B19"/>
+                </a:solidFill>
+                <a:latin typeface="Source Serif 4"/>
+              </a:rPr>
+              <a:t>The guess (anonymous tally)</a:t>
+            </a:r>
+          </a:p>
+          <a:p>
+            <a:pPr algn="l">
+              <a:spcAft>
+                <a:spcPts val="630"/>
+              </a:spcAft>
+            </a:pPr>
+            <a:r>
+              <a:rPr sz="1300" b="1" i="0">
+                <a:solidFill>
+                  <a:srgbClr val="F47B20"/>
+                </a:solidFill>
+                <a:latin typeface="Inter Tight"/>
+              </a:rPr>
+              <a:t>8 min   </a:t>
+            </a:r>
+            <a:r>
+              <a:rPr sz="1400" b="0" i="0">
+                <a:solidFill>
+                  <a:srgbClr val="1C1B19"/>
+                </a:solidFill>
+                <a:latin typeface="Source Serif 4"/>
+              </a:rPr>
+              <a:t>The highlight filter</a:t>
+            </a:r>
+          </a:p>
+          <a:p>
+            <a:pPr algn="l">
+              <a:spcAft>
+                <a:spcPts val="630"/>
+              </a:spcAft>
+            </a:pPr>
+            <a:r>
+              <a:rPr sz="1300" b="1" i="0">
+                <a:solidFill>
+                  <a:srgbClr val="F47B20"/>
+                </a:solidFill>
+                <a:latin typeface="Inter Tight"/>
+              </a:rPr>
+              <a:t>10 min   </a:t>
+            </a:r>
+            <a:r>
+              <a:rPr sz="1400" b="0" i="0">
+                <a:solidFill>
+                  <a:srgbClr val="1C1B19"/>
+                </a:solidFill>
+                <a:latin typeface="Source Serif 4"/>
+              </a:rPr>
+              <a:t>The four-question check on a sample post</a:t>
+            </a:r>
+          </a:p>
+          <a:p>
+            <a:pPr algn="l">
+              <a:spcAft>
+                <a:spcPts val="630"/>
+              </a:spcAft>
+            </a:pPr>
+            <a:r>
+              <a:rPr sz="1300" b="1" i="0">
+                <a:solidFill>
+                  <a:srgbClr val="F47B20"/>
+                </a:solidFill>
+                <a:latin typeface="Inter Tight"/>
+              </a:rPr>
+              <a:t>7 min   </a:t>
+            </a:r>
+            <a:r>
+              <a:rPr sz="1400" b="0" i="0">
+                <a:solidFill>
+                  <a:srgbClr val="1C1B19"/>
+                </a:solidFill>
+                <a:latin typeface="Source Serif 4"/>
+              </a:rPr>
+              <a:t>Private account audit</a:t>
+            </a:r>
+          </a:p>
+          <a:p>
+            <a:pPr algn="l">
+              <a:spcAft>
+                <a:spcPts val="630"/>
+              </a:spcAft>
+            </a:pPr>
+            <a:r>
+              <a:rPr sz="1300" b="1" i="0">
+                <a:solidFill>
+                  <a:srgbClr val="F47B20"/>
+                </a:solidFill>
+                <a:latin typeface="Inter Tight"/>
+              </a:rPr>
+              <a:t>8 min   </a:t>
+            </a:r>
+            <a:r>
+              <a:rPr sz="1400" b="0" i="0">
+                <a:solidFill>
+                  <a:srgbClr val="1C1B19"/>
+                </a:solidFill>
+                <a:latin typeface="Source Serif 4"/>
+              </a:rPr>
+              <a:t>Three moments (small groups)</a:t>
+            </a:r>
+          </a:p>
+          <a:p>
+            <a:pPr algn="l">
+              <a:spcAft>
+                <a:spcPts val="630"/>
+              </a:spcAft>
+            </a:pPr>
+            <a:r>
+              <a:rPr sz="1300" b="1" i="0">
+                <a:solidFill>
+                  <a:srgbClr val="F47B20"/>
+                </a:solidFill>
+                <a:latin typeface="Inter Tight"/>
+              </a:rPr>
+              <a:t>5 min   </a:t>
+            </a:r>
+            <a:r>
+              <a:rPr sz="1400" b="0" i="0">
+                <a:solidFill>
+                  <a:srgbClr val="1C1B19"/>
+                </a:solidFill>
+                <a:latin typeface="Source Serif 4"/>
+              </a:rPr>
+              <a:t>Comparison you didn't pick (optional reflection)</a:t>
+            </a:r>
+          </a:p>
+          <a:p>
+            <a:pPr algn="l">
+              <a:spcAft>
+                <a:spcPts val="630"/>
+              </a:spcAft>
+            </a:pPr>
+            <a:r>
+              <a:rPr sz="1300" b="1" i="0">
+                <a:solidFill>
+                  <a:srgbClr val="F47B20"/>
+                </a:solidFill>
+                <a:latin typeface="Inter Tight"/>
+              </a:rPr>
+              <a:t>2 min   </a:t>
+            </a:r>
+            <a:r>
+              <a:rPr sz="1400" b="0" i="0">
+                <a:solidFill>
+                  <a:srgbClr val="1C1B19"/>
+                </a:solidFill>
+                <a:latin typeface="Source Serif 4"/>
+              </a:rPr>
+              <a:t>One change, and the take-home link</a:t>
+            </a:r>
+          </a:p>
+          <a:p>
+            <a:pPr algn="l">
+              <a:spcAft>
+                <a:spcPts val="630"/>
+              </a:spcAft>
+            </a:pPr>
+            <a:r>
+              <a:rPr sz="1400" b="0" i="0">
+                <a:solidFill>
+                  <a:srgbClr val="1C1B19"/>
+                </a:solidFill>
+                <a:latin typeface="Source Serif 4"/>
+              </a:rPr>
+              <a:t/>
+            </a:r>
+          </a:p>
+          <a:p>
+            <a:pPr algn="l">
+              <a:spcAft>
+                <a:spcPts val="630"/>
+              </a:spcAft>
+            </a:pPr>
+            <a:r>
+              <a:rPr sz="1100" b="1" i="0">
+                <a:solidFill>
+                  <a:srgbClr val="0B2D5B"/>
+                </a:solidFill>
+                <a:latin typeface="Inter Tight"/>
+              </a:rPr>
+              <a:t>SHORT ON TIME (20-MINUTE ADVISORY)</a:t>
+            </a:r>
+          </a:p>
+          <a:p>
+            <a:pPr algn="l">
+              <a:spcAft>
+                <a:spcPts val="630"/>
+              </a:spcAft>
+            </a:pPr>
+            <a:r>
+              <a:rPr sz="1400" b="0" i="0">
+                <a:solidFill>
+                  <a:srgbClr val="1C1B19"/>
+                </a:solidFill>
+                <a:latin typeface="Source Serif 4"/>
+              </a:rPr>
+              <a:t>The guess (5), the four-question check (10), one change and the link (5).</a:t>
             </a:r>
           </a:p>
         </p:txBody>
@@ -5255,7 +5483,1661 @@
 </p:sld>
 </file>
 
-<file path=ppt/slides/slide11.xml><?xml version="1.0" encoding="utf-8"?>
+<file path=ppt/slides/slide12.xml><?xml version="1.0" encoding="utf-8"?>
+<p:sld xmlns:a="http://schemas.openxmlformats.org/drawingml/2006/main" xmlns:p="http://schemas.openxmlformats.org/presentationml/2006/main" xmlns:r="http://schemas.openxmlformats.org/officeDocument/2006/relationships" show="0">
+  <p:cSld>
+    <p:bg>
+      <p:bgPr>
+        <a:solidFill>
+          <a:srgbClr val="EEEBE4"/>
+        </a:solidFill>
+        <a:effectLst/>
+      </p:bgPr>
+    </p:bg>
+    <p:spTree>
+      <p:nvGrpSpPr>
+        <p:cNvPr id="1" name=""/>
+        <p:cNvGrpSpPr/>
+        <p:nvPr/>
+      </p:nvGrpSpPr>
+      <p:grpSpPr/>
+      <p:sp>
+        <p:nvSpPr>
+          <p:cNvPr id="2" name="Rectangle 1"/>
+          <p:cNvSpPr/>
+          <p:nvPr/>
+        </p:nvSpPr>
+        <p:spPr>
+          <a:xfrm>
+            <a:off x="0" y="0"/>
+            <a:ext cx="12191695" cy="384048"/>
+          </a:xfrm>
+          <a:prstGeom prst="rect">
+            <a:avLst/>
+          </a:prstGeom>
+          <a:solidFill>
+            <a:srgbClr val="0B2D5B"/>
+          </a:solidFill>
+          <a:ln>
+            <a:noFill/>
+          </a:ln>
+          <a:effectLst/>
+        </p:spPr>
+        <p:style>
+          <a:lnRef idx="1">
+            <a:schemeClr val="accent1"/>
+          </a:lnRef>
+          <a:fillRef idx="3">
+            <a:schemeClr val="accent1"/>
+          </a:fillRef>
+          <a:effectRef idx="2">
+            <a:schemeClr val="accent1"/>
+          </a:effectRef>
+          <a:fontRef idx="minor">
+            <a:schemeClr val="lt1"/>
+          </a:fontRef>
+        </p:style>
+        <p:txBody>
+          <a:bodyPr rtlCol="0" anchor="ctr"/>
+          <a:lstStyle/>
+          <a:p>
+            <a:pPr algn="ctr"/>
+          </a:p>
+        </p:txBody>
+      </p:sp>
+      <p:sp>
+        <p:nvSpPr>
+          <p:cNvPr id="3" name="TextBox 2"/>
+          <p:cNvSpPr txBox="1"/>
+          <p:nvPr/>
+        </p:nvSpPr>
+        <p:spPr>
+          <a:xfrm>
+            <a:off x="548640" y="100584"/>
+            <a:ext cx="10972800" cy="274320"/>
+          </a:xfrm>
+          <a:prstGeom prst="rect">
+            <a:avLst/>
+          </a:prstGeom>
+          <a:noFill/>
+        </p:spPr>
+        <p:txBody>
+          <a:bodyPr wrap="square" anchor="t" lIns="0" rIns="0" tIns="0" bIns="0">
+            <a:spAutoFit/>
+          </a:bodyPr>
+          <a:lstStyle/>
+          <a:p>
+            <a:pPr algn="l">
+              <a:spcAft>
+                <a:spcPts val="495"/>
+              </a:spcAft>
+            </a:pPr>
+            <a:r>
+              <a:rPr sz="1100" b="1" i="0">
+                <a:solidFill>
+                  <a:srgbClr val="FFFFFF"/>
+                </a:solidFill>
+                <a:latin typeface="Inter Tight"/>
+              </a:rPr>
+              <a:t>TEACHER PAGE  ·  skipped when you present  ·  Before you teach</a:t>
+            </a:r>
+          </a:p>
+        </p:txBody>
+      </p:sp>
+      <p:sp>
+        <p:nvSpPr>
+          <p:cNvPr id="4" name="TextBox 3"/>
+          <p:cNvSpPr txBox="1"/>
+          <p:nvPr/>
+        </p:nvSpPr>
+        <p:spPr>
+          <a:xfrm>
+            <a:off x="548640" y="685800"/>
+            <a:ext cx="10972800" cy="640080"/>
+          </a:xfrm>
+          <a:prstGeom prst="rect">
+            <a:avLst/>
+          </a:prstGeom>
+          <a:noFill/>
+        </p:spPr>
+        <p:txBody>
+          <a:bodyPr wrap="square" anchor="t" lIns="0" rIns="0" tIns="0" bIns="0">
+            <a:spAutoFit/>
+          </a:bodyPr>
+          <a:lstStyle/>
+          <a:p>
+            <a:pPr algn="l">
+              <a:spcAft>
+                <a:spcPts val="1350"/>
+              </a:spcAft>
+            </a:pPr>
+            <a:r>
+              <a:rPr sz="3000" b="1" i="0">
+                <a:solidFill>
+                  <a:srgbClr val="1C1B19"/>
+                </a:solidFill>
+                <a:latin typeface="Source Serif 4"/>
+              </a:rPr>
+              <a:t>Before you teach</a:t>
+            </a:r>
+          </a:p>
+        </p:txBody>
+      </p:sp>
+      <p:sp>
+        <p:nvSpPr>
+          <p:cNvPr id="5" name="TextBox 4"/>
+          <p:cNvSpPr txBox="1"/>
+          <p:nvPr/>
+        </p:nvSpPr>
+        <p:spPr>
+          <a:xfrm>
+            <a:off x="548640" y="1463040"/>
+            <a:ext cx="5394960" cy="4937760"/>
+          </a:xfrm>
+          <a:prstGeom prst="rect">
+            <a:avLst/>
+          </a:prstGeom>
+          <a:noFill/>
+        </p:spPr>
+        <p:txBody>
+          <a:bodyPr wrap="square" anchor="t" lIns="0" rIns="0" tIns="0" bIns="0">
+            <a:spAutoFit/>
+          </a:bodyPr>
+          <a:lstStyle/>
+          <a:p>
+            <a:pPr algn="l">
+              <a:spcAft>
+                <a:spcPts val="585"/>
+              </a:spcAft>
+            </a:pPr>
+            <a:r>
+              <a:rPr sz="1500" b="1" i="0">
+                <a:solidFill>
+                  <a:srgbClr val="1C1B19"/>
+                </a:solidFill>
+                <a:latin typeface="Source Serif 4"/>
+              </a:rPr>
+              <a:t>Seniors in decision season.</a:t>
+            </a:r>
+          </a:p>
+          <a:p>
+            <a:pPr algn="l">
+              <a:spcAft>
+                <a:spcPts val="585"/>
+              </a:spcAft>
+            </a:pPr>
+            <a:r>
+              <a:rPr sz="1300" b="0" i="0">
+                <a:solidFill>
+                  <a:srgbClr val="1C1B19"/>
+                </a:solidFill>
+                <a:latin typeface="Source Serif 4"/>
+              </a:rPr>
+              <a:t>In December and March, acceptance posts hit hard. Don't ask anyone to share where they applied or heard back.</a:t>
+            </a:r>
+          </a:p>
+          <a:p>
+            <a:pPr algn="l">
+              <a:spcAft>
+                <a:spcPts val="585"/>
+              </a:spcAft>
+            </a:pPr>
+            <a:r>
+              <a:rPr sz="1300" b="0" i="0">
+                <a:solidFill>
+                  <a:srgbClr val="1C1B19"/>
+                </a:solidFill>
+                <a:latin typeface="Source Serif 4"/>
+              </a:rPr>
+              <a:t/>
+            </a:r>
+          </a:p>
+          <a:p>
+            <a:pPr algn="l">
+              <a:spcAft>
+                <a:spcPts val="585"/>
+              </a:spcAft>
+            </a:pPr>
+            <a:r>
+              <a:rPr sz="1500" b="1" i="0">
+                <a:solidFill>
+                  <a:srgbClr val="1C1B19"/>
+                </a:solidFill>
+                <a:latin typeface="Source Serif 4"/>
+              </a:rPr>
+              <a:t>Body comparison is close to the surface.</a:t>
+            </a:r>
+          </a:p>
+          <a:p>
+            <a:pPr algn="l">
+              <a:spcAft>
+                <a:spcPts val="585"/>
+              </a:spcAft>
+            </a:pPr>
+            <a:r>
+              <a:rPr sz="1300" b="0" i="0">
+                <a:solidFill>
+                  <a:srgbClr val="1C1B19"/>
+                </a:solidFill>
+                <a:latin typeface="Source Serif 4"/>
+              </a:rPr>
+              <a:t>The fitness-account example can land hard for students with eating concerns. Keep it about the feeling and the inputs, never weights or bodies. If a student seems to be struggling, connect them with a counselor afterward.</a:t>
+            </a:r>
+          </a:p>
+          <a:p>
+            <a:pPr algn="l">
+              <a:spcAft>
+                <a:spcPts val="585"/>
+              </a:spcAft>
+            </a:pPr>
+            <a:r>
+              <a:rPr sz="1300" b="0" i="0">
+                <a:solidFill>
+                  <a:srgbClr val="1C1B19"/>
+                </a:solidFill>
+                <a:latin typeface="Source Serif 4"/>
+              </a:rPr>
+              <a:t/>
+            </a:r>
+          </a:p>
+          <a:p>
+            <a:pPr algn="l">
+              <a:spcAft>
+                <a:spcPts val="585"/>
+              </a:spcAft>
+            </a:pPr>
+            <a:r>
+              <a:rPr sz="1500" b="1" i="0">
+                <a:solidFill>
+                  <a:srgbClr val="1C1B19"/>
+                </a:solidFill>
+                <a:latin typeface="Source Serif 4"/>
+              </a:rPr>
+              <a:t>Keep the audit private.</a:t>
+            </a:r>
+          </a:p>
+          <a:p>
+            <a:pPr algn="l">
+              <a:spcAft>
+                <a:spcPts val="585"/>
+              </a:spcAft>
+            </a:pPr>
+            <a:r>
+              <a:rPr sz="1300" b="0" i="0">
+                <a:solidFill>
+                  <a:srgbClr val="1C1B19"/>
+                </a:solidFill>
+                <a:latin typeface="Source Serif 4"/>
+              </a:rPr>
+              <a:t>Nobody shares which accounts they follow or mute. The card goes home with them.</a:t>
+            </a:r>
+          </a:p>
+          <a:p>
+            <a:pPr algn="l">
+              <a:spcAft>
+                <a:spcPts val="585"/>
+              </a:spcAft>
+            </a:pPr>
+            <a:r>
+              <a:rPr sz="1300" b="0" i="0">
+                <a:solidFill>
+                  <a:srgbClr val="1C1B19"/>
+                </a:solidFill>
+                <a:latin typeface="Source Serif 4"/>
+              </a:rPr>
+              <a:t/>
+            </a:r>
+          </a:p>
+        </p:txBody>
+      </p:sp>
+      <p:sp>
+        <p:nvSpPr>
+          <p:cNvPr id="6" name="TextBox 5"/>
+          <p:cNvSpPr txBox="1"/>
+          <p:nvPr/>
+        </p:nvSpPr>
+        <p:spPr>
+          <a:xfrm>
+            <a:off x="6217920" y="1463040"/>
+            <a:ext cx="5394960" cy="4937760"/>
+          </a:xfrm>
+          <a:prstGeom prst="rect">
+            <a:avLst/>
+          </a:prstGeom>
+          <a:noFill/>
+        </p:spPr>
+        <p:txBody>
+          <a:bodyPr wrap="square" anchor="t" lIns="0" rIns="0" tIns="0" bIns="0">
+            <a:spAutoFit/>
+          </a:bodyPr>
+          <a:lstStyle/>
+          <a:p>
+            <a:pPr algn="l">
+              <a:spcAft>
+                <a:spcPts val="585"/>
+              </a:spcAft>
+            </a:pPr>
+            <a:r>
+              <a:rPr sz="1500" b="1" i="0">
+                <a:solidFill>
+                  <a:srgbClr val="1C1B19"/>
+                </a:solidFill>
+                <a:latin typeface="Source Serif 4"/>
+              </a:rPr>
+              <a:t>Families compare differently.</a:t>
+            </a:r>
+          </a:p>
+          <a:p>
+            <a:pPr algn="l">
+              <a:spcAft>
+                <a:spcPts val="585"/>
+              </a:spcAft>
+            </a:pPr>
+            <a:r>
+              <a:rPr sz="1300" b="0" i="0">
+                <a:solidFill>
+                  <a:srgbClr val="1C1B19"/>
+                </a:solidFill>
+                <a:latin typeface="Source Serif 4"/>
+              </a:rPr>
+              <a:t>In some families, comparing to a sibling or cousin is how high hopes get said out loud. In others it never comes up. Present both as normal. The reflection is private.</a:t>
+            </a:r>
+          </a:p>
+          <a:p>
+            <a:pPr algn="l">
+              <a:spcAft>
+                <a:spcPts val="585"/>
+              </a:spcAft>
+            </a:pPr>
+            <a:r>
+              <a:rPr sz="1300" b="0" i="0">
+                <a:solidFill>
+                  <a:srgbClr val="1C1B19"/>
+                </a:solidFill>
+                <a:latin typeface="Source Serif 4"/>
+              </a:rPr>
+              <a:t/>
+            </a:r>
+          </a:p>
+          <a:p>
+            <a:pPr algn="l">
+              <a:spcAft>
+                <a:spcPts val="585"/>
+              </a:spcAft>
+            </a:pPr>
+            <a:r>
+              <a:rPr sz="1500" b="1" i="0">
+                <a:solidFill>
+                  <a:srgbClr val="1C1B19"/>
+                </a:solidFill>
+                <a:latin typeface="Source Serif 4"/>
+              </a:rPr>
+              <a:t>Don't preach quitting social media.</a:t>
+            </a:r>
+          </a:p>
+          <a:p>
+            <a:pPr algn="l">
+              <a:spcAft>
+                <a:spcPts val="585"/>
+              </a:spcAft>
+            </a:pPr>
+            <a:r>
+              <a:rPr sz="1300" b="0" i="0">
+                <a:solidFill>
+                  <a:srgbClr val="1C1B19"/>
+                </a:solidFill>
+                <a:latin typeface="Source Serif 4"/>
+              </a:rPr>
+              <a:t>Most students won't, and the research supports limits and better inputs, not only full breaks. Meet them there.</a:t>
+            </a:r>
+          </a:p>
+          <a:p>
+            <a:pPr algn="l">
+              <a:spcAft>
+                <a:spcPts val="585"/>
+              </a:spcAft>
+            </a:pPr>
+            <a:r>
+              <a:rPr sz="1300" b="0" i="0">
+                <a:solidFill>
+                  <a:srgbClr val="1C1B19"/>
+                </a:solidFill>
+                <a:latin typeface="Source Serif 4"/>
+              </a:rPr>
+              <a:t/>
+            </a:r>
+          </a:p>
+          <a:p>
+            <a:pPr algn="l">
+              <a:spcAft>
+                <a:spcPts val="585"/>
+              </a:spcAft>
+            </a:pPr>
+            <a:r>
+              <a:rPr sz="1500" b="1" i="0">
+                <a:solidFill>
+                  <a:srgbClr val="1C1B19"/>
+                </a:solidFill>
+                <a:latin typeface="Source Serif 4"/>
+              </a:rPr>
+              <a:t>If someone is being targeted online.</a:t>
+            </a:r>
+          </a:p>
+          <a:p>
+            <a:pPr algn="l">
+              <a:spcAft>
+                <a:spcPts val="585"/>
+              </a:spcAft>
+            </a:pPr>
+            <a:r>
+              <a:rPr sz="1300" b="0" i="0">
+                <a:solidFill>
+                  <a:srgbClr val="1C1B19"/>
+                </a:solidFill>
+                <a:latin typeface="Source Serif 4"/>
+              </a:rPr>
+              <a:t>Bullying or threats are a counselor conversation that day, not a discussion topic.</a:t>
+            </a:r>
+          </a:p>
+          <a:p>
+            <a:pPr algn="l">
+              <a:spcAft>
+                <a:spcPts val="585"/>
+              </a:spcAft>
+            </a:pPr>
+            <a:r>
+              <a:rPr sz="1300" b="0" i="0">
+                <a:solidFill>
+                  <a:srgbClr val="1C1B19"/>
+                </a:solidFill>
+                <a:latin typeface="Source Serif 4"/>
+              </a:rPr>
+              <a:t/>
+            </a:r>
+          </a:p>
+        </p:txBody>
+      </p:sp>
+    </p:spTree>
+  </p:cSld>
+  <p:clrMapOvr>
+    <a:masterClrMapping/>
+  </p:clrMapOvr>
+</p:sld>
+</file>
+
+<file path=ppt/slides/slide13.xml><?xml version="1.0" encoding="utf-8"?>
+<p:sld xmlns:a="http://schemas.openxmlformats.org/drawingml/2006/main" xmlns:p="http://schemas.openxmlformats.org/presentationml/2006/main" xmlns:r="http://schemas.openxmlformats.org/officeDocument/2006/relationships" show="0">
+  <p:cSld>
+    <p:bg>
+      <p:bgPr>
+        <a:solidFill>
+          <a:srgbClr val="EEEBE4"/>
+        </a:solidFill>
+        <a:effectLst/>
+      </p:bgPr>
+    </p:bg>
+    <p:spTree>
+      <p:nvGrpSpPr>
+        <p:cNvPr id="1" name=""/>
+        <p:cNvGrpSpPr/>
+        <p:nvPr/>
+      </p:nvGrpSpPr>
+      <p:grpSpPr/>
+      <p:sp>
+        <p:nvSpPr>
+          <p:cNvPr id="2" name="Rectangle 1"/>
+          <p:cNvSpPr/>
+          <p:nvPr/>
+        </p:nvSpPr>
+        <p:spPr>
+          <a:xfrm>
+            <a:off x="0" y="0"/>
+            <a:ext cx="12191695" cy="384048"/>
+          </a:xfrm>
+          <a:prstGeom prst="rect">
+            <a:avLst/>
+          </a:prstGeom>
+          <a:solidFill>
+            <a:srgbClr val="0B2D5B"/>
+          </a:solidFill>
+          <a:ln>
+            <a:noFill/>
+          </a:ln>
+          <a:effectLst/>
+        </p:spPr>
+        <p:style>
+          <a:lnRef idx="1">
+            <a:schemeClr val="accent1"/>
+          </a:lnRef>
+          <a:fillRef idx="3">
+            <a:schemeClr val="accent1"/>
+          </a:fillRef>
+          <a:effectRef idx="2">
+            <a:schemeClr val="accent1"/>
+          </a:effectRef>
+          <a:fontRef idx="minor">
+            <a:schemeClr val="lt1"/>
+          </a:fontRef>
+        </p:style>
+        <p:txBody>
+          <a:bodyPr rtlCol="0" anchor="ctr"/>
+          <a:lstStyle/>
+          <a:p>
+            <a:pPr algn="ctr"/>
+          </a:p>
+        </p:txBody>
+      </p:sp>
+      <p:sp>
+        <p:nvSpPr>
+          <p:cNvPr id="3" name="TextBox 2"/>
+          <p:cNvSpPr txBox="1"/>
+          <p:nvPr/>
+        </p:nvSpPr>
+        <p:spPr>
+          <a:xfrm>
+            <a:off x="548640" y="100584"/>
+            <a:ext cx="10972800" cy="274320"/>
+          </a:xfrm>
+          <a:prstGeom prst="rect">
+            <a:avLst/>
+          </a:prstGeom>
+          <a:noFill/>
+        </p:spPr>
+        <p:txBody>
+          <a:bodyPr wrap="square" anchor="t" lIns="0" rIns="0" tIns="0" bIns="0">
+            <a:spAutoFit/>
+          </a:bodyPr>
+          <a:lstStyle/>
+          <a:p>
+            <a:pPr algn="l">
+              <a:spcAft>
+                <a:spcPts val="495"/>
+              </a:spcAft>
+            </a:pPr>
+            <a:r>
+              <a:rPr sz="1100" b="1" i="0">
+                <a:solidFill>
+                  <a:srgbClr val="FFFFFF"/>
+                </a:solidFill>
+                <a:latin typeface="Inter Tight"/>
+              </a:rPr>
+              <a:t>TEACHER PAGE  ·  skipped when you present  ·  Every student in the room</a:t>
+            </a:r>
+          </a:p>
+        </p:txBody>
+      </p:sp>
+      <p:sp>
+        <p:nvSpPr>
+          <p:cNvPr id="4" name="TextBox 3"/>
+          <p:cNvSpPr txBox="1"/>
+          <p:nvPr/>
+        </p:nvSpPr>
+        <p:spPr>
+          <a:xfrm>
+            <a:off x="548640" y="685800"/>
+            <a:ext cx="10972800" cy="640080"/>
+          </a:xfrm>
+          <a:prstGeom prst="rect">
+            <a:avLst/>
+          </a:prstGeom>
+          <a:noFill/>
+        </p:spPr>
+        <p:txBody>
+          <a:bodyPr wrap="square" anchor="t" lIns="0" rIns="0" tIns="0" bIns="0">
+            <a:spAutoFit/>
+          </a:bodyPr>
+          <a:lstStyle/>
+          <a:p>
+            <a:pPr algn="l">
+              <a:spcAft>
+                <a:spcPts val="1350"/>
+              </a:spcAft>
+            </a:pPr>
+            <a:r>
+              <a:rPr sz="3000" b="1" i="0">
+                <a:solidFill>
+                  <a:srgbClr val="1C1B19"/>
+                </a:solidFill>
+                <a:latin typeface="Source Serif 4"/>
+              </a:rPr>
+              <a:t>Every student in the room</a:t>
+            </a:r>
+          </a:p>
+        </p:txBody>
+      </p:sp>
+      <p:sp>
+        <p:nvSpPr>
+          <p:cNvPr id="5" name="TextBox 4"/>
+          <p:cNvSpPr txBox="1"/>
+          <p:nvPr/>
+        </p:nvSpPr>
+        <p:spPr>
+          <a:xfrm>
+            <a:off x="548640" y="1325880"/>
+            <a:ext cx="10972800" cy="365760"/>
+          </a:xfrm>
+          <a:prstGeom prst="rect">
+            <a:avLst/>
+          </a:prstGeom>
+          <a:noFill/>
+        </p:spPr>
+        <p:txBody>
+          <a:bodyPr wrap="square" anchor="t" lIns="0" rIns="0" tIns="0" bIns="0">
+            <a:spAutoFit/>
+          </a:bodyPr>
+          <a:lstStyle/>
+          <a:p>
+            <a:pPr algn="l">
+              <a:spcAft>
+                <a:spcPts val="630"/>
+              </a:spcAft>
+            </a:pPr>
+            <a:r>
+              <a:rPr sz="1400" b="0" i="0">
+                <a:solidFill>
+                  <a:srgbClr val="5D5A54"/>
+                </a:solidFill>
+                <a:latin typeface="Inter Tight"/>
+              </a:rPr>
+              <a:t>Culture, family, identity, ability and money: what to keep in mind for this topic.</a:t>
+            </a:r>
+          </a:p>
+        </p:txBody>
+      </p:sp>
+      <p:sp>
+        <p:nvSpPr>
+          <p:cNvPr id="6" name="TextBox 5"/>
+          <p:cNvSpPr txBox="1"/>
+          <p:nvPr/>
+        </p:nvSpPr>
+        <p:spPr>
+          <a:xfrm>
+            <a:off x="548640" y="1828800"/>
+            <a:ext cx="5394960" cy="4572000"/>
+          </a:xfrm>
+          <a:prstGeom prst="rect">
+            <a:avLst/>
+          </a:prstGeom>
+          <a:noFill/>
+        </p:spPr>
+        <p:txBody>
+          <a:bodyPr wrap="square" anchor="t" lIns="0" rIns="0" tIns="0" bIns="0">
+            <a:spAutoFit/>
+          </a:bodyPr>
+          <a:lstStyle/>
+          <a:p>
+            <a:pPr algn="l">
+              <a:spcAft>
+                <a:spcPts val="585"/>
+              </a:spcAft>
+            </a:pPr>
+            <a:r>
+              <a:rPr sz="1500" b="1" i="0">
+                <a:solidFill>
+                  <a:srgbClr val="1C1B19"/>
+                </a:solidFill>
+                <a:latin typeface="Source Serif 4"/>
+              </a:rPr>
+              <a:t>"Is it a fair match?" carries the equity piece.</a:t>
+            </a:r>
+          </a:p>
+          <a:p>
+            <a:pPr algn="l">
+              <a:spcAft>
+                <a:spcPts val="585"/>
+              </a:spcAft>
+            </a:pPr>
+            <a:r>
+              <a:rPr sz="1300" b="0" i="0">
+                <a:solidFill>
+                  <a:srgbClr val="1C1B19"/>
+                </a:solidFill>
+                <a:latin typeface="Source Serif 4"/>
+              </a:rPr>
+              <a:t>Some students work, care for siblings, or have no paid summer options. Name that work as building something real (Jae's scenario), so the lesson doesn't treat a paid program as the standard.</a:t>
+            </a:r>
+          </a:p>
+          <a:p>
+            <a:pPr algn="l">
+              <a:spcAft>
+                <a:spcPts val="585"/>
+              </a:spcAft>
+            </a:pPr>
+            <a:r>
+              <a:rPr sz="1300" b="0" i="0">
+                <a:solidFill>
+                  <a:srgbClr val="1C1B19"/>
+                </a:solidFill>
+                <a:latin typeface="Source Serif 4"/>
+              </a:rPr>
+              <a:t/>
+            </a:r>
+          </a:p>
+          <a:p>
+            <a:pPr algn="l">
+              <a:spcAft>
+                <a:spcPts val="585"/>
+              </a:spcAft>
+            </a:pPr>
+            <a:r>
+              <a:rPr sz="1500" b="1" i="0">
+                <a:solidFill>
+                  <a:srgbClr val="1C1B19"/>
+                </a:solidFill>
+                <a:latin typeface="Source Serif 4"/>
+              </a:rPr>
+              <a:t>Families compare in different ways.</a:t>
+            </a:r>
+          </a:p>
+          <a:p>
+            <a:pPr algn="l">
+              <a:spcAft>
+                <a:spcPts val="585"/>
+              </a:spcAft>
+            </a:pPr>
+            <a:r>
+              <a:rPr sz="1300" b="0" i="0">
+                <a:solidFill>
+                  <a:srgbClr val="1C1B19"/>
+                </a:solidFill>
+                <a:latin typeface="Source Serif 4"/>
+              </a:rPr>
+              <a:t>Openly comparing to siblings or cousins is how some families show high hopes; others never mention achievement. Present both as normal and keep the reflection private. Avoid "In X families" generalizations.</a:t>
+            </a:r>
+          </a:p>
+          <a:p>
+            <a:pPr algn="l">
+              <a:spcAft>
+                <a:spcPts val="585"/>
+              </a:spcAft>
+            </a:pPr>
+            <a:r>
+              <a:rPr sz="1300" b="0" i="0">
+                <a:solidFill>
+                  <a:srgbClr val="1C1B19"/>
+                </a:solidFill>
+                <a:latin typeface="Source Serif 4"/>
+              </a:rPr>
+              <a:t/>
+            </a:r>
+          </a:p>
+          <a:p>
+            <a:pPr algn="l">
+              <a:spcAft>
+                <a:spcPts val="585"/>
+              </a:spcAft>
+            </a:pPr>
+            <a:r>
+              <a:rPr sz="1500" b="1" i="0">
+                <a:solidFill>
+                  <a:srgbClr val="1C1B19"/>
+                </a:solidFill>
+                <a:latin typeface="Source Serif 4"/>
+              </a:rPr>
+              <a:t>Who students see in their feeds.</a:t>
+            </a:r>
+          </a:p>
+          <a:p>
+            <a:pPr algn="l">
+              <a:spcAft>
+                <a:spcPts val="585"/>
+              </a:spcAft>
+            </a:pPr>
+            <a:r>
+              <a:rPr sz="1300" b="0" i="0">
+                <a:solidFill>
+                  <a:srgbClr val="1C1B19"/>
+                </a:solidFill>
+                <a:latin typeface="Source Serif 4"/>
+              </a:rPr>
+              <a:t>Students of color, LGBTQ+ students and disabled students may rarely see people like them, or may see them mocked. Following creators who share your identity is a valid "keep." Harassment aimed at identity is a counselor conversation that day.</a:t>
+            </a:r>
+          </a:p>
+          <a:p>
+            <a:pPr algn="l">
+              <a:spcAft>
+                <a:spcPts val="585"/>
+              </a:spcAft>
+            </a:pPr>
+            <a:r>
+              <a:rPr sz="1300" b="0" i="0">
+                <a:solidFill>
+                  <a:srgbClr val="1C1B19"/>
+                </a:solidFill>
+                <a:latin typeface="Source Serif 4"/>
+              </a:rPr>
+              <a:t/>
+            </a:r>
+          </a:p>
+        </p:txBody>
+      </p:sp>
+      <p:sp>
+        <p:nvSpPr>
+          <p:cNvPr id="7" name="TextBox 6"/>
+          <p:cNvSpPr txBox="1"/>
+          <p:nvPr/>
+        </p:nvSpPr>
+        <p:spPr>
+          <a:xfrm>
+            <a:off x="6217920" y="1828800"/>
+            <a:ext cx="5394960" cy="4572000"/>
+          </a:xfrm>
+          <a:prstGeom prst="rect">
+            <a:avLst/>
+          </a:prstGeom>
+          <a:noFill/>
+        </p:spPr>
+        <p:txBody>
+          <a:bodyPr wrap="square" anchor="t" lIns="0" rIns="0" tIns="0" bIns="0">
+            <a:spAutoFit/>
+          </a:bodyPr>
+          <a:lstStyle/>
+          <a:p>
+            <a:pPr algn="l">
+              <a:spcAft>
+                <a:spcPts val="585"/>
+              </a:spcAft>
+            </a:pPr>
+            <a:r>
+              <a:rPr sz="1500" b="1" i="0">
+                <a:solidFill>
+                  <a:srgbClr val="1C1B19"/>
+                </a:solidFill>
+                <a:latin typeface="Source Serif 4"/>
+              </a:rPr>
+              <a:t>Bodies.</a:t>
+            </a:r>
+          </a:p>
+          <a:p>
+            <a:pPr algn="l">
+              <a:spcAft>
+                <a:spcPts val="585"/>
+              </a:spcAft>
+            </a:pPr>
+            <a:r>
+              <a:rPr sz="1300" b="0" i="0">
+                <a:solidFill>
+                  <a:srgbClr val="1C1B19"/>
+                </a:solidFill>
+                <a:latin typeface="Source Serif 4"/>
+              </a:rPr>
+              <a:t>Keep every example about the after-feeling, never weight or shape. Students of every size and ability are in the room.</a:t>
+            </a:r>
+          </a:p>
+          <a:p>
+            <a:pPr algn="l">
+              <a:spcAft>
+                <a:spcPts val="585"/>
+              </a:spcAft>
+            </a:pPr>
+            <a:r>
+              <a:rPr sz="1300" b="0" i="0">
+                <a:solidFill>
+                  <a:srgbClr val="1C1B19"/>
+                </a:solidFill>
+                <a:latin typeface="Source Serif 4"/>
+              </a:rPr>
+              <a:t/>
+            </a:r>
+          </a:p>
+          <a:p>
+            <a:pPr algn="l">
+              <a:spcAft>
+                <a:spcPts val="585"/>
+              </a:spcAft>
+            </a:pPr>
+            <a:r>
+              <a:rPr sz="1500" b="1" i="0">
+                <a:solidFill>
+                  <a:srgbClr val="1C1B19"/>
+                </a:solidFill>
+                <a:latin typeface="Source Serif 4"/>
+              </a:rPr>
+              <a:t>Not everyone is online.</a:t>
+            </a:r>
+          </a:p>
+          <a:p>
+            <a:pPr algn="l">
+              <a:spcAft>
+                <a:spcPts val="585"/>
+              </a:spcAft>
+            </a:pPr>
+            <a:r>
+              <a:rPr sz="1300" b="0" i="0">
+                <a:solidFill>
+                  <a:srgbClr val="1C1B19"/>
+                </a:solidFill>
+                <a:latin typeface="Source Serif 4"/>
+              </a:rPr>
+              <a:t>Some families limit social media for religious, family or money reasons. Let those students apply the four questions to school, sports or family comparisons.</a:t>
+            </a:r>
+          </a:p>
+          <a:p>
+            <a:pPr algn="l">
+              <a:spcAft>
+                <a:spcPts val="585"/>
+              </a:spcAft>
+            </a:pPr>
+            <a:r>
+              <a:rPr sz="1300" b="0" i="0">
+                <a:solidFill>
+                  <a:srgbClr val="1C1B19"/>
+                </a:solidFill>
+                <a:latin typeface="Source Serif 4"/>
+              </a:rPr>
+              <a:t/>
+            </a:r>
+          </a:p>
+          <a:p>
+            <a:pPr algn="l">
+              <a:spcAft>
+                <a:spcPts val="585"/>
+              </a:spcAft>
+            </a:pPr>
+            <a:r>
+              <a:rPr sz="1500" b="1" i="0">
+                <a:solidFill>
+                  <a:srgbClr val="1C1B19"/>
+                </a:solidFill>
+                <a:latin typeface="Source Serif 4"/>
+              </a:rPr>
+              <a:t>No cost to any of the moves.</a:t>
+            </a:r>
+          </a:p>
+          <a:p>
+            <a:pPr algn="l">
+              <a:spcAft>
+                <a:spcPts val="585"/>
+              </a:spcAft>
+            </a:pPr>
+            <a:r>
+              <a:rPr sz="1300" b="0" i="0">
+                <a:solidFill>
+                  <a:srgbClr val="1C1B19"/>
+                </a:solidFill>
+                <a:latin typeface="Source Serif 4"/>
+              </a:rPr>
+              <a:t>Muting, hiding like counts and app limits are built into phones and apps. Nothing in the lesson requires a paid tool.</a:t>
+            </a:r>
+          </a:p>
+          <a:p>
+            <a:pPr algn="l">
+              <a:spcAft>
+                <a:spcPts val="585"/>
+              </a:spcAft>
+            </a:pPr>
+            <a:r>
+              <a:rPr sz="1300" b="0" i="0">
+                <a:solidFill>
+                  <a:srgbClr val="1C1B19"/>
+                </a:solidFill>
+                <a:latin typeface="Source Serif 4"/>
+              </a:rPr>
+              <a:t/>
+            </a:r>
+          </a:p>
+        </p:txBody>
+      </p:sp>
+    </p:spTree>
+  </p:cSld>
+  <p:clrMapOvr>
+    <a:masterClrMapping/>
+  </p:clrMapOvr>
+</p:sld>
+</file>
+
+<file path=ppt/slides/slide14.xml><?xml version="1.0" encoding="utf-8"?>
+<p:sld xmlns:a="http://schemas.openxmlformats.org/drawingml/2006/main" xmlns:p="http://schemas.openxmlformats.org/presentationml/2006/main" xmlns:r="http://schemas.openxmlformats.org/officeDocument/2006/relationships" show="0">
+  <p:cSld>
+    <p:bg>
+      <p:bgPr>
+        <a:solidFill>
+          <a:srgbClr val="EEEBE4"/>
+        </a:solidFill>
+        <a:effectLst/>
+      </p:bgPr>
+    </p:bg>
+    <p:spTree>
+      <p:nvGrpSpPr>
+        <p:cNvPr id="1" name=""/>
+        <p:cNvGrpSpPr/>
+        <p:nvPr/>
+      </p:nvGrpSpPr>
+      <p:grpSpPr/>
+      <p:sp>
+        <p:nvSpPr>
+          <p:cNvPr id="2" name="Rectangle 1"/>
+          <p:cNvSpPr/>
+          <p:nvPr/>
+        </p:nvSpPr>
+        <p:spPr>
+          <a:xfrm>
+            <a:off x="0" y="0"/>
+            <a:ext cx="12191695" cy="384048"/>
+          </a:xfrm>
+          <a:prstGeom prst="rect">
+            <a:avLst/>
+          </a:prstGeom>
+          <a:solidFill>
+            <a:srgbClr val="0B2D5B"/>
+          </a:solidFill>
+          <a:ln>
+            <a:noFill/>
+          </a:ln>
+          <a:effectLst/>
+        </p:spPr>
+        <p:style>
+          <a:lnRef idx="1">
+            <a:schemeClr val="accent1"/>
+          </a:lnRef>
+          <a:fillRef idx="3">
+            <a:schemeClr val="accent1"/>
+          </a:fillRef>
+          <a:effectRef idx="2">
+            <a:schemeClr val="accent1"/>
+          </a:effectRef>
+          <a:fontRef idx="minor">
+            <a:schemeClr val="lt1"/>
+          </a:fontRef>
+        </p:style>
+        <p:txBody>
+          <a:bodyPr rtlCol="0" anchor="ctr"/>
+          <a:lstStyle/>
+          <a:p>
+            <a:pPr algn="ctr"/>
+          </a:p>
+        </p:txBody>
+      </p:sp>
+      <p:sp>
+        <p:nvSpPr>
+          <p:cNvPr id="3" name="TextBox 2"/>
+          <p:cNvSpPr txBox="1"/>
+          <p:nvPr/>
+        </p:nvSpPr>
+        <p:spPr>
+          <a:xfrm>
+            <a:off x="548640" y="100584"/>
+            <a:ext cx="10972800" cy="274320"/>
+          </a:xfrm>
+          <a:prstGeom prst="rect">
+            <a:avLst/>
+          </a:prstGeom>
+          <a:noFill/>
+        </p:spPr>
+        <p:txBody>
+          <a:bodyPr wrap="square" anchor="t" lIns="0" rIns="0" tIns="0" bIns="0">
+            <a:spAutoFit/>
+          </a:bodyPr>
+          <a:lstStyle/>
+          <a:p>
+            <a:pPr algn="l">
+              <a:spcAft>
+                <a:spcPts val="495"/>
+              </a:spcAft>
+            </a:pPr>
+            <a:r>
+              <a:rPr sz="1100" b="1" i="0">
+                <a:solidFill>
+                  <a:srgbClr val="FFFFFF"/>
+                </a:solidFill>
+                <a:latin typeface="Inter Tight"/>
+              </a:rPr>
+              <a:t>TEACHER PAGE  ·  skipped when you present  ·  Background</a:t>
+            </a:r>
+          </a:p>
+        </p:txBody>
+      </p:sp>
+      <p:sp>
+        <p:nvSpPr>
+          <p:cNvPr id="4" name="TextBox 3"/>
+          <p:cNvSpPr txBox="1"/>
+          <p:nvPr/>
+        </p:nvSpPr>
+        <p:spPr>
+          <a:xfrm>
+            <a:off x="548640" y="685800"/>
+            <a:ext cx="10972800" cy="640080"/>
+          </a:xfrm>
+          <a:prstGeom prst="rect">
+            <a:avLst/>
+          </a:prstGeom>
+          <a:noFill/>
+        </p:spPr>
+        <p:txBody>
+          <a:bodyPr wrap="square" anchor="t" lIns="0" rIns="0" tIns="0" bIns="0">
+            <a:spAutoFit/>
+          </a:bodyPr>
+          <a:lstStyle/>
+          <a:p>
+            <a:pPr algn="l">
+              <a:spcAft>
+                <a:spcPts val="1350"/>
+              </a:spcAft>
+            </a:pPr>
+            <a:r>
+              <a:rPr sz="3000" b="1" i="0">
+                <a:solidFill>
+                  <a:srgbClr val="1C1B19"/>
+                </a:solidFill>
+                <a:latin typeface="Source Serif 4"/>
+              </a:rPr>
+              <a:t>What the research says</a:t>
+            </a:r>
+          </a:p>
+        </p:txBody>
+      </p:sp>
+      <p:sp>
+        <p:nvSpPr>
+          <p:cNvPr id="5" name="TextBox 4"/>
+          <p:cNvSpPr txBox="1"/>
+          <p:nvPr/>
+        </p:nvSpPr>
+        <p:spPr>
+          <a:xfrm>
+            <a:off x="548640" y="1463040"/>
+            <a:ext cx="5394960" cy="4937760"/>
+          </a:xfrm>
+          <a:prstGeom prst="rect">
+            <a:avLst/>
+          </a:prstGeom>
+          <a:noFill/>
+        </p:spPr>
+        <p:txBody>
+          <a:bodyPr wrap="square" anchor="t" lIns="0" rIns="0" tIns="0" bIns="0">
+            <a:spAutoFit/>
+          </a:bodyPr>
+          <a:lstStyle/>
+          <a:p>
+            <a:pPr algn="l">
+              <a:spcAft>
+                <a:spcPts val="585"/>
+              </a:spcAft>
+            </a:pPr>
+            <a:r>
+              <a:rPr sz="1300" b="0" i="0">
+                <a:solidFill>
+                  <a:srgbClr val="1C1B19"/>
+                </a:solidFill>
+                <a:latin typeface="Source Serif 4"/>
+              </a:rPr>
+              <a:t>People judge themselves by comparing to others, especially when there's no objective measure. For most of history the comparison group was a few dozen people you knew.</a:t>
+            </a:r>
+          </a:p>
+          <a:p>
+            <a:pPr algn="l">
+              <a:spcAft>
+                <a:spcPts val="585"/>
+              </a:spcAft>
+            </a:pPr>
+            <a:r>
+              <a:rPr sz="1050" b="0" i="0">
+                <a:solidFill>
+                  <a:srgbClr val="5D5A54"/>
+                </a:solidFill>
+                <a:latin typeface="Inter Tight"/>
+              </a:rPr>
+              <a:t>Festinger, 1954</a:t>
+            </a:r>
+          </a:p>
+          <a:p>
+            <a:pPr algn="l">
+              <a:spcAft>
+                <a:spcPts val="585"/>
+              </a:spcAft>
+            </a:pPr>
+            <a:r>
+              <a:rPr sz="1300" b="0" i="0">
+                <a:solidFill>
+                  <a:srgbClr val="1C1B19"/>
+                </a:solidFill>
+                <a:latin typeface="Source Serif 4"/>
+              </a:rPr>
+              <a:t>In a simulated Instagram feed, photos with more likes activated teens' reward circuitry, and teens were more likely to like photos that already had many likes, including risky ones.</a:t>
+            </a:r>
+          </a:p>
+          <a:p>
+            <a:pPr algn="l">
+              <a:spcAft>
+                <a:spcPts val="585"/>
+              </a:spcAft>
+            </a:pPr>
+            <a:r>
+              <a:rPr sz="1050" b="0" i="0">
+                <a:solidFill>
+                  <a:srgbClr val="5D5A54"/>
+                </a:solidFill>
+                <a:latin typeface="Inter Tight"/>
+              </a:rPr>
+              <a:t>Sherman et al., Psychological Science, 2016 (UCLA)</a:t>
+            </a:r>
+          </a:p>
+          <a:p>
+            <a:pPr algn="l">
+              <a:spcAft>
+                <a:spcPts val="585"/>
+              </a:spcAft>
+            </a:pPr>
+            <a:r>
+              <a:rPr sz="1300" b="0" i="0">
+                <a:solidFill>
+                  <a:srgbClr val="1C1B19"/>
+                </a:solidFill>
+                <a:latin typeface="Source Serif 4"/>
+              </a:rPr>
+              <a:t>People consistently underestimate how often peers feel sad, lonely or anxious. Those who underestimated more reported more loneliness.</a:t>
+            </a:r>
+          </a:p>
+          <a:p>
+            <a:pPr algn="l">
+              <a:spcAft>
+                <a:spcPts val="585"/>
+              </a:spcAft>
+            </a:pPr>
+            <a:r>
+              <a:rPr sz="1050" b="0" i="0">
+                <a:solidFill>
+                  <a:srgbClr val="5D5A54"/>
+                </a:solidFill>
+                <a:latin typeface="Inter Tight"/>
+              </a:rPr>
+              <a:t>Jordan et al., 2011 (Stanford)</a:t>
+            </a:r>
+          </a:p>
+        </p:txBody>
+      </p:sp>
+      <p:sp>
+        <p:nvSpPr>
+          <p:cNvPr id="6" name="TextBox 5"/>
+          <p:cNvSpPr txBox="1"/>
+          <p:nvPr/>
+        </p:nvSpPr>
+        <p:spPr>
+          <a:xfrm>
+            <a:off x="6217920" y="1463040"/>
+            <a:ext cx="5394960" cy="4937760"/>
+          </a:xfrm>
+          <a:prstGeom prst="rect">
+            <a:avLst/>
+          </a:prstGeom>
+          <a:noFill/>
+        </p:spPr>
+        <p:txBody>
+          <a:bodyPr wrap="square" anchor="t" lIns="0" rIns="0" tIns="0" bIns="0">
+            <a:spAutoFit/>
+          </a:bodyPr>
+          <a:lstStyle/>
+          <a:p>
+            <a:pPr algn="l">
+              <a:spcAft>
+                <a:spcPts val="585"/>
+              </a:spcAft>
+            </a:pPr>
+            <a:r>
+              <a:rPr sz="1300" b="0" i="0">
+                <a:solidFill>
+                  <a:srgbClr val="1C1B19"/>
+                </a:solidFill>
+                <a:latin typeface="Source Serif 4"/>
+              </a:rPr>
+              <a:t>Heavier Facebook users had lower self-esteem, explained by exposure to people who seemed to be doing better. Viewing one upbeat profile lowered how people felt about themselves.</a:t>
+            </a:r>
+          </a:p>
+          <a:p>
+            <a:pPr algn="l">
+              <a:spcAft>
+                <a:spcPts val="585"/>
+              </a:spcAft>
+            </a:pPr>
+            <a:r>
+              <a:rPr sz="1050" b="0" i="0">
+                <a:solidFill>
+                  <a:srgbClr val="5D5A54"/>
+                </a:solidFill>
+                <a:latin typeface="Inter Tight"/>
+              </a:rPr>
+              <a:t>Vogel et al., 2014</a:t>
+            </a:r>
+          </a:p>
+          <a:p>
+            <a:pPr algn="l">
+              <a:spcAft>
+                <a:spcPts val="585"/>
+              </a:spcAft>
+            </a:pPr>
+            <a:r>
+              <a:rPr sz="1300" b="0" i="0">
+                <a:solidFill>
+                  <a:srgbClr val="1C1B19"/>
+                </a:solidFill>
+                <a:latin typeface="Source Serif 4"/>
+              </a:rPr>
+              <a:t>143 college students limited Facebook, Instagram and Snapchat to 10 minutes each per day for three weeks and reported less loneliness and fewer depression symptoms. Small sample, a strong hint rather than the final word.</a:t>
+            </a:r>
+          </a:p>
+          <a:p>
+            <a:pPr algn="l">
+              <a:spcAft>
+                <a:spcPts val="585"/>
+              </a:spcAft>
+            </a:pPr>
+            <a:r>
+              <a:rPr sz="1050" b="0" i="0">
+                <a:solidFill>
+                  <a:srgbClr val="5D5A54"/>
+                </a:solidFill>
+                <a:latin typeface="Inter Tight"/>
+              </a:rPr>
+              <a:t>Hunt et al., 2018 (Penn)</a:t>
+            </a:r>
+          </a:p>
+          <a:p>
+            <a:pPr algn="l">
+              <a:spcAft>
+                <a:spcPts val="585"/>
+              </a:spcAft>
+            </a:pPr>
+            <a:r>
+              <a:rPr sz="1300" b="0" i="0">
+                <a:solidFill>
+                  <a:srgbClr val="1C1B19"/>
+                </a:solidFill>
+                <a:latin typeface="Source Serif 4"/>
+              </a:rPr>
+              <a:t>Young women who saw "Instagram vs reality" pairs felt better about their bodies than those who saw only the posed photos.</a:t>
+            </a:r>
+          </a:p>
+          <a:p>
+            <a:pPr algn="l">
+              <a:spcAft>
+                <a:spcPts val="585"/>
+              </a:spcAft>
+            </a:pPr>
+            <a:r>
+              <a:rPr sz="1050" b="0" i="0">
+                <a:solidFill>
+                  <a:srgbClr val="5D5A54"/>
+                </a:solidFill>
+                <a:latin typeface="Inter Tight"/>
+              </a:rPr>
+              <a:t>Tiggemann and Anderberg, 2020</a:t>
+            </a:r>
+          </a:p>
+        </p:txBody>
+      </p:sp>
+    </p:spTree>
+  </p:cSld>
+  <p:clrMapOvr>
+    <a:masterClrMapping/>
+  </p:clrMapOvr>
+</p:sld>
+</file>
+
+<file path=ppt/slides/slide2.xml><?xml version="1.0" encoding="utf-8"?>
+<p:sld xmlns:a="http://schemas.openxmlformats.org/drawingml/2006/main" xmlns:p="http://schemas.openxmlformats.org/presentationml/2006/main" xmlns:r="http://schemas.openxmlformats.org/officeDocument/2006/relationships">
+  <p:cSld>
+    <p:bg>
+      <p:bgPr>
+        <a:solidFill>
+          <a:srgbClr val="0B2D5B"/>
+        </a:solidFill>
+        <a:effectLst/>
+      </p:bgPr>
+    </p:bg>
+    <p:spTree>
+      <p:nvGrpSpPr>
+        <p:cNvPr id="1" name=""/>
+        <p:cNvGrpSpPr/>
+        <p:nvPr/>
+      </p:nvGrpSpPr>
+      <p:grpSpPr/>
+      <p:sp>
+        <p:nvSpPr>
+          <p:cNvPr id="2" name="Rectangle 1"/>
+          <p:cNvSpPr/>
+          <p:nvPr/>
+        </p:nvSpPr>
+        <p:spPr>
+          <a:xfrm>
+            <a:off x="548640" y="502920"/>
+            <a:ext cx="457200" cy="54864"/>
+          </a:xfrm>
+          <a:prstGeom prst="rect">
+            <a:avLst/>
+          </a:prstGeom>
+          <a:solidFill>
+            <a:srgbClr val="F47B20"/>
+          </a:solidFill>
+          <a:ln>
+            <a:noFill/>
+          </a:ln>
+          <a:effectLst/>
+        </p:spPr>
+        <p:style>
+          <a:lnRef idx="1">
+            <a:schemeClr val="accent1"/>
+          </a:lnRef>
+          <a:fillRef idx="3">
+            <a:schemeClr val="accent1"/>
+          </a:fillRef>
+          <a:effectRef idx="2">
+            <a:schemeClr val="accent1"/>
+          </a:effectRef>
+          <a:fontRef idx="minor">
+            <a:schemeClr val="lt1"/>
+          </a:fontRef>
+        </p:style>
+        <p:txBody>
+          <a:bodyPr rtlCol="0" anchor="ctr"/>
+          <a:lstStyle/>
+          <a:p>
+            <a:pPr algn="ctr"/>
+          </a:p>
+        </p:txBody>
+      </p:sp>
+      <p:sp>
+        <p:nvSpPr>
+          <p:cNvPr id="3" name="TextBox 2"/>
+          <p:cNvSpPr txBox="1"/>
+          <p:nvPr/>
+        </p:nvSpPr>
+        <p:spPr>
+          <a:xfrm>
+            <a:off x="1143000" y="393192"/>
+            <a:ext cx="8229600" cy="274320"/>
+          </a:xfrm>
+          <a:prstGeom prst="rect">
+            <a:avLst/>
+          </a:prstGeom>
+          <a:noFill/>
+        </p:spPr>
+        <p:txBody>
+          <a:bodyPr wrap="square" anchor="t" lIns="0" rIns="0" tIns="0" bIns="0">
+            <a:spAutoFit/>
+          </a:bodyPr>
+          <a:lstStyle/>
+          <a:p>
+            <a:pPr algn="l">
+              <a:spcAft>
+                <a:spcPts val="540"/>
+              </a:spcAft>
+            </a:pPr>
+            <a:r>
+              <a:rPr sz="1200" b="1" i="0">
+                <a:solidFill>
+                  <a:srgbClr val="5D5A54"/>
+                </a:solidFill>
+                <a:latin typeface="Inter Tight"/>
+              </a:rPr>
+              <a:t>THE COMPARISON TRAP</a:t>
+            </a:r>
+          </a:p>
+        </p:txBody>
+      </p:sp>
+      <p:sp>
+        <p:nvSpPr>
+          <p:cNvPr id="4" name="TextBox 3"/>
+          <p:cNvSpPr txBox="1"/>
+          <p:nvPr/>
+        </p:nvSpPr>
+        <p:spPr>
+          <a:xfrm>
+            <a:off x="8229600" y="6400800"/>
+            <a:ext cx="3410712" cy="274320"/>
+          </a:xfrm>
+          <a:prstGeom prst="rect">
+            <a:avLst/>
+          </a:prstGeom>
+          <a:noFill/>
+        </p:spPr>
+        <p:txBody>
+          <a:bodyPr wrap="square" anchor="t" lIns="0" rIns="0" tIns="0" bIns="0">
+            <a:spAutoFit/>
+          </a:bodyPr>
+          <a:lstStyle/>
+          <a:p>
+            <a:pPr algn="r">
+              <a:spcAft>
+                <a:spcPts val="450"/>
+              </a:spcAft>
+            </a:pPr>
+            <a:r>
+              <a:rPr sz="1000" b="0" i="0">
+                <a:solidFill>
+                  <a:srgbClr val="5D5A54"/>
+                </a:solidFill>
+                <a:latin typeface="Inter Tight"/>
+              </a:rPr>
+              <a:t>Beaver Counseling</a:t>
+            </a:r>
+          </a:p>
+        </p:txBody>
+      </p:sp>
+      <p:sp>
+        <p:nvSpPr>
+          <p:cNvPr id="5" name="TextBox 4"/>
+          <p:cNvSpPr txBox="1"/>
+          <p:nvPr/>
+        </p:nvSpPr>
+        <p:spPr>
+          <a:xfrm>
+            <a:off x="822960" y="2011680"/>
+            <a:ext cx="10515600" cy="1463040"/>
+          </a:xfrm>
+          <a:prstGeom prst="rect">
+            <a:avLst/>
+          </a:prstGeom>
+          <a:noFill/>
+        </p:spPr>
+        <p:txBody>
+          <a:bodyPr wrap="square" anchor="b" lIns="0" rIns="0" tIns="0" bIns="0">
+            <a:spAutoFit/>
+          </a:bodyPr>
+          <a:lstStyle/>
+          <a:p>
+            <a:pPr algn="l">
+              <a:spcAft>
+                <a:spcPts val="2700"/>
+              </a:spcAft>
+            </a:pPr>
+            <a:r>
+              <a:rPr sz="6000" b="1" i="0">
+                <a:solidFill>
+                  <a:srgbClr val="FFFFFF"/>
+                </a:solidFill>
+                <a:latin typeface="Source Serif 4"/>
+              </a:rPr>
+              <a:t>The Comparison Trap</a:t>
+            </a:r>
+          </a:p>
+        </p:txBody>
+      </p:sp>
+      <p:sp>
+        <p:nvSpPr>
+          <p:cNvPr id="6" name="TextBox 5"/>
+          <p:cNvSpPr txBox="1"/>
+          <p:nvPr/>
+        </p:nvSpPr>
+        <p:spPr>
+          <a:xfrm>
+            <a:off x="822960" y="3611880"/>
+            <a:ext cx="10515600" cy="914400"/>
+          </a:xfrm>
+          <a:prstGeom prst="rect">
+            <a:avLst/>
+          </a:prstGeom>
+          <a:noFill/>
+        </p:spPr>
+        <p:txBody>
+          <a:bodyPr wrap="square" anchor="t" lIns="0" rIns="0" tIns="0" bIns="0">
+            <a:spAutoFit/>
+          </a:bodyPr>
+          <a:lstStyle/>
+          <a:p>
+            <a:pPr algn="l">
+              <a:spcAft>
+                <a:spcPts val="1080"/>
+              </a:spcAft>
+            </a:pPr>
+            <a:r>
+              <a:rPr sz="2400" b="0" i="1">
+                <a:solidFill>
+                  <a:srgbClr val="E8E4DA"/>
+                </a:solidFill>
+                <a:latin typeface="Source Serif 4"/>
+              </a:rPr>
+              <a:t>You know feeds are highlight reels. It still lands. Here's why.</a:t>
+            </a:r>
+          </a:p>
+        </p:txBody>
+      </p:sp>
+      <p:sp>
+        <p:nvSpPr>
+          <p:cNvPr id="7" name="TextBox 6"/>
+          <p:cNvSpPr txBox="1"/>
+          <p:nvPr/>
+        </p:nvSpPr>
+        <p:spPr>
+          <a:xfrm>
+            <a:off x="822960" y="6035040"/>
+            <a:ext cx="7315200" cy="365760"/>
+          </a:xfrm>
+          <a:prstGeom prst="rect">
+            <a:avLst/>
+          </a:prstGeom>
+          <a:noFill/>
+        </p:spPr>
+        <p:txBody>
+          <a:bodyPr wrap="square" anchor="t" lIns="0" rIns="0" tIns="0" bIns="0">
+            <a:spAutoFit/>
+          </a:bodyPr>
+          <a:lstStyle/>
+          <a:p>
+            <a:pPr algn="l">
+              <a:spcAft>
+                <a:spcPts val="585"/>
+              </a:spcAft>
+            </a:pPr>
+            <a:r>
+              <a:rPr sz="1300" b="0" i="0">
+                <a:solidFill>
+                  <a:srgbClr val="E8E4DA"/>
+                </a:solidFill>
+                <a:latin typeface="Inter Tight"/>
+              </a:rPr>
+              <a:t>Beaver Upper School · Counseling</a:t>
+            </a:r>
+          </a:p>
+        </p:txBody>
+      </p:sp>
+    </p:spTree>
+  </p:cSld>
+  <p:clrMapOvr>
+    <a:masterClrMapping/>
+  </p:clrMapOvr>
+</p:sld>
+</file>
+
+<file path=ppt/slides/slide3.xml><?xml version="1.0" encoding="utf-8"?>
 <p:sld xmlns:a="http://schemas.openxmlformats.org/drawingml/2006/main" xmlns:p="http://schemas.openxmlformats.org/presentationml/2006/main" xmlns:r="http://schemas.openxmlformats.org/officeDocument/2006/relationships">
   <p:cSld>
     <p:bg>
@@ -5351,7 +7233,7 @@
                 </a:solidFill>
                 <a:latin typeface="Inter Tight"/>
               </a:rPr>
-              <a:t>THREE MOMENTS</a:t>
+              <a:t>THE GUESS</a:t>
             </a:r>
           </a:p>
         </p:txBody>
@@ -5397,64 +7279,23 @@
       </p:sp>
       <p:sp>
         <p:nvSpPr>
-          <p:cNvPr id="5" name="TextBox 4"/>
-          <p:cNvSpPr txBox="1"/>
-          <p:nvPr/>
-        </p:nvSpPr>
-        <p:spPr>
-          <a:xfrm>
-            <a:off x="822960" y="1005840"/>
-            <a:ext cx="10515600" cy="914400"/>
-          </a:xfrm>
-          <a:prstGeom prst="rect">
-            <a:avLst/>
-          </a:prstGeom>
-          <a:noFill/>
-        </p:spPr>
-        <p:txBody>
-          <a:bodyPr wrap="square" anchor="t" lIns="0" rIns="0" tIns="0" bIns="0">
-            <a:spAutoFit/>
-          </a:bodyPr>
-          <a:lstStyle/>
-          <a:p>
-            <a:pPr algn="l">
-              <a:spcAft>
-                <a:spcPts val="1530"/>
-              </a:spcAft>
-            </a:pPr>
-            <a:r>
-              <a:rPr sz="3400" b="1" i="0">
-                <a:solidFill>
-                  <a:srgbClr val="1C1B19"/>
-                </a:solidFill>
-                <a:latin typeface="Source Serif 4"/>
-              </a:rPr>
-              <a:t>What helps most?</a:t>
-            </a:r>
-          </a:p>
-        </p:txBody>
-      </p:sp>
-      <p:sp>
-        <p:nvSpPr>
-          <p:cNvPr id="6" name="Rectangle 5"/>
+          <p:cNvPr id="5" name="Rectangle 4"/>
           <p:cNvSpPr/>
           <p:nvPr/>
         </p:nvSpPr>
         <p:spPr>
           <a:xfrm>
-            <a:off x="822960" y="2103120"/>
-            <a:ext cx="3322320" cy="3840480"/>
+            <a:off x="822960" y="1371600"/>
+            <a:ext cx="73152" cy="3566160"/>
           </a:xfrm>
           <a:prstGeom prst="rect">
             <a:avLst/>
           </a:prstGeom>
           <a:solidFill>
-            <a:srgbClr val="FFFFFF"/>
+            <a:srgbClr val="F47B20"/>
           </a:solidFill>
-          <a:ln w="15875">
-            <a:solidFill>
-              <a:srgbClr val="D8D2C6"/>
-            </a:solidFill>
+          <a:ln>
+            <a:noFill/>
           </a:ln>
           <a:effectLst/>
         </p:spPr>
@@ -5482,14 +7323,53 @@
       </p:sp>
       <p:sp>
         <p:nvSpPr>
+          <p:cNvPr id="6" name="TextBox 5"/>
+          <p:cNvSpPr txBox="1"/>
+          <p:nvPr/>
+        </p:nvSpPr>
+        <p:spPr>
+          <a:xfrm>
+            <a:off x="1188720" y="1371600"/>
+            <a:ext cx="10058400" cy="3566160"/>
+          </a:xfrm>
+          <a:prstGeom prst="rect">
+            <a:avLst/>
+          </a:prstGeom>
+          <a:noFill/>
+        </p:spPr>
+        <p:txBody>
+          <a:bodyPr wrap="square" anchor="ctr" lIns="0" rIns="0" tIns="0" bIns="0">
+            <a:spAutoFit/>
+          </a:bodyPr>
+          <a:lstStyle/>
+          <a:p>
+            <a:pPr algn="l">
+              <a:spcAft>
+                <a:spcPts val="1800"/>
+              </a:spcAft>
+            </a:pPr>
+            <a:r>
+              <a:rPr sz="4000" b="0" i="1">
+                <a:solidFill>
+                  <a:srgbClr val="1C1B19"/>
+                </a:solidFill>
+                <a:latin typeface="Source Serif 4"/>
+              </a:rPr>
+              <a:t>How many people in this room felt left out or behind at least once this week?</a:t>
+            </a:r>
+          </a:p>
+        </p:txBody>
+      </p:sp>
+      <p:sp>
+        <p:nvSpPr>
           <p:cNvPr id="7" name="TextBox 6"/>
           <p:cNvSpPr txBox="1"/>
           <p:nvPr/>
         </p:nvSpPr>
         <p:spPr>
           <a:xfrm>
-            <a:off x="1051560" y="2286000"/>
-            <a:ext cx="2865120" cy="365760"/>
+            <a:off x="1188720" y="5120640"/>
+            <a:ext cx="10058400" cy="914400"/>
           </a:xfrm>
           <a:prstGeom prst="rect">
             <a:avLst/>
@@ -5504,304 +7384,17 @@
           <a:p>
             <a:pPr algn="l">
               <a:spcAft>
-                <a:spcPts val="585"/>
-              </a:spcAft>
-            </a:pPr>
-            <a:r>
-              <a:rPr sz="1300" b="1" i="0">
-                <a:solidFill>
-                  <a:srgbClr val="0B2D5B"/>
+                <a:spcPts val="810"/>
+              </a:spcAft>
+            </a:pPr>
+            <a:r>
+              <a:rPr sz="1800" b="0" i="0">
+                <a:solidFill>
+                  <a:srgbClr val="5D5A54"/>
                 </a:solidFill>
                 <a:latin typeface="Inter Tight"/>
               </a:rPr>
-              <a:t>DECEMBER, SENIOR YEAR</a:t>
-            </a:r>
-          </a:p>
-        </p:txBody>
-      </p:sp>
-      <p:sp>
-        <p:nvSpPr>
-          <p:cNvPr id="8" name="TextBox 7"/>
-          <p:cNvSpPr txBox="1"/>
-          <p:nvPr/>
-        </p:nvSpPr>
-        <p:spPr>
-          <a:xfrm>
-            <a:off x="1051560" y="2743200"/>
-            <a:ext cx="2865120" cy="3017520"/>
-          </a:xfrm>
-          <a:prstGeom prst="rect">
-            <a:avLst/>
-          </a:prstGeom>
-          <a:noFill/>
-        </p:spPr>
-        <p:txBody>
-          <a:bodyPr wrap="square" anchor="t" lIns="0" rIns="0" tIns="0" bIns="0">
-            <a:spAutoFit/>
-          </a:bodyPr>
-          <a:lstStyle/>
-          <a:p>
-            <a:pPr algn="l">
-              <a:spcAft>
-                <a:spcPts val="810"/>
-              </a:spcAft>
-            </a:pPr>
-            <a:r>
-              <a:rPr sz="1800" b="0" i="0">
-                <a:solidFill>
-                  <a:srgbClr val="1C1B19"/>
-                </a:solidFill>
-                <a:latin typeface="Source Serif 4"/>
-              </a:rPr>
-              <a:t>Your feed is wall-to-wall early decision acceptances. You haven't heard back yet.</a:t>
-            </a:r>
-          </a:p>
-        </p:txBody>
-      </p:sp>
-      <p:sp>
-        <p:nvSpPr>
-          <p:cNvPr id="9" name="Rectangle 8"/>
-          <p:cNvSpPr/>
-          <p:nvPr/>
-        </p:nvSpPr>
-        <p:spPr>
-          <a:xfrm>
-            <a:off x="4419600" y="2103120"/>
-            <a:ext cx="3322320" cy="3840480"/>
-          </a:xfrm>
-          <a:prstGeom prst="rect">
-            <a:avLst/>
-          </a:prstGeom>
-          <a:solidFill>
-            <a:srgbClr val="FFFFFF"/>
-          </a:solidFill>
-          <a:ln w="15875">
-            <a:solidFill>
-              <a:srgbClr val="D8D2C6"/>
-            </a:solidFill>
-          </a:ln>
-          <a:effectLst/>
-        </p:spPr>
-        <p:style>
-          <a:lnRef idx="1">
-            <a:schemeClr val="accent1"/>
-          </a:lnRef>
-          <a:fillRef idx="3">
-            <a:schemeClr val="accent1"/>
-          </a:fillRef>
-          <a:effectRef idx="2">
-            <a:schemeClr val="accent1"/>
-          </a:effectRef>
-          <a:fontRef idx="minor">
-            <a:schemeClr val="lt1"/>
-          </a:fontRef>
-        </p:style>
-        <p:txBody>
-          <a:bodyPr rtlCol="0" anchor="ctr"/>
-          <a:lstStyle/>
-          <a:p>
-            <a:pPr algn="ctr"/>
-          </a:p>
-        </p:txBody>
-      </p:sp>
-      <p:sp>
-        <p:nvSpPr>
-          <p:cNvPr id="10" name="TextBox 9"/>
-          <p:cNvSpPr txBox="1"/>
-          <p:nvPr/>
-        </p:nvSpPr>
-        <p:spPr>
-          <a:xfrm>
-            <a:off x="4648200" y="2286000"/>
-            <a:ext cx="2865120" cy="365760"/>
-          </a:xfrm>
-          <a:prstGeom prst="rect">
-            <a:avLst/>
-          </a:prstGeom>
-          <a:noFill/>
-        </p:spPr>
-        <p:txBody>
-          <a:bodyPr wrap="square" anchor="t" lIns="0" rIns="0" tIns="0" bIns="0">
-            <a:spAutoFit/>
-          </a:bodyPr>
-          <a:lstStyle/>
-          <a:p>
-            <a:pPr algn="l">
-              <a:spcAft>
-                <a:spcPts val="585"/>
-              </a:spcAft>
-            </a:pPr>
-            <a:r>
-              <a:rPr sz="1300" b="1" i="0">
-                <a:solidFill>
-                  <a:srgbClr val="0B2D5B"/>
-                </a:solidFill>
-                <a:latin typeface="Inter Tight"/>
-              </a:rPr>
-              <a:t>JAE</a:t>
-            </a:r>
-          </a:p>
-        </p:txBody>
-      </p:sp>
-      <p:sp>
-        <p:nvSpPr>
-          <p:cNvPr id="11" name="TextBox 10"/>
-          <p:cNvSpPr txBox="1"/>
-          <p:nvPr/>
-        </p:nvSpPr>
-        <p:spPr>
-          <a:xfrm>
-            <a:off x="4648200" y="2743200"/>
-            <a:ext cx="2865120" cy="3017520"/>
-          </a:xfrm>
-          <a:prstGeom prst="rect">
-            <a:avLst/>
-          </a:prstGeom>
-          <a:noFill/>
-        </p:spPr>
-        <p:txBody>
-          <a:bodyPr wrap="square" anchor="t" lIns="0" rIns="0" tIns="0" bIns="0">
-            <a:spAutoFit/>
-          </a:bodyPr>
-          <a:lstStyle/>
-          <a:p>
-            <a:pPr algn="l">
-              <a:spcAft>
-                <a:spcPts val="810"/>
-              </a:spcAft>
-            </a:pPr>
-            <a:r>
-              <a:rPr sz="1800" b="0" i="0">
-                <a:solidFill>
-                  <a:srgbClr val="1C1B19"/>
-                </a:solidFill>
-                <a:latin typeface="Source Serif 4"/>
-              </a:rPr>
-              <a:t>Sees a classmate's research internship. Jae spends summers working at his family's restaurant and suddenly feels behind.</a:t>
-            </a:r>
-          </a:p>
-        </p:txBody>
-      </p:sp>
-      <p:sp>
-        <p:nvSpPr>
-          <p:cNvPr id="12" name="Rectangle 11"/>
-          <p:cNvSpPr/>
-          <p:nvPr/>
-        </p:nvSpPr>
-        <p:spPr>
-          <a:xfrm>
-            <a:off x="8016239" y="2103120"/>
-            <a:ext cx="3322320" cy="3840480"/>
-          </a:xfrm>
-          <a:prstGeom prst="rect">
-            <a:avLst/>
-          </a:prstGeom>
-          <a:solidFill>
-            <a:srgbClr val="FFFFFF"/>
-          </a:solidFill>
-          <a:ln w="15875">
-            <a:solidFill>
-              <a:srgbClr val="D8D2C6"/>
-            </a:solidFill>
-          </a:ln>
-          <a:effectLst/>
-        </p:spPr>
-        <p:style>
-          <a:lnRef idx="1">
-            <a:schemeClr val="accent1"/>
-          </a:lnRef>
-          <a:fillRef idx="3">
-            <a:schemeClr val="accent1"/>
-          </a:fillRef>
-          <a:effectRef idx="2">
-            <a:schemeClr val="accent1"/>
-          </a:effectRef>
-          <a:fontRef idx="minor">
-            <a:schemeClr val="lt1"/>
-          </a:fontRef>
-        </p:style>
-        <p:txBody>
-          <a:bodyPr rtlCol="0" anchor="ctr"/>
-          <a:lstStyle/>
-          <a:p>
-            <a:pPr algn="ctr"/>
-          </a:p>
-        </p:txBody>
-      </p:sp>
-      <p:sp>
-        <p:nvSpPr>
-          <p:cNvPr id="13" name="TextBox 12"/>
-          <p:cNvSpPr txBox="1"/>
-          <p:nvPr/>
-        </p:nvSpPr>
-        <p:spPr>
-          <a:xfrm>
-            <a:off x="8244839" y="2286000"/>
-            <a:ext cx="2865120" cy="365760"/>
-          </a:xfrm>
-          <a:prstGeom prst="rect">
-            <a:avLst/>
-          </a:prstGeom>
-          <a:noFill/>
-        </p:spPr>
-        <p:txBody>
-          <a:bodyPr wrap="square" anchor="t" lIns="0" rIns="0" tIns="0" bIns="0">
-            <a:spAutoFit/>
-          </a:bodyPr>
-          <a:lstStyle/>
-          <a:p>
-            <a:pPr algn="l">
-              <a:spcAft>
-                <a:spcPts val="585"/>
-              </a:spcAft>
-            </a:pPr>
-            <a:r>
-              <a:rPr sz="1300" b="1" i="0">
-                <a:solidFill>
-                  <a:srgbClr val="0B2D5B"/>
-                </a:solidFill>
-                <a:latin typeface="Inter Tight"/>
-              </a:rPr>
-              <a:t>RILEY</a:t>
-            </a:r>
-          </a:p>
-        </p:txBody>
-      </p:sp>
-      <p:sp>
-        <p:nvSpPr>
-          <p:cNvPr id="14" name="TextBox 13"/>
-          <p:cNvSpPr txBox="1"/>
-          <p:nvPr/>
-        </p:nvSpPr>
-        <p:spPr>
-          <a:xfrm>
-            <a:off x="8244839" y="2743200"/>
-            <a:ext cx="2865120" cy="3017520"/>
-          </a:xfrm>
-          <a:prstGeom prst="rect">
-            <a:avLst/>
-          </a:prstGeom>
-          <a:noFill/>
-        </p:spPr>
-        <p:txBody>
-          <a:bodyPr wrap="square" anchor="t" lIns="0" rIns="0" tIns="0" bIns="0">
-            <a:spAutoFit/>
-          </a:bodyPr>
-          <a:lstStyle/>
-          <a:p>
-            <a:pPr algn="l">
-              <a:spcAft>
-                <a:spcPts val="810"/>
-              </a:spcAft>
-            </a:pPr>
-            <a:r>
-              <a:rPr sz="1800" b="0" i="0">
-                <a:solidFill>
-                  <a:srgbClr val="1C1B19"/>
-                </a:solidFill>
-                <a:latin typeface="Source Serif 4"/>
-              </a:rPr>
-              <a:t>Follows fitness creators. Every video leaves her feeling like her body is wrong, but she says it's motivation.</a:t>
+              <a:t>Write your guess. Then, on a separate scrap, write yes or no for yourself. Fold it. No names.</a:t>
             </a:r>
           </a:p>
         </p:txBody>
@@ -5814,7 +7407,7 @@
 </p:sld>
 </file>
 
-<file path=ppt/slides/slide12.xml><?xml version="1.0" encoding="utf-8"?>
+<file path=ppt/slides/slide4.xml><?xml version="1.0" encoding="utf-8"?>
 <p:sld xmlns:a="http://schemas.openxmlformats.org/drawingml/2006/main" xmlns:p="http://schemas.openxmlformats.org/presentationml/2006/main" xmlns:r="http://schemas.openxmlformats.org/officeDocument/2006/relationships">
   <p:cSld>
     <p:bg>
@@ -5910,7 +7503,7 @@
                 </a:solidFill>
                 <a:latin typeface="Inter Tight"/>
               </a:rPr>
-              <a:t>COMPARISON YOU DIDN'T PICK</a:t>
+              <a:t>THE HIGHLIGHT FILTER</a:t>
             </a:r>
           </a:p>
         </p:txBody>
@@ -5956,23 +7549,64 @@
       </p:sp>
       <p:sp>
         <p:nvSpPr>
-          <p:cNvPr id="5" name="Rectangle 4"/>
+          <p:cNvPr id="5" name="TextBox 4"/>
+          <p:cNvSpPr txBox="1"/>
+          <p:nvPr/>
+        </p:nvSpPr>
+        <p:spPr>
+          <a:xfrm>
+            <a:off x="822960" y="1005840"/>
+            <a:ext cx="10515600" cy="914400"/>
+          </a:xfrm>
+          <a:prstGeom prst="rect">
+            <a:avLst/>
+          </a:prstGeom>
+          <a:noFill/>
+        </p:spPr>
+        <p:txBody>
+          <a:bodyPr wrap="square" anchor="t" lIns="0" rIns="0" tIns="0" bIns="0">
+            <a:spAutoFit/>
+          </a:bodyPr>
+          <a:lstStyle/>
+          <a:p>
+            <a:pPr algn="l">
+              <a:spcAft>
+                <a:spcPts val="1530"/>
+              </a:spcAft>
+            </a:pPr>
+            <a:r>
+              <a:rPr sz="3400" b="1" i="0">
+                <a:solidFill>
+                  <a:srgbClr val="1C1B19"/>
+                </a:solidFill>
+                <a:latin typeface="Source Serif 4"/>
+              </a:rPr>
+              <a:t>Their outside, your inside</a:t>
+            </a:r>
+          </a:p>
+        </p:txBody>
+      </p:sp>
+      <p:sp>
+        <p:nvSpPr>
+          <p:cNvPr id="6" name="Rectangle 5"/>
           <p:cNvSpPr/>
           <p:nvPr/>
         </p:nvSpPr>
         <p:spPr>
           <a:xfrm>
-            <a:off x="822960" y="1371600"/>
-            <a:ext cx="73152" cy="3566160"/>
+            <a:off x="822960" y="2103120"/>
+            <a:ext cx="5120640" cy="3931920"/>
           </a:xfrm>
           <a:prstGeom prst="rect">
             <a:avLst/>
           </a:prstGeom>
           <a:solidFill>
-            <a:srgbClr val="F47B20"/>
+            <a:srgbClr val="FFFFFF"/>
           </a:solidFill>
-          <a:ln>
-            <a:noFill/>
+          <a:ln w="15875">
+            <a:solidFill>
+              <a:srgbClr val="D8D2C6"/>
+            </a:solidFill>
           </a:ln>
           <a:effectLst/>
         </p:spPr>
@@ -6000,53 +7634,14 @@
       </p:sp>
       <p:sp>
         <p:nvSpPr>
-          <p:cNvPr id="6" name="TextBox 5"/>
-          <p:cNvSpPr txBox="1"/>
-          <p:nvPr/>
-        </p:nvSpPr>
-        <p:spPr>
-          <a:xfrm>
-            <a:off x="1188720" y="1371600"/>
-            <a:ext cx="10058400" cy="3566160"/>
-          </a:xfrm>
-          <a:prstGeom prst="rect">
-            <a:avLst/>
-          </a:prstGeom>
-          <a:noFill/>
-        </p:spPr>
-        <p:txBody>
-          <a:bodyPr wrap="square" anchor="ctr" lIns="0" rIns="0" tIns="0" bIns="0">
-            <a:spAutoFit/>
-          </a:bodyPr>
-          <a:lstStyle/>
-          <a:p>
-            <a:pPr algn="l">
-              <a:spcAft>
-                <a:spcPts val="1800"/>
-              </a:spcAft>
-            </a:pPr>
-            <a:r>
-              <a:rPr sz="4000" b="0" i="1">
-                <a:solidFill>
-                  <a:srgbClr val="1C1B19"/>
-                </a:solidFill>
-                <a:latin typeface="Source Serif 4"/>
-              </a:rPr>
-              <a:t>How does comparing work in your family? What part do you want to keep, and what part do you want to set down?</a:t>
-            </a:r>
-          </a:p>
-        </p:txBody>
-      </p:sp>
-      <p:sp>
-        <p:nvSpPr>
           <p:cNvPr id="7" name="TextBox 6"/>
           <p:cNvSpPr txBox="1"/>
           <p:nvPr/>
         </p:nvSpPr>
         <p:spPr>
           <a:xfrm>
-            <a:off x="1188720" y="5120640"/>
-            <a:ext cx="10058400" cy="914400"/>
+            <a:off x="1097280" y="2286000"/>
+            <a:ext cx="4572000" cy="457200"/>
           </a:xfrm>
           <a:prstGeom prst="rect">
             <a:avLst/>
@@ -6061,17 +7656,276 @@
           <a:p>
             <a:pPr algn="l">
               <a:spcAft>
-                <a:spcPts val="810"/>
-              </a:spcAft>
-            </a:pPr>
-            <a:r>
-              <a:rPr sz="1800" b="0" i="0">
-                <a:solidFill>
-                  <a:srgbClr val="5D5A54"/>
+                <a:spcPts val="585"/>
+              </a:spcAft>
+            </a:pPr>
+            <a:r>
+              <a:rPr sz="1300" b="1" i="0">
+                <a:solidFill>
+                  <a:srgbClr val="0B2D5B"/>
                 </a:solidFill>
                 <a:latin typeface="Inter Tight"/>
               </a:rPr>
-              <a:t>Private. Write it for yourself.</a:t>
+              <a:t>WHAT YOU SEE OF THEM</a:t>
+            </a:r>
+          </a:p>
+        </p:txBody>
+      </p:sp>
+      <p:sp>
+        <p:nvSpPr>
+          <p:cNvPr id="8" name="TextBox 7"/>
+          <p:cNvSpPr txBox="1"/>
+          <p:nvPr/>
+        </p:nvSpPr>
+        <p:spPr>
+          <a:xfrm>
+            <a:off x="1097280" y="2788920"/>
+            <a:ext cx="4572000" cy="3108960"/>
+          </a:xfrm>
+          <a:prstGeom prst="rect">
+            <a:avLst/>
+          </a:prstGeom>
+          <a:noFill/>
+        </p:spPr>
+        <p:txBody>
+          <a:bodyPr wrap="square" anchor="t" lIns="0" rIns="0" tIns="0" bIns="0">
+            <a:spAutoFit/>
+          </a:bodyPr>
+          <a:lstStyle/>
+          <a:p>
+            <a:pPr algn="l">
+              <a:spcAft>
+                <a:spcPts val="855"/>
+              </a:spcAft>
+            </a:pPr>
+            <a:r>
+              <a:rPr sz="1900" b="0" i="0">
+                <a:solidFill>
+                  <a:srgbClr val="1C1B19"/>
+                </a:solidFill>
+                <a:latin typeface="Source Serif 4"/>
+              </a:rPr>
+              <a:t>The best take</a:t>
+            </a:r>
+          </a:p>
+          <a:p>
+            <a:pPr algn="l">
+              <a:spcAft>
+                <a:spcPts val="855"/>
+              </a:spcAft>
+            </a:pPr>
+            <a:r>
+              <a:rPr sz="1900" b="0" i="0">
+                <a:solidFill>
+                  <a:srgbClr val="1C1B19"/>
+                </a:solidFill>
+                <a:latin typeface="Source Serif 4"/>
+              </a:rPr>
+              <a:t>The good news</a:t>
+            </a:r>
+          </a:p>
+          <a:p>
+            <a:pPr algn="l">
+              <a:spcAft>
+                <a:spcPts val="855"/>
+              </a:spcAft>
+            </a:pPr>
+            <a:r>
+              <a:rPr sz="1900" b="0" i="0">
+                <a:solidFill>
+                  <a:srgbClr val="1C1B19"/>
+                </a:solidFill>
+                <a:latin typeface="Source Serif 4"/>
+              </a:rPr>
+              <a:t>The trip, the win, the party</a:t>
+            </a:r>
+          </a:p>
+          <a:p>
+            <a:pPr algn="l">
+              <a:spcAft>
+                <a:spcPts val="855"/>
+              </a:spcAft>
+            </a:pPr>
+            <a:r>
+              <a:rPr sz="1900" b="0" i="0">
+                <a:solidFill>
+                  <a:srgbClr val="1C1B19"/>
+                </a:solidFill>
+                <a:latin typeface="Source Serif 4"/>
+              </a:rPr>
+              <a:t>Edited and captioned</a:t>
+            </a:r>
+          </a:p>
+        </p:txBody>
+      </p:sp>
+      <p:sp>
+        <p:nvSpPr>
+          <p:cNvPr id="9" name="Rectangle 8"/>
+          <p:cNvSpPr/>
+          <p:nvPr/>
+        </p:nvSpPr>
+        <p:spPr>
+          <a:xfrm>
+            <a:off x="6309360" y="2103120"/>
+            <a:ext cx="5120640" cy="3931920"/>
+          </a:xfrm>
+          <a:prstGeom prst="rect">
+            <a:avLst/>
+          </a:prstGeom>
+          <a:solidFill>
+            <a:srgbClr val="FFFFFF"/>
+          </a:solidFill>
+          <a:ln w="15875">
+            <a:solidFill>
+              <a:srgbClr val="D8D2C6"/>
+            </a:solidFill>
+          </a:ln>
+          <a:effectLst/>
+        </p:spPr>
+        <p:style>
+          <a:lnRef idx="1">
+            <a:schemeClr val="accent1"/>
+          </a:lnRef>
+          <a:fillRef idx="3">
+            <a:schemeClr val="accent1"/>
+          </a:fillRef>
+          <a:effectRef idx="2">
+            <a:schemeClr val="accent1"/>
+          </a:effectRef>
+          <a:fontRef idx="minor">
+            <a:schemeClr val="lt1"/>
+          </a:fontRef>
+        </p:style>
+        <p:txBody>
+          <a:bodyPr rtlCol="0" anchor="ctr"/>
+          <a:lstStyle/>
+          <a:p>
+            <a:pPr algn="ctr"/>
+          </a:p>
+        </p:txBody>
+      </p:sp>
+      <p:sp>
+        <p:nvSpPr>
+          <p:cNvPr id="10" name="TextBox 9"/>
+          <p:cNvSpPr txBox="1"/>
+          <p:nvPr/>
+        </p:nvSpPr>
+        <p:spPr>
+          <a:xfrm>
+            <a:off x="6583680" y="2286000"/>
+            <a:ext cx="4572000" cy="457200"/>
+          </a:xfrm>
+          <a:prstGeom prst="rect">
+            <a:avLst/>
+          </a:prstGeom>
+          <a:noFill/>
+        </p:spPr>
+        <p:txBody>
+          <a:bodyPr wrap="square" anchor="t" lIns="0" rIns="0" tIns="0" bIns="0">
+            <a:spAutoFit/>
+          </a:bodyPr>
+          <a:lstStyle/>
+          <a:p>
+            <a:pPr algn="l">
+              <a:spcAft>
+                <a:spcPts val="585"/>
+              </a:spcAft>
+            </a:pPr>
+            <a:r>
+              <a:rPr sz="1300" b="1" i="0">
+                <a:solidFill>
+                  <a:srgbClr val="0B2D5B"/>
+                </a:solidFill>
+                <a:latin typeface="Inter Tight"/>
+              </a:rPr>
+              <a:t>WHAT YOU KNOW ABOUT YOU</a:t>
+            </a:r>
+          </a:p>
+        </p:txBody>
+      </p:sp>
+      <p:sp>
+        <p:nvSpPr>
+          <p:cNvPr id="11" name="TextBox 10"/>
+          <p:cNvSpPr txBox="1"/>
+          <p:nvPr/>
+        </p:nvSpPr>
+        <p:spPr>
+          <a:xfrm>
+            <a:off x="6583680" y="2788920"/>
+            <a:ext cx="4572000" cy="3108960"/>
+          </a:xfrm>
+          <a:prstGeom prst="rect">
+            <a:avLst/>
+          </a:prstGeom>
+          <a:noFill/>
+        </p:spPr>
+        <p:txBody>
+          <a:bodyPr wrap="square" anchor="t" lIns="0" rIns="0" tIns="0" bIns="0">
+            <a:spAutoFit/>
+          </a:bodyPr>
+          <a:lstStyle/>
+          <a:p>
+            <a:pPr algn="l">
+              <a:spcAft>
+                <a:spcPts val="855"/>
+              </a:spcAft>
+            </a:pPr>
+            <a:r>
+              <a:rPr sz="1900" b="0" i="0">
+                <a:solidFill>
+                  <a:srgbClr val="1C1B19"/>
+                </a:solidFill>
+                <a:latin typeface="Source Serif 4"/>
+              </a:rPr>
+              <a:t>The doubts</a:t>
+            </a:r>
+          </a:p>
+          <a:p>
+            <a:pPr algn="l">
+              <a:spcAft>
+                <a:spcPts val="855"/>
+              </a:spcAft>
+            </a:pPr>
+            <a:r>
+              <a:rPr sz="1900" b="0" i="0">
+                <a:solidFill>
+                  <a:srgbClr val="1C1B19"/>
+                </a:solidFill>
+                <a:latin typeface="Source Serif 4"/>
+              </a:rPr>
+              <a:t>The bad days</a:t>
+            </a:r>
+          </a:p>
+          <a:p>
+            <a:pPr algn="l">
+              <a:spcAft>
+                <a:spcPts val="855"/>
+              </a:spcAft>
+            </a:pPr>
+            <a:r>
+              <a:rPr sz="1900" b="0" i="0">
+                <a:solidFill>
+                  <a:srgbClr val="1C1B19"/>
+                </a:solidFill>
+                <a:latin typeface="Source Serif 4"/>
+              </a:rPr>
+              <a:t>The unfiltered face</a:t>
+            </a:r>
+          </a:p>
+          <a:p>
+            <a:pPr algn="l">
+              <a:spcAft>
+                <a:spcPts val="855"/>
+              </a:spcAft>
+            </a:pPr>
+            <a:r>
+              <a:rPr sz="1900" b="0" i="0">
+                <a:solidFill>
+                  <a:srgbClr val="1C1B19"/>
+                </a:solidFill>
+                <a:latin typeface="Source Serif 4"/>
+              </a:rPr>
+              <a:t>Everything that didn't make the post</a:t>
             </a:r>
           </a:p>
         </p:txBody>
@@ -6084,7 +7938,7 @@
 </p:sld>
 </file>
 
-<file path=ppt/slides/slide13.xml><?xml version="1.0" encoding="utf-8"?>
+<file path=ppt/slides/slide5.xml><?xml version="1.0" encoding="utf-8"?>
 <p:sld xmlns:a="http://schemas.openxmlformats.org/drawingml/2006/main" xmlns:p="http://schemas.openxmlformats.org/presentationml/2006/main" xmlns:r="http://schemas.openxmlformats.org/officeDocument/2006/relationships">
   <p:cSld>
     <p:bg>
@@ -6180,7 +8034,7 @@
                 </a:solidFill>
                 <a:latin typeface="Inter Tight"/>
               </a:rPr>
-              <a:t>BEFORE YOU GO</a:t>
+              <a:t>THE FOUR-QUESTION CHECK</a:t>
             </a:r>
           </a:p>
         </p:txBody>
@@ -6232,8 +8086,8 @@
         </p:nvSpPr>
         <p:spPr>
           <a:xfrm>
-            <a:off x="822960" y="1188720"/>
-            <a:ext cx="10515600" cy="914400"/>
+            <a:off x="822960" y="1005840"/>
+            <a:ext cx="10515600" cy="1097280"/>
           </a:xfrm>
           <a:prstGeom prst="rect">
             <a:avLst/>
@@ -6258,7 +8112,7 @@
                 </a:solidFill>
                 <a:latin typeface="Source Serif 4"/>
               </a:rPr>
-              <a:t>One change</a:t>
+              <a:t>When a post stings, ask:</a:t>
             </a:r>
           </a:p>
         </p:txBody>
@@ -6271,8 +8125,8 @@
         </p:nvSpPr>
         <p:spPr>
           <a:xfrm>
-            <a:off x="822960" y="2286000"/>
-            <a:ext cx="10515600" cy="1463040"/>
+            <a:off x="822960" y="2194560"/>
+            <a:ext cx="548640" cy="1005840"/>
           </a:xfrm>
           <a:prstGeom prst="rect">
             <a:avLst/>
@@ -6287,64 +8141,73 @@
           <a:p>
             <a:pPr algn="l">
               <a:spcAft>
-                <a:spcPts val="1080"/>
-              </a:spcAft>
-            </a:pPr>
-            <a:r>
-              <a:rPr sz="2400" b="0" i="0">
+                <a:spcPts val="1170"/>
+              </a:spcAft>
+            </a:pPr>
+            <a:r>
+              <a:rPr sz="2600" b="1" i="0">
+                <a:solidFill>
+                  <a:srgbClr val="F47B20"/>
+                </a:solidFill>
+                <a:latin typeface="Source Serif 4"/>
+              </a:rPr>
+              <a:t>1</a:t>
+            </a:r>
+          </a:p>
+        </p:txBody>
+      </p:sp>
+      <p:sp>
+        <p:nvSpPr>
+          <p:cNvPr id="7" name="TextBox 6"/>
+          <p:cNvSpPr txBox="1"/>
+          <p:nvPr/>
+        </p:nvSpPr>
+        <p:spPr>
+          <a:xfrm>
+            <a:off x="1463040" y="2231136"/>
+            <a:ext cx="9875520" cy="1005840"/>
+          </a:xfrm>
+          <a:prstGeom prst="rect">
+            <a:avLst/>
+          </a:prstGeom>
+          <a:noFill/>
+        </p:spPr>
+        <p:txBody>
+          <a:bodyPr wrap="square" anchor="t" lIns="0" rIns="0" tIns="0" bIns="0">
+            <a:spAutoFit/>
+          </a:bodyPr>
+          <a:lstStyle/>
+          <a:p>
+            <a:pPr algn="l">
+              <a:spcAft>
+                <a:spcPts val="945"/>
+              </a:spcAft>
+            </a:pPr>
+            <a:r>
+              <a:rPr sz="2100" b="1" i="0">
                 <a:solidFill>
                   <a:srgbClr val="1C1B19"/>
                 </a:solidFill>
                 <a:latin typeface="Source Serif 4"/>
               </a:rPr>
-              <a:t>Mute one account, hide like counts, or put a ceiling on your worst app. Which one, starting when?</a:t>
-            </a:r>
-          </a:p>
-        </p:txBody>
-      </p:sp>
-      <p:sp>
-        <p:nvSpPr>
-          <p:cNvPr id="7" name="Rectangle 6"/>
-          <p:cNvSpPr/>
-          <p:nvPr/>
-        </p:nvSpPr>
-        <p:spPr>
-          <a:xfrm>
-            <a:off x="822960" y="4023360"/>
-            <a:ext cx="10515600" cy="1371600"/>
-          </a:xfrm>
-          <a:prstGeom prst="rect">
-            <a:avLst/>
-          </a:prstGeom>
-          <a:solidFill>
-            <a:srgbClr val="FFFFFF"/>
-          </a:solidFill>
-          <a:ln w="15875">
-            <a:solidFill>
-              <a:srgbClr val="1C1B19"/>
-            </a:solidFill>
-          </a:ln>
-          <a:effectLst/>
-        </p:spPr>
-        <p:style>
-          <a:lnRef idx="1">
-            <a:schemeClr val="accent1"/>
-          </a:lnRef>
-          <a:fillRef idx="3">
-            <a:schemeClr val="accent1"/>
-          </a:fillRef>
-          <a:effectRef idx="2">
-            <a:schemeClr val="accent1"/>
-          </a:effectRef>
-          <a:fontRef idx="minor">
-            <a:schemeClr val="lt1"/>
-          </a:fontRef>
-        </p:style>
-        <p:txBody>
-          <a:bodyPr rtlCol="0" anchor="ctr"/>
-          <a:lstStyle/>
-          <a:p>
-            <a:pPr algn="ctr"/>
+              <a:t>Is it real?</a:t>
+            </a:r>
+          </a:p>
+          <a:p>
+            <a:pPr algn="l">
+              <a:spcAft>
+                <a:spcPts val="945"/>
+              </a:spcAft>
+            </a:pPr>
+            <a:r>
+              <a:rPr sz="1600" b="0" i="0">
+                <a:solidFill>
+                  <a:srgbClr val="5D5A54"/>
+                </a:solidFill>
+                <a:latin typeface="Source Serif 4"/>
+              </a:rPr>
+              <a:t>How much is the best take, cropped and captioned?</a:t>
+            </a:r>
           </a:p>
         </p:txBody>
       </p:sp>
@@ -6356,8 +8219,8 @@
         </p:nvSpPr>
         <p:spPr>
           <a:xfrm>
-            <a:off x="1097280" y="4206240"/>
-            <a:ext cx="10058400" cy="365760"/>
+            <a:off x="822960" y="3200400"/>
+            <a:ext cx="548640" cy="1005840"/>
           </a:xfrm>
           <a:prstGeom prst="rect">
             <a:avLst/>
@@ -6372,17 +8235,17 @@
           <a:p>
             <a:pPr algn="l">
               <a:spcAft>
-                <a:spcPts val="540"/>
-              </a:spcAft>
-            </a:pPr>
-            <a:r>
-              <a:rPr sz="1200" b="1" i="0">
-                <a:solidFill>
-                  <a:srgbClr val="0B2D5B"/>
-                </a:solidFill>
-                <a:latin typeface="Inter Tight"/>
-              </a:rPr>
-              <a:t>TAKE-HOME SHEET</a:t>
+                <a:spcPts val="1170"/>
+              </a:spcAft>
+            </a:pPr>
+            <a:r>
+              <a:rPr sz="2600" b="1" i="0">
+                <a:solidFill>
+                  <a:srgbClr val="F47B20"/>
+                </a:solidFill>
+                <a:latin typeface="Source Serif 4"/>
+              </a:rPr>
+              <a:t>2</a:t>
             </a:r>
           </a:p>
         </p:txBody>
@@ -6395,8 +8258,8 @@
         </p:nvSpPr>
         <p:spPr>
           <a:xfrm>
-            <a:off x="1097280" y="4617720"/>
-            <a:ext cx="10058400" cy="640080"/>
+            <a:off x="1463040" y="3236976"/>
+            <a:ext cx="9875520" cy="1005840"/>
           </a:xfrm>
           <a:prstGeom prst="rect">
             <a:avLst/>
@@ -6411,101 +8274,47 @@
           <a:p>
             <a:pPr algn="l">
               <a:spcAft>
-                <a:spcPts val="900"/>
-              </a:spcAft>
-            </a:pPr>
-            <a:r>
-              <a:rPr sz="2000" b="0" i="0">
+                <a:spcPts val="945"/>
+              </a:spcAft>
+            </a:pPr>
+            <a:r>
+              <a:rPr sz="2100" b="1" i="0">
                 <a:solidFill>
                   <a:srgbClr val="1C1B19"/>
                 </a:solidFill>
-                <a:latin typeface="Inter Tight"/>
-              </a:rPr>
-              <a:t>https://rmwtoolkit.github.io/bcds-toolkit/the-comparison-trap-high-school.html</a:t>
-            </a:r>
-          </a:p>
-        </p:txBody>
-      </p:sp>
-    </p:spTree>
-  </p:cSld>
-  <p:clrMapOvr>
-    <a:masterClrMapping/>
-  </p:clrMapOvr>
-</p:sld>
-</file>
-
-<file path=ppt/slides/slide2.xml><?xml version="1.0" encoding="utf-8"?>
-<p:sld xmlns:a="http://schemas.openxmlformats.org/drawingml/2006/main" xmlns:p="http://schemas.openxmlformats.org/presentationml/2006/main" xmlns:r="http://schemas.openxmlformats.org/officeDocument/2006/relationships" show="0">
-  <p:cSld>
-    <p:bg>
-      <p:bgPr>
-        <a:solidFill>
-          <a:srgbClr val="EEEBE4"/>
-        </a:solidFill>
-        <a:effectLst/>
-      </p:bgPr>
-    </p:bg>
-    <p:spTree>
-      <p:nvGrpSpPr>
-        <p:cNvPr id="1" name=""/>
-        <p:cNvGrpSpPr/>
-        <p:nvPr/>
-      </p:nvGrpSpPr>
-      <p:grpSpPr/>
-      <p:sp>
-        <p:nvSpPr>
-          <p:cNvPr id="2" name="Rectangle 1"/>
-          <p:cNvSpPr/>
-          <p:nvPr/>
-        </p:nvSpPr>
-        <p:spPr>
-          <a:xfrm>
-            <a:off x="0" y="0"/>
-            <a:ext cx="12191695" cy="384048"/>
-          </a:xfrm>
-          <a:prstGeom prst="rect">
-            <a:avLst/>
-          </a:prstGeom>
-          <a:solidFill>
-            <a:srgbClr val="0B2D5B"/>
-          </a:solidFill>
-          <a:ln>
-            <a:noFill/>
-          </a:ln>
-          <a:effectLst/>
-        </p:spPr>
-        <p:style>
-          <a:lnRef idx="1">
-            <a:schemeClr val="accent1"/>
-          </a:lnRef>
-          <a:fillRef idx="3">
-            <a:schemeClr val="accent1"/>
-          </a:fillRef>
-          <a:effectRef idx="2">
-            <a:schemeClr val="accent1"/>
-          </a:effectRef>
-          <a:fontRef idx="minor">
-            <a:schemeClr val="lt1"/>
-          </a:fontRef>
-        </p:style>
-        <p:txBody>
-          <a:bodyPr rtlCol="0" anchor="ctr"/>
-          <a:lstStyle/>
-          <a:p>
-            <a:pPr algn="ctr"/>
-          </a:p>
-        </p:txBody>
-      </p:sp>
-      <p:sp>
-        <p:nvSpPr>
-          <p:cNvPr id="3" name="TextBox 2"/>
+                <a:latin typeface="Source Serif 4"/>
+              </a:rPr>
+              <a:t>Is it a fair match?</a:t>
+            </a:r>
+          </a:p>
+          <a:p>
+            <a:pPr algn="l">
+              <a:spcAft>
+                <a:spcPts val="945"/>
+              </a:spcAft>
+            </a:pPr>
+            <a:r>
+              <a:rPr sz="1600" b="0" i="0">
+                <a:solidFill>
+                  <a:srgbClr val="5D5A54"/>
+                </a:solidFill>
+                <a:latin typeface="Source Serif 4"/>
+              </a:rPr>
+              <a:t>Same starting line? Same money, time, help and luck?</a:t>
+            </a:r>
+          </a:p>
+        </p:txBody>
+      </p:sp>
+      <p:sp>
+        <p:nvSpPr>
+          <p:cNvPr id="10" name="TextBox 9"/>
           <p:cNvSpPr txBox="1"/>
           <p:nvPr/>
         </p:nvSpPr>
         <p:spPr>
           <a:xfrm>
-            <a:off x="548640" y="100584"/>
-            <a:ext cx="10972800" cy="274320"/>
+            <a:off x="822960" y="4206240"/>
+            <a:ext cx="548640" cy="1005840"/>
           </a:xfrm>
           <a:prstGeom prst="rect">
             <a:avLst/>
@@ -6520,31 +8329,31 @@
           <a:p>
             <a:pPr algn="l">
               <a:spcAft>
-                <a:spcPts val="495"/>
-              </a:spcAft>
-            </a:pPr>
-            <a:r>
-              <a:rPr sz="1100" b="1" i="0">
-                <a:solidFill>
-                  <a:srgbClr val="FFFFFF"/>
-                </a:solidFill>
-                <a:latin typeface="Inter Tight"/>
-              </a:rPr>
-              <a:t>TEACHER PAGE  ·  skipped when you present  ·  Before you teach</a:t>
-            </a:r>
-          </a:p>
-        </p:txBody>
-      </p:sp>
-      <p:sp>
-        <p:nvSpPr>
-          <p:cNvPr id="4" name="TextBox 3"/>
+                <a:spcPts val="1170"/>
+              </a:spcAft>
+            </a:pPr>
+            <a:r>
+              <a:rPr sz="2600" b="1" i="0">
+                <a:solidFill>
+                  <a:srgbClr val="F47B20"/>
+                </a:solidFill>
+                <a:latin typeface="Source Serif 4"/>
+              </a:rPr>
+              <a:t>3</a:t>
+            </a:r>
+          </a:p>
+        </p:txBody>
+      </p:sp>
+      <p:sp>
+        <p:nvSpPr>
+          <p:cNvPr id="11" name="TextBox 10"/>
           <p:cNvSpPr txBox="1"/>
           <p:nvPr/>
         </p:nvSpPr>
         <p:spPr>
           <a:xfrm>
-            <a:off x="548640" y="685800"/>
-            <a:ext cx="10972800" cy="640080"/>
+            <a:off x="1463040" y="4242816"/>
+            <a:ext cx="9875520" cy="1005840"/>
           </a:xfrm>
           <a:prstGeom prst="rect">
             <a:avLst/>
@@ -6559,31 +8368,47 @@
           <a:p>
             <a:pPr algn="l">
               <a:spcAft>
-                <a:spcPts val="1350"/>
-              </a:spcAft>
-            </a:pPr>
-            <a:r>
-              <a:rPr sz="3000" b="1" i="0">
+                <a:spcPts val="945"/>
+              </a:spcAft>
+            </a:pPr>
+            <a:r>
+              <a:rPr sz="2100" b="1" i="0">
                 <a:solidFill>
                   <a:srgbClr val="1C1B19"/>
                 </a:solidFill>
                 <a:latin typeface="Source Serif 4"/>
               </a:rPr>
-              <a:t>Before you teach</a:t>
-            </a:r>
-          </a:p>
-        </p:txBody>
-      </p:sp>
-      <p:sp>
-        <p:nvSpPr>
-          <p:cNvPr id="5" name="TextBox 4"/>
+              <a:t>Is it useful?</a:t>
+            </a:r>
+          </a:p>
+          <a:p>
+            <a:pPr algn="l">
+              <a:spcAft>
+                <a:spcPts val="945"/>
+              </a:spcAft>
+            </a:pPr>
+            <a:r>
+              <a:rPr sz="1600" b="0" i="0">
+                <a:solidFill>
+                  <a:srgbClr val="5D5A54"/>
+                </a:solidFill>
+                <a:latin typeface="Source Serif 4"/>
+              </a:rPr>
+              <a:t>Anything to learn or act on? If not, it's noise that hurts.</a:t>
+            </a:r>
+          </a:p>
+        </p:txBody>
+      </p:sp>
+      <p:sp>
+        <p:nvSpPr>
+          <p:cNvPr id="12" name="TextBox 11"/>
           <p:cNvSpPr txBox="1"/>
           <p:nvPr/>
         </p:nvSpPr>
         <p:spPr>
           <a:xfrm>
-            <a:off x="548640" y="1463040"/>
-            <a:ext cx="5394960" cy="4937760"/>
+            <a:off x="822960" y="5212080"/>
+            <a:ext cx="548640" cy="1005840"/>
           </a:xfrm>
           <a:prstGeom prst="rect">
             <a:avLst/>
@@ -6598,159 +8423,31 @@
           <a:p>
             <a:pPr algn="l">
               <a:spcAft>
-                <a:spcPts val="585"/>
-              </a:spcAft>
-            </a:pPr>
-            <a:r>
-              <a:rPr sz="1500" b="1" i="0">
-                <a:solidFill>
-                  <a:srgbClr val="1C1B19"/>
-                </a:solidFill>
-                <a:latin typeface="Source Serif 4"/>
-              </a:rPr>
-              <a:t>Seniors in decision season.</a:t>
-            </a:r>
-          </a:p>
-          <a:p>
-            <a:pPr algn="l">
-              <a:spcAft>
-                <a:spcPts val="585"/>
-              </a:spcAft>
-            </a:pPr>
-            <a:r>
-              <a:rPr sz="1300" b="0" i="0">
-                <a:solidFill>
-                  <a:srgbClr val="1C1B19"/>
-                </a:solidFill>
-                <a:latin typeface="Source Serif 4"/>
-              </a:rPr>
-              <a:t>In December and March, acceptance posts hit hard. Don't ask anyone to share where they applied or heard back.</a:t>
-            </a:r>
-          </a:p>
-          <a:p>
-            <a:pPr algn="l">
-              <a:spcAft>
-                <a:spcPts val="585"/>
-              </a:spcAft>
-            </a:pPr>
-            <a:r>
-              <a:rPr sz="1300" b="0" i="0">
-                <a:solidFill>
-                  <a:srgbClr val="1C1B19"/>
-                </a:solidFill>
-                <a:latin typeface="Source Serif 4"/>
-              </a:rPr>
-              <a:t/>
-            </a:r>
-          </a:p>
-          <a:p>
-            <a:pPr algn="l">
-              <a:spcAft>
-                <a:spcPts val="585"/>
-              </a:spcAft>
-            </a:pPr>
-            <a:r>
-              <a:rPr sz="1500" b="1" i="0">
-                <a:solidFill>
-                  <a:srgbClr val="1C1B19"/>
-                </a:solidFill>
-                <a:latin typeface="Source Serif 4"/>
-              </a:rPr>
-              <a:t>Body comparison is close to the surface.</a:t>
-            </a:r>
-          </a:p>
-          <a:p>
-            <a:pPr algn="l">
-              <a:spcAft>
-                <a:spcPts val="585"/>
-              </a:spcAft>
-            </a:pPr>
-            <a:r>
-              <a:rPr sz="1300" b="0" i="0">
-                <a:solidFill>
-                  <a:srgbClr val="1C1B19"/>
-                </a:solidFill>
-                <a:latin typeface="Source Serif 4"/>
-              </a:rPr>
-              <a:t>The fitness-account example can land hard for students with eating concerns. Keep it about the feeling and the inputs, never weights or bodies. If a student seems to be struggling, connect them with a counselor afterward.</a:t>
-            </a:r>
-          </a:p>
-          <a:p>
-            <a:pPr algn="l">
-              <a:spcAft>
-                <a:spcPts val="585"/>
-              </a:spcAft>
-            </a:pPr>
-            <a:r>
-              <a:rPr sz="1300" b="0" i="0">
-                <a:solidFill>
-                  <a:srgbClr val="1C1B19"/>
-                </a:solidFill>
-                <a:latin typeface="Source Serif 4"/>
-              </a:rPr>
-              <a:t/>
-            </a:r>
-          </a:p>
-          <a:p>
-            <a:pPr algn="l">
-              <a:spcAft>
-                <a:spcPts val="585"/>
-              </a:spcAft>
-            </a:pPr>
-            <a:r>
-              <a:rPr sz="1500" b="1" i="0">
-                <a:solidFill>
-                  <a:srgbClr val="1C1B19"/>
-                </a:solidFill>
-                <a:latin typeface="Source Serif 4"/>
-              </a:rPr>
-              <a:t>Keep the audit private.</a:t>
-            </a:r>
-          </a:p>
-          <a:p>
-            <a:pPr algn="l">
-              <a:spcAft>
-                <a:spcPts val="585"/>
-              </a:spcAft>
-            </a:pPr>
-            <a:r>
-              <a:rPr sz="1300" b="0" i="0">
-                <a:solidFill>
-                  <a:srgbClr val="1C1B19"/>
-                </a:solidFill>
-                <a:latin typeface="Source Serif 4"/>
-              </a:rPr>
-              <a:t>Nobody shares which accounts they follow or mute. The card goes home with them.</a:t>
-            </a:r>
-          </a:p>
-          <a:p>
-            <a:pPr algn="l">
-              <a:spcAft>
-                <a:spcPts val="585"/>
-              </a:spcAft>
-            </a:pPr>
-            <a:r>
-              <a:rPr sz="1300" b="0" i="0">
-                <a:solidFill>
-                  <a:srgbClr val="1C1B19"/>
-                </a:solidFill>
-                <a:latin typeface="Source Serif 4"/>
-              </a:rPr>
-              <a:t/>
-            </a:r>
-          </a:p>
-        </p:txBody>
-      </p:sp>
-      <p:sp>
-        <p:nvSpPr>
-          <p:cNvPr id="6" name="TextBox 5"/>
+                <a:spcPts val="1170"/>
+              </a:spcAft>
+            </a:pPr>
+            <a:r>
+              <a:rPr sz="2600" b="1" i="0">
+                <a:solidFill>
+                  <a:srgbClr val="F47B20"/>
+                </a:solidFill>
+                <a:latin typeface="Source Serif 4"/>
+              </a:rPr>
+              <a:t>4</a:t>
+            </a:r>
+          </a:p>
+        </p:txBody>
+      </p:sp>
+      <p:sp>
+        <p:nvSpPr>
+          <p:cNvPr id="13" name="TextBox 12"/>
           <p:cNvSpPr txBox="1"/>
           <p:nvPr/>
         </p:nvSpPr>
         <p:spPr>
           <a:xfrm>
-            <a:off x="6217920" y="1463040"/>
-            <a:ext cx="5394960" cy="4937760"/>
+            <a:off x="1463040" y="5248656"/>
+            <a:ext cx="9875520" cy="1005840"/>
           </a:xfrm>
           <a:prstGeom prst="rect">
             <a:avLst/>
@@ -6765,1317 +8462,33 @@
           <a:p>
             <a:pPr algn="l">
               <a:spcAft>
-                <a:spcPts val="585"/>
-              </a:spcAft>
-            </a:pPr>
-            <a:r>
-              <a:rPr sz="1500" b="1" i="0">
+                <a:spcPts val="945"/>
+              </a:spcAft>
+            </a:pPr>
+            <a:r>
+              <a:rPr sz="2100" b="1" i="0">
                 <a:solidFill>
                   <a:srgbClr val="1C1B19"/>
                 </a:solidFill>
                 <a:latin typeface="Source Serif 4"/>
               </a:rPr>
-              <a:t>Families compare differently.</a:t>
-            </a:r>
-          </a:p>
-          <a:p>
-            <a:pPr algn="l">
-              <a:spcAft>
-                <a:spcPts val="585"/>
-              </a:spcAft>
-            </a:pPr>
-            <a:r>
-              <a:rPr sz="1300" b="0" i="0">
-                <a:solidFill>
-                  <a:srgbClr val="1C1B19"/>
-                </a:solidFill>
-                <a:latin typeface="Source Serif 4"/>
-              </a:rPr>
-              <a:t>In some families, comparing to a sibling or cousin is how high hopes get said out loud. In others it never comes up. Present both as normal. The reflection is private.</a:t>
-            </a:r>
-          </a:p>
-          <a:p>
-            <a:pPr algn="l">
-              <a:spcAft>
-                <a:spcPts val="585"/>
-              </a:spcAft>
-            </a:pPr>
-            <a:r>
-              <a:rPr sz="1300" b="0" i="0">
-                <a:solidFill>
-                  <a:srgbClr val="1C1B19"/>
-                </a:solidFill>
-                <a:latin typeface="Source Serif 4"/>
-              </a:rPr>
-              <a:t/>
-            </a:r>
-          </a:p>
-          <a:p>
-            <a:pPr algn="l">
-              <a:spcAft>
-                <a:spcPts val="585"/>
-              </a:spcAft>
-            </a:pPr>
-            <a:r>
-              <a:rPr sz="1500" b="1" i="0">
-                <a:solidFill>
-                  <a:srgbClr val="1C1B19"/>
-                </a:solidFill>
-                <a:latin typeface="Source Serif 4"/>
-              </a:rPr>
-              <a:t>Don't preach quitting social media.</a:t>
-            </a:r>
-          </a:p>
-          <a:p>
-            <a:pPr algn="l">
-              <a:spcAft>
-                <a:spcPts val="585"/>
-              </a:spcAft>
-            </a:pPr>
-            <a:r>
-              <a:rPr sz="1300" b="0" i="0">
-                <a:solidFill>
-                  <a:srgbClr val="1C1B19"/>
-                </a:solidFill>
-                <a:latin typeface="Source Serif 4"/>
-              </a:rPr>
-              <a:t>Most students won't, and the research supports limits and better inputs, not only full breaks. Meet them there.</a:t>
-            </a:r>
-          </a:p>
-          <a:p>
-            <a:pPr algn="l">
-              <a:spcAft>
-                <a:spcPts val="585"/>
-              </a:spcAft>
-            </a:pPr>
-            <a:r>
-              <a:rPr sz="1300" b="0" i="0">
-                <a:solidFill>
-                  <a:srgbClr val="1C1B19"/>
-                </a:solidFill>
-                <a:latin typeface="Source Serif 4"/>
-              </a:rPr>
-              <a:t/>
-            </a:r>
-          </a:p>
-          <a:p>
-            <a:pPr algn="l">
-              <a:spcAft>
-                <a:spcPts val="585"/>
-              </a:spcAft>
-            </a:pPr>
-            <a:r>
-              <a:rPr sz="1500" b="1" i="0">
-                <a:solidFill>
-                  <a:srgbClr val="1C1B19"/>
-                </a:solidFill>
-                <a:latin typeface="Source Serif 4"/>
-              </a:rPr>
-              <a:t>If someone is being targeted online.</a:t>
-            </a:r>
-          </a:p>
-          <a:p>
-            <a:pPr algn="l">
-              <a:spcAft>
-                <a:spcPts val="585"/>
-              </a:spcAft>
-            </a:pPr>
-            <a:r>
-              <a:rPr sz="1300" b="0" i="0">
-                <a:solidFill>
-                  <a:srgbClr val="1C1B19"/>
-                </a:solidFill>
-                <a:latin typeface="Source Serif 4"/>
-              </a:rPr>
-              <a:t>Bullying or threats are a counselor conversation that day, not a discussion topic.</a:t>
-            </a:r>
-          </a:p>
-          <a:p>
-            <a:pPr algn="l">
-              <a:spcAft>
-                <a:spcPts val="585"/>
-              </a:spcAft>
-            </a:pPr>
-            <a:r>
-              <a:rPr sz="1300" b="0" i="0">
-                <a:solidFill>
-                  <a:srgbClr val="1C1B19"/>
-                </a:solidFill>
-                <a:latin typeface="Source Serif 4"/>
-              </a:rPr>
-              <a:t/>
-            </a:r>
-          </a:p>
-        </p:txBody>
-      </p:sp>
-    </p:spTree>
-  </p:cSld>
-  <p:clrMapOvr>
-    <a:masterClrMapping/>
-  </p:clrMapOvr>
-</p:sld>
-</file>
-
-<file path=ppt/slides/slide3.xml><?xml version="1.0" encoding="utf-8"?>
-<p:sld xmlns:a="http://schemas.openxmlformats.org/drawingml/2006/main" xmlns:p="http://schemas.openxmlformats.org/presentationml/2006/main" xmlns:r="http://schemas.openxmlformats.org/officeDocument/2006/relationships" show="0">
-  <p:cSld>
-    <p:bg>
-      <p:bgPr>
-        <a:solidFill>
-          <a:srgbClr val="EEEBE4"/>
-        </a:solidFill>
-        <a:effectLst/>
-      </p:bgPr>
-    </p:bg>
-    <p:spTree>
-      <p:nvGrpSpPr>
-        <p:cNvPr id="1" name=""/>
-        <p:cNvGrpSpPr/>
-        <p:nvPr/>
-      </p:nvGrpSpPr>
-      <p:grpSpPr/>
-      <p:sp>
-        <p:nvSpPr>
-          <p:cNvPr id="2" name="Rectangle 1"/>
-          <p:cNvSpPr/>
-          <p:nvPr/>
-        </p:nvSpPr>
-        <p:spPr>
-          <a:xfrm>
-            <a:off x="0" y="0"/>
-            <a:ext cx="12191695" cy="384048"/>
-          </a:xfrm>
-          <a:prstGeom prst="rect">
-            <a:avLst/>
-          </a:prstGeom>
-          <a:solidFill>
-            <a:srgbClr val="0B2D5B"/>
-          </a:solidFill>
-          <a:ln>
-            <a:noFill/>
-          </a:ln>
-          <a:effectLst/>
-        </p:spPr>
-        <p:style>
-          <a:lnRef idx="1">
-            <a:schemeClr val="accent1"/>
-          </a:lnRef>
-          <a:fillRef idx="3">
-            <a:schemeClr val="accent1"/>
-          </a:fillRef>
-          <a:effectRef idx="2">
-            <a:schemeClr val="accent1"/>
-          </a:effectRef>
-          <a:fontRef idx="minor">
-            <a:schemeClr val="lt1"/>
-          </a:fontRef>
-        </p:style>
-        <p:txBody>
-          <a:bodyPr rtlCol="0" anchor="ctr"/>
-          <a:lstStyle/>
-          <a:p>
-            <a:pPr algn="ctr"/>
-          </a:p>
-        </p:txBody>
-      </p:sp>
-      <p:sp>
-        <p:nvSpPr>
-          <p:cNvPr id="3" name="TextBox 2"/>
-          <p:cNvSpPr txBox="1"/>
-          <p:nvPr/>
-        </p:nvSpPr>
-        <p:spPr>
-          <a:xfrm>
-            <a:off x="548640" y="100584"/>
-            <a:ext cx="10972800" cy="274320"/>
-          </a:xfrm>
-          <a:prstGeom prst="rect">
-            <a:avLst/>
-          </a:prstGeom>
-          <a:noFill/>
-        </p:spPr>
-        <p:txBody>
-          <a:bodyPr wrap="square" anchor="t" lIns="0" rIns="0" tIns="0" bIns="0">
-            <a:spAutoFit/>
-          </a:bodyPr>
-          <a:lstStyle/>
-          <a:p>
-            <a:pPr algn="l">
-              <a:spcAft>
-                <a:spcPts val="495"/>
-              </a:spcAft>
-            </a:pPr>
-            <a:r>
-              <a:rPr sz="1100" b="1" i="0">
-                <a:solidFill>
-                  <a:srgbClr val="FFFFFF"/>
-                </a:solidFill>
-                <a:latin typeface="Inter Tight"/>
-              </a:rPr>
-              <a:t>TEACHER PAGE  ·  skipped when you present  ·  Every student in the room</a:t>
-            </a:r>
-          </a:p>
-        </p:txBody>
-      </p:sp>
-      <p:sp>
-        <p:nvSpPr>
-          <p:cNvPr id="4" name="TextBox 3"/>
-          <p:cNvSpPr txBox="1"/>
-          <p:nvPr/>
-        </p:nvSpPr>
-        <p:spPr>
-          <a:xfrm>
-            <a:off x="548640" y="685800"/>
-            <a:ext cx="10972800" cy="640080"/>
-          </a:xfrm>
-          <a:prstGeom prst="rect">
-            <a:avLst/>
-          </a:prstGeom>
-          <a:noFill/>
-        </p:spPr>
-        <p:txBody>
-          <a:bodyPr wrap="square" anchor="t" lIns="0" rIns="0" tIns="0" bIns="0">
-            <a:spAutoFit/>
-          </a:bodyPr>
-          <a:lstStyle/>
-          <a:p>
-            <a:pPr algn="l">
-              <a:spcAft>
-                <a:spcPts val="1350"/>
-              </a:spcAft>
-            </a:pPr>
-            <a:r>
-              <a:rPr sz="3000" b="1" i="0">
-                <a:solidFill>
-                  <a:srgbClr val="1C1B19"/>
-                </a:solidFill>
-                <a:latin typeface="Source Serif 4"/>
-              </a:rPr>
-              <a:t>Every student in the room</a:t>
-            </a:r>
-          </a:p>
-        </p:txBody>
-      </p:sp>
-      <p:sp>
-        <p:nvSpPr>
-          <p:cNvPr id="5" name="TextBox 4"/>
-          <p:cNvSpPr txBox="1"/>
-          <p:nvPr/>
-        </p:nvSpPr>
-        <p:spPr>
-          <a:xfrm>
-            <a:off x="548640" y="1325880"/>
-            <a:ext cx="10972800" cy="365760"/>
-          </a:xfrm>
-          <a:prstGeom prst="rect">
-            <a:avLst/>
-          </a:prstGeom>
-          <a:noFill/>
-        </p:spPr>
-        <p:txBody>
-          <a:bodyPr wrap="square" anchor="t" lIns="0" rIns="0" tIns="0" bIns="0">
-            <a:spAutoFit/>
-          </a:bodyPr>
-          <a:lstStyle/>
-          <a:p>
-            <a:pPr algn="l">
-              <a:spcAft>
-                <a:spcPts val="630"/>
-              </a:spcAft>
-            </a:pPr>
-            <a:r>
-              <a:rPr sz="1400" b="0" i="0">
+              <a:t>What's the after-feeling?</a:t>
+            </a:r>
+          </a:p>
+          <a:p>
+            <a:pPr algn="l">
+              <a:spcAft>
+                <a:spcPts val="945"/>
+              </a:spcAft>
+            </a:pPr>
+            <a:r>
+              <a:rPr sz="1600" b="0" i="0">
                 <a:solidFill>
                   <a:srgbClr val="5D5A54"/>
                 </a:solidFill>
-                <a:latin typeface="Inter Tight"/>
-              </a:rPr>
-              <a:t>Culture, family, identity, ability and money: what to keep in mind for this topic.</a:t>
-            </a:r>
-          </a:p>
-        </p:txBody>
-      </p:sp>
-      <p:sp>
-        <p:nvSpPr>
-          <p:cNvPr id="6" name="TextBox 5"/>
-          <p:cNvSpPr txBox="1"/>
-          <p:nvPr/>
-        </p:nvSpPr>
-        <p:spPr>
-          <a:xfrm>
-            <a:off x="548640" y="1828800"/>
-            <a:ext cx="5394960" cy="4572000"/>
-          </a:xfrm>
-          <a:prstGeom prst="rect">
-            <a:avLst/>
-          </a:prstGeom>
-          <a:noFill/>
-        </p:spPr>
-        <p:txBody>
-          <a:bodyPr wrap="square" anchor="t" lIns="0" rIns="0" tIns="0" bIns="0">
-            <a:spAutoFit/>
-          </a:bodyPr>
-          <a:lstStyle/>
-          <a:p>
-            <a:pPr algn="l">
-              <a:spcAft>
-                <a:spcPts val="585"/>
-              </a:spcAft>
-            </a:pPr>
-            <a:r>
-              <a:rPr sz="1500" b="1" i="0">
-                <a:solidFill>
-                  <a:srgbClr val="1C1B19"/>
-                </a:solidFill>
-                <a:latin typeface="Source Serif 4"/>
-              </a:rPr>
-              <a:t>"Is it a fair match?" carries the equity piece.</a:t>
-            </a:r>
-          </a:p>
-          <a:p>
-            <a:pPr algn="l">
-              <a:spcAft>
-                <a:spcPts val="585"/>
-              </a:spcAft>
-            </a:pPr>
-            <a:r>
-              <a:rPr sz="1300" b="0" i="0">
-                <a:solidFill>
-                  <a:srgbClr val="1C1B19"/>
-                </a:solidFill>
-                <a:latin typeface="Source Serif 4"/>
-              </a:rPr>
-              <a:t>Some students work, care for siblings, or have no paid summer options. Name that work as building something real (Jae's scenario), so the lesson doesn't treat a paid program as the standard.</a:t>
-            </a:r>
-          </a:p>
-          <a:p>
-            <a:pPr algn="l">
-              <a:spcAft>
-                <a:spcPts val="585"/>
-              </a:spcAft>
-            </a:pPr>
-            <a:r>
-              <a:rPr sz="1300" b="0" i="0">
-                <a:solidFill>
-                  <a:srgbClr val="1C1B19"/>
-                </a:solidFill>
-                <a:latin typeface="Source Serif 4"/>
-              </a:rPr>
-              <a:t/>
-            </a:r>
-          </a:p>
-          <a:p>
-            <a:pPr algn="l">
-              <a:spcAft>
-                <a:spcPts val="585"/>
-              </a:spcAft>
-            </a:pPr>
-            <a:r>
-              <a:rPr sz="1500" b="1" i="0">
-                <a:solidFill>
-                  <a:srgbClr val="1C1B19"/>
-                </a:solidFill>
-                <a:latin typeface="Source Serif 4"/>
-              </a:rPr>
-              <a:t>Families compare in different ways.</a:t>
-            </a:r>
-          </a:p>
-          <a:p>
-            <a:pPr algn="l">
-              <a:spcAft>
-                <a:spcPts val="585"/>
-              </a:spcAft>
-            </a:pPr>
-            <a:r>
-              <a:rPr sz="1300" b="0" i="0">
-                <a:solidFill>
-                  <a:srgbClr val="1C1B19"/>
-                </a:solidFill>
-                <a:latin typeface="Source Serif 4"/>
-              </a:rPr>
-              <a:t>Openly comparing to siblings or cousins is how some families show high hopes; others never mention achievement. Present both as normal and keep the reflection private. Avoid "In X families" generalizations.</a:t>
-            </a:r>
-          </a:p>
-          <a:p>
-            <a:pPr algn="l">
-              <a:spcAft>
-                <a:spcPts val="585"/>
-              </a:spcAft>
-            </a:pPr>
-            <a:r>
-              <a:rPr sz="1300" b="0" i="0">
-                <a:solidFill>
-                  <a:srgbClr val="1C1B19"/>
-                </a:solidFill>
-                <a:latin typeface="Source Serif 4"/>
-              </a:rPr>
-              <a:t/>
-            </a:r>
-          </a:p>
-          <a:p>
-            <a:pPr algn="l">
-              <a:spcAft>
-                <a:spcPts val="585"/>
-              </a:spcAft>
-            </a:pPr>
-            <a:r>
-              <a:rPr sz="1500" b="1" i="0">
-                <a:solidFill>
-                  <a:srgbClr val="1C1B19"/>
-                </a:solidFill>
-                <a:latin typeface="Source Serif 4"/>
-              </a:rPr>
-              <a:t>Who students see in their feeds.</a:t>
-            </a:r>
-          </a:p>
-          <a:p>
-            <a:pPr algn="l">
-              <a:spcAft>
-                <a:spcPts val="585"/>
-              </a:spcAft>
-            </a:pPr>
-            <a:r>
-              <a:rPr sz="1300" b="0" i="0">
-                <a:solidFill>
-                  <a:srgbClr val="1C1B19"/>
-                </a:solidFill>
-                <a:latin typeface="Source Serif 4"/>
-              </a:rPr>
-              <a:t>Students of color, LGBTQ+ students and disabled students may rarely see people like them, or may see them mocked. Following creators who share your identity is a valid "keep." Harassment aimed at identity is a counselor conversation that day.</a:t>
-            </a:r>
-          </a:p>
-          <a:p>
-            <a:pPr algn="l">
-              <a:spcAft>
-                <a:spcPts val="585"/>
-              </a:spcAft>
-            </a:pPr>
-            <a:r>
-              <a:rPr sz="1300" b="0" i="0">
-                <a:solidFill>
-                  <a:srgbClr val="1C1B19"/>
-                </a:solidFill>
-                <a:latin typeface="Source Serif 4"/>
-              </a:rPr>
-              <a:t/>
-            </a:r>
-          </a:p>
-        </p:txBody>
-      </p:sp>
-      <p:sp>
-        <p:nvSpPr>
-          <p:cNvPr id="7" name="TextBox 6"/>
-          <p:cNvSpPr txBox="1"/>
-          <p:nvPr/>
-        </p:nvSpPr>
-        <p:spPr>
-          <a:xfrm>
-            <a:off x="6217920" y="1828800"/>
-            <a:ext cx="5394960" cy="4572000"/>
-          </a:xfrm>
-          <a:prstGeom prst="rect">
-            <a:avLst/>
-          </a:prstGeom>
-          <a:noFill/>
-        </p:spPr>
-        <p:txBody>
-          <a:bodyPr wrap="square" anchor="t" lIns="0" rIns="0" tIns="0" bIns="0">
-            <a:spAutoFit/>
-          </a:bodyPr>
-          <a:lstStyle/>
-          <a:p>
-            <a:pPr algn="l">
-              <a:spcAft>
-                <a:spcPts val="585"/>
-              </a:spcAft>
-            </a:pPr>
-            <a:r>
-              <a:rPr sz="1500" b="1" i="0">
-                <a:solidFill>
-                  <a:srgbClr val="1C1B19"/>
-                </a:solidFill>
-                <a:latin typeface="Source Serif 4"/>
-              </a:rPr>
-              <a:t>Bodies.</a:t>
-            </a:r>
-          </a:p>
-          <a:p>
-            <a:pPr algn="l">
-              <a:spcAft>
-                <a:spcPts val="585"/>
-              </a:spcAft>
-            </a:pPr>
-            <a:r>
-              <a:rPr sz="1300" b="0" i="0">
-                <a:solidFill>
-                  <a:srgbClr val="1C1B19"/>
-                </a:solidFill>
-                <a:latin typeface="Source Serif 4"/>
-              </a:rPr>
-              <a:t>Keep every example about the after-feeling, never weight or shape. Students of every size and ability are in the room.</a:t>
-            </a:r>
-          </a:p>
-          <a:p>
-            <a:pPr algn="l">
-              <a:spcAft>
-                <a:spcPts val="585"/>
-              </a:spcAft>
-            </a:pPr>
-            <a:r>
-              <a:rPr sz="1300" b="0" i="0">
-                <a:solidFill>
-                  <a:srgbClr val="1C1B19"/>
-                </a:solidFill>
-                <a:latin typeface="Source Serif 4"/>
-              </a:rPr>
-              <a:t/>
-            </a:r>
-          </a:p>
-          <a:p>
-            <a:pPr algn="l">
-              <a:spcAft>
-                <a:spcPts val="585"/>
-              </a:spcAft>
-            </a:pPr>
-            <a:r>
-              <a:rPr sz="1500" b="1" i="0">
-                <a:solidFill>
-                  <a:srgbClr val="1C1B19"/>
-                </a:solidFill>
-                <a:latin typeface="Source Serif 4"/>
-              </a:rPr>
-              <a:t>Not everyone is online.</a:t>
-            </a:r>
-          </a:p>
-          <a:p>
-            <a:pPr algn="l">
-              <a:spcAft>
-                <a:spcPts val="585"/>
-              </a:spcAft>
-            </a:pPr>
-            <a:r>
-              <a:rPr sz="1300" b="0" i="0">
-                <a:solidFill>
-                  <a:srgbClr val="1C1B19"/>
-                </a:solidFill>
-                <a:latin typeface="Source Serif 4"/>
-              </a:rPr>
-              <a:t>Some families limit social media for religious, family or money reasons. Let those students apply the four questions to school, sports or family comparisons.</a:t>
-            </a:r>
-          </a:p>
-          <a:p>
-            <a:pPr algn="l">
-              <a:spcAft>
-                <a:spcPts val="585"/>
-              </a:spcAft>
-            </a:pPr>
-            <a:r>
-              <a:rPr sz="1300" b="0" i="0">
-                <a:solidFill>
-                  <a:srgbClr val="1C1B19"/>
-                </a:solidFill>
-                <a:latin typeface="Source Serif 4"/>
-              </a:rPr>
-              <a:t/>
-            </a:r>
-          </a:p>
-          <a:p>
-            <a:pPr algn="l">
-              <a:spcAft>
-                <a:spcPts val="585"/>
-              </a:spcAft>
-            </a:pPr>
-            <a:r>
-              <a:rPr sz="1500" b="1" i="0">
-                <a:solidFill>
-                  <a:srgbClr val="1C1B19"/>
-                </a:solidFill>
-                <a:latin typeface="Source Serif 4"/>
-              </a:rPr>
-              <a:t>No cost to any of the moves.</a:t>
-            </a:r>
-          </a:p>
-          <a:p>
-            <a:pPr algn="l">
-              <a:spcAft>
-                <a:spcPts val="585"/>
-              </a:spcAft>
-            </a:pPr>
-            <a:r>
-              <a:rPr sz="1300" b="0" i="0">
-                <a:solidFill>
-                  <a:srgbClr val="1C1B19"/>
-                </a:solidFill>
-                <a:latin typeface="Source Serif 4"/>
-              </a:rPr>
-              <a:t>Muting, hiding like counts and app limits are built into phones and apps. Nothing in the lesson requires a paid tool.</a:t>
-            </a:r>
-          </a:p>
-          <a:p>
-            <a:pPr algn="l">
-              <a:spcAft>
-                <a:spcPts val="585"/>
-              </a:spcAft>
-            </a:pPr>
-            <a:r>
-              <a:rPr sz="1300" b="0" i="0">
-                <a:solidFill>
-                  <a:srgbClr val="1C1B19"/>
-                </a:solidFill>
-                <a:latin typeface="Source Serif 4"/>
-              </a:rPr>
-              <a:t/>
-            </a:r>
-          </a:p>
-        </p:txBody>
-      </p:sp>
-    </p:spTree>
-  </p:cSld>
-  <p:clrMapOvr>
-    <a:masterClrMapping/>
-  </p:clrMapOvr>
-</p:sld>
-</file>
-
-<file path=ppt/slides/slide4.xml><?xml version="1.0" encoding="utf-8"?>
-<p:sld xmlns:a="http://schemas.openxmlformats.org/drawingml/2006/main" xmlns:p="http://schemas.openxmlformats.org/presentationml/2006/main" xmlns:r="http://schemas.openxmlformats.org/officeDocument/2006/relationships" show="0">
-  <p:cSld>
-    <p:bg>
-      <p:bgPr>
-        <a:solidFill>
-          <a:srgbClr val="EEEBE4"/>
-        </a:solidFill>
-        <a:effectLst/>
-      </p:bgPr>
-    </p:bg>
-    <p:spTree>
-      <p:nvGrpSpPr>
-        <p:cNvPr id="1" name=""/>
-        <p:cNvGrpSpPr/>
-        <p:nvPr/>
-      </p:nvGrpSpPr>
-      <p:grpSpPr/>
-      <p:sp>
-        <p:nvSpPr>
-          <p:cNvPr id="2" name="Rectangle 1"/>
-          <p:cNvSpPr/>
-          <p:nvPr/>
-        </p:nvSpPr>
-        <p:spPr>
-          <a:xfrm>
-            <a:off x="0" y="0"/>
-            <a:ext cx="12191695" cy="384048"/>
-          </a:xfrm>
-          <a:prstGeom prst="rect">
-            <a:avLst/>
-          </a:prstGeom>
-          <a:solidFill>
-            <a:srgbClr val="0B2D5B"/>
-          </a:solidFill>
-          <a:ln>
-            <a:noFill/>
-          </a:ln>
-          <a:effectLst/>
-        </p:spPr>
-        <p:style>
-          <a:lnRef idx="1">
-            <a:schemeClr val="accent1"/>
-          </a:lnRef>
-          <a:fillRef idx="3">
-            <a:schemeClr val="accent1"/>
-          </a:fillRef>
-          <a:effectRef idx="2">
-            <a:schemeClr val="accent1"/>
-          </a:effectRef>
-          <a:fontRef idx="minor">
-            <a:schemeClr val="lt1"/>
-          </a:fontRef>
-        </p:style>
-        <p:txBody>
-          <a:bodyPr rtlCol="0" anchor="ctr"/>
-          <a:lstStyle/>
-          <a:p>
-            <a:pPr algn="ctr"/>
-          </a:p>
-        </p:txBody>
-      </p:sp>
-      <p:sp>
-        <p:nvSpPr>
-          <p:cNvPr id="3" name="TextBox 2"/>
-          <p:cNvSpPr txBox="1"/>
-          <p:nvPr/>
-        </p:nvSpPr>
-        <p:spPr>
-          <a:xfrm>
-            <a:off x="548640" y="100584"/>
-            <a:ext cx="10972800" cy="274320"/>
-          </a:xfrm>
-          <a:prstGeom prst="rect">
-            <a:avLst/>
-          </a:prstGeom>
-          <a:noFill/>
-        </p:spPr>
-        <p:txBody>
-          <a:bodyPr wrap="square" anchor="t" lIns="0" rIns="0" tIns="0" bIns="0">
-            <a:spAutoFit/>
-          </a:bodyPr>
-          <a:lstStyle/>
-          <a:p>
-            <a:pPr algn="l">
-              <a:spcAft>
-                <a:spcPts val="495"/>
-              </a:spcAft>
-            </a:pPr>
-            <a:r>
-              <a:rPr sz="1100" b="1" i="0">
-                <a:solidFill>
-                  <a:srgbClr val="FFFFFF"/>
-                </a:solidFill>
-                <a:latin typeface="Inter Tight"/>
-              </a:rPr>
-              <a:t>TEACHER PAGE  ·  skipped when you present  ·  Background</a:t>
-            </a:r>
-          </a:p>
-        </p:txBody>
-      </p:sp>
-      <p:sp>
-        <p:nvSpPr>
-          <p:cNvPr id="4" name="TextBox 3"/>
-          <p:cNvSpPr txBox="1"/>
-          <p:nvPr/>
-        </p:nvSpPr>
-        <p:spPr>
-          <a:xfrm>
-            <a:off x="548640" y="685800"/>
-            <a:ext cx="10972800" cy="640080"/>
-          </a:xfrm>
-          <a:prstGeom prst="rect">
-            <a:avLst/>
-          </a:prstGeom>
-          <a:noFill/>
-        </p:spPr>
-        <p:txBody>
-          <a:bodyPr wrap="square" anchor="t" lIns="0" rIns="0" tIns="0" bIns="0">
-            <a:spAutoFit/>
-          </a:bodyPr>
-          <a:lstStyle/>
-          <a:p>
-            <a:pPr algn="l">
-              <a:spcAft>
-                <a:spcPts val="1350"/>
-              </a:spcAft>
-            </a:pPr>
-            <a:r>
-              <a:rPr sz="3000" b="1" i="0">
-                <a:solidFill>
-                  <a:srgbClr val="1C1B19"/>
-                </a:solidFill>
-                <a:latin typeface="Source Serif 4"/>
-              </a:rPr>
-              <a:t>What the research says</a:t>
-            </a:r>
-          </a:p>
-        </p:txBody>
-      </p:sp>
-      <p:sp>
-        <p:nvSpPr>
-          <p:cNvPr id="5" name="TextBox 4"/>
-          <p:cNvSpPr txBox="1"/>
-          <p:nvPr/>
-        </p:nvSpPr>
-        <p:spPr>
-          <a:xfrm>
-            <a:off x="548640" y="1463040"/>
-            <a:ext cx="5394960" cy="4937760"/>
-          </a:xfrm>
-          <a:prstGeom prst="rect">
-            <a:avLst/>
-          </a:prstGeom>
-          <a:noFill/>
-        </p:spPr>
-        <p:txBody>
-          <a:bodyPr wrap="square" anchor="t" lIns="0" rIns="0" tIns="0" bIns="0">
-            <a:spAutoFit/>
-          </a:bodyPr>
-          <a:lstStyle/>
-          <a:p>
-            <a:pPr algn="l">
-              <a:spcAft>
-                <a:spcPts val="585"/>
-              </a:spcAft>
-            </a:pPr>
-            <a:r>
-              <a:rPr sz="1300" b="0" i="0">
-                <a:solidFill>
-                  <a:srgbClr val="1C1B19"/>
-                </a:solidFill>
-                <a:latin typeface="Source Serif 4"/>
-              </a:rPr>
-              <a:t>People judge themselves by comparing to others, especially when there's no objective measure. For most of history the comparison group was a few dozen people you knew.</a:t>
-            </a:r>
-          </a:p>
-          <a:p>
-            <a:pPr algn="l">
-              <a:spcAft>
-                <a:spcPts val="585"/>
-              </a:spcAft>
-            </a:pPr>
-            <a:r>
-              <a:rPr sz="1050" b="0" i="0">
-                <a:solidFill>
-                  <a:srgbClr val="5D5A54"/>
-                </a:solidFill>
-                <a:latin typeface="Inter Tight"/>
-              </a:rPr>
-              <a:t>Festinger, 1954</a:t>
-            </a:r>
-          </a:p>
-          <a:p>
-            <a:pPr algn="l">
-              <a:spcAft>
-                <a:spcPts val="585"/>
-              </a:spcAft>
-            </a:pPr>
-            <a:r>
-              <a:rPr sz="1300" b="0" i="0">
-                <a:solidFill>
-                  <a:srgbClr val="1C1B19"/>
-                </a:solidFill>
-                <a:latin typeface="Source Serif 4"/>
-              </a:rPr>
-              <a:t>In a simulated Instagram feed, photos with more likes activated teens' reward circuitry, and teens were more likely to like photos that already had many likes, including risky ones.</a:t>
-            </a:r>
-          </a:p>
-          <a:p>
-            <a:pPr algn="l">
-              <a:spcAft>
-                <a:spcPts val="585"/>
-              </a:spcAft>
-            </a:pPr>
-            <a:r>
-              <a:rPr sz="1050" b="0" i="0">
-                <a:solidFill>
-                  <a:srgbClr val="5D5A54"/>
-                </a:solidFill>
-                <a:latin typeface="Inter Tight"/>
-              </a:rPr>
-              <a:t>Sherman et al., Psychological Science, 2016 (UCLA)</a:t>
-            </a:r>
-          </a:p>
-          <a:p>
-            <a:pPr algn="l">
-              <a:spcAft>
-                <a:spcPts val="585"/>
-              </a:spcAft>
-            </a:pPr>
-            <a:r>
-              <a:rPr sz="1300" b="0" i="0">
-                <a:solidFill>
-                  <a:srgbClr val="1C1B19"/>
-                </a:solidFill>
-                <a:latin typeface="Source Serif 4"/>
-              </a:rPr>
-              <a:t>People consistently underestimate how often peers feel sad, lonely or anxious. Those who underestimated more reported more loneliness.</a:t>
-            </a:r>
-          </a:p>
-          <a:p>
-            <a:pPr algn="l">
-              <a:spcAft>
-                <a:spcPts val="585"/>
-              </a:spcAft>
-            </a:pPr>
-            <a:r>
-              <a:rPr sz="1050" b="0" i="0">
-                <a:solidFill>
-                  <a:srgbClr val="5D5A54"/>
-                </a:solidFill>
-                <a:latin typeface="Inter Tight"/>
-              </a:rPr>
-              <a:t>Jordan et al., 2011 (Stanford)</a:t>
-            </a:r>
-          </a:p>
-        </p:txBody>
-      </p:sp>
-      <p:sp>
-        <p:nvSpPr>
-          <p:cNvPr id="6" name="TextBox 5"/>
-          <p:cNvSpPr txBox="1"/>
-          <p:nvPr/>
-        </p:nvSpPr>
-        <p:spPr>
-          <a:xfrm>
-            <a:off x="6217920" y="1463040"/>
-            <a:ext cx="5394960" cy="4937760"/>
-          </a:xfrm>
-          <a:prstGeom prst="rect">
-            <a:avLst/>
-          </a:prstGeom>
-          <a:noFill/>
-        </p:spPr>
-        <p:txBody>
-          <a:bodyPr wrap="square" anchor="t" lIns="0" rIns="0" tIns="0" bIns="0">
-            <a:spAutoFit/>
-          </a:bodyPr>
-          <a:lstStyle/>
-          <a:p>
-            <a:pPr algn="l">
-              <a:spcAft>
-                <a:spcPts val="585"/>
-              </a:spcAft>
-            </a:pPr>
-            <a:r>
-              <a:rPr sz="1300" b="0" i="0">
-                <a:solidFill>
-                  <a:srgbClr val="1C1B19"/>
-                </a:solidFill>
-                <a:latin typeface="Source Serif 4"/>
-              </a:rPr>
-              <a:t>Heavier Facebook users had lower self-esteem, explained by exposure to people who seemed to be doing better. Viewing one upbeat profile lowered how people felt about themselves.</a:t>
-            </a:r>
-          </a:p>
-          <a:p>
-            <a:pPr algn="l">
-              <a:spcAft>
-                <a:spcPts val="585"/>
-              </a:spcAft>
-            </a:pPr>
-            <a:r>
-              <a:rPr sz="1050" b="0" i="0">
-                <a:solidFill>
-                  <a:srgbClr val="5D5A54"/>
-                </a:solidFill>
-                <a:latin typeface="Inter Tight"/>
-              </a:rPr>
-              <a:t>Vogel et al., 2014</a:t>
-            </a:r>
-          </a:p>
-          <a:p>
-            <a:pPr algn="l">
-              <a:spcAft>
-                <a:spcPts val="585"/>
-              </a:spcAft>
-            </a:pPr>
-            <a:r>
-              <a:rPr sz="1300" b="0" i="0">
-                <a:solidFill>
-                  <a:srgbClr val="1C1B19"/>
-                </a:solidFill>
-                <a:latin typeface="Source Serif 4"/>
-              </a:rPr>
-              <a:t>143 college students limited Facebook, Instagram and Snapchat to 10 minutes each per day for three weeks and reported less loneliness and fewer depression symptoms. Small sample, a strong hint rather than the final word.</a:t>
-            </a:r>
-          </a:p>
-          <a:p>
-            <a:pPr algn="l">
-              <a:spcAft>
-                <a:spcPts val="585"/>
-              </a:spcAft>
-            </a:pPr>
-            <a:r>
-              <a:rPr sz="1050" b="0" i="0">
-                <a:solidFill>
-                  <a:srgbClr val="5D5A54"/>
-                </a:solidFill>
-                <a:latin typeface="Inter Tight"/>
-              </a:rPr>
-              <a:t>Hunt et al., 2018 (Penn)</a:t>
-            </a:r>
-          </a:p>
-          <a:p>
-            <a:pPr algn="l">
-              <a:spcAft>
-                <a:spcPts val="585"/>
-              </a:spcAft>
-            </a:pPr>
-            <a:r>
-              <a:rPr sz="1300" b="0" i="0">
-                <a:solidFill>
-                  <a:srgbClr val="1C1B19"/>
-                </a:solidFill>
-                <a:latin typeface="Source Serif 4"/>
-              </a:rPr>
-              <a:t>Young women who saw "Instagram vs reality" pairs felt better about their bodies than those who saw only the posed photos.</a:t>
-            </a:r>
-          </a:p>
-          <a:p>
-            <a:pPr algn="l">
-              <a:spcAft>
-                <a:spcPts val="585"/>
-              </a:spcAft>
-            </a:pPr>
-            <a:r>
-              <a:rPr sz="1050" b="0" i="0">
-                <a:solidFill>
-                  <a:srgbClr val="5D5A54"/>
-                </a:solidFill>
-                <a:latin typeface="Inter Tight"/>
-              </a:rPr>
-              <a:t>Tiggemann and Anderberg, 2020</a:t>
-            </a:r>
-          </a:p>
-        </p:txBody>
-      </p:sp>
-    </p:spTree>
-  </p:cSld>
-  <p:clrMapOvr>
-    <a:masterClrMapping/>
-  </p:clrMapOvr>
-</p:sld>
-</file>
-
-<file path=ppt/slides/slide5.xml><?xml version="1.0" encoding="utf-8"?>
-<p:sld xmlns:a="http://schemas.openxmlformats.org/drawingml/2006/main" xmlns:p="http://schemas.openxmlformats.org/presentationml/2006/main" xmlns:r="http://schemas.openxmlformats.org/officeDocument/2006/relationships">
-  <p:cSld>
-    <p:bg>
-      <p:bgPr>
-        <a:solidFill>
-          <a:srgbClr val="0B2D5B"/>
-        </a:solidFill>
-        <a:effectLst/>
-      </p:bgPr>
-    </p:bg>
-    <p:spTree>
-      <p:nvGrpSpPr>
-        <p:cNvPr id="1" name=""/>
-        <p:cNvGrpSpPr/>
-        <p:nvPr/>
-      </p:nvGrpSpPr>
-      <p:grpSpPr/>
-      <p:sp>
-        <p:nvSpPr>
-          <p:cNvPr id="2" name="Rectangle 1"/>
-          <p:cNvSpPr/>
-          <p:nvPr/>
-        </p:nvSpPr>
-        <p:spPr>
-          <a:xfrm>
-            <a:off x="548640" y="502920"/>
-            <a:ext cx="457200" cy="54864"/>
-          </a:xfrm>
-          <a:prstGeom prst="rect">
-            <a:avLst/>
-          </a:prstGeom>
-          <a:solidFill>
-            <a:srgbClr val="F47B20"/>
-          </a:solidFill>
-          <a:ln>
-            <a:noFill/>
-          </a:ln>
-          <a:effectLst/>
-        </p:spPr>
-        <p:style>
-          <a:lnRef idx="1">
-            <a:schemeClr val="accent1"/>
-          </a:lnRef>
-          <a:fillRef idx="3">
-            <a:schemeClr val="accent1"/>
-          </a:fillRef>
-          <a:effectRef idx="2">
-            <a:schemeClr val="accent1"/>
-          </a:effectRef>
-          <a:fontRef idx="minor">
-            <a:schemeClr val="lt1"/>
-          </a:fontRef>
-        </p:style>
-        <p:txBody>
-          <a:bodyPr rtlCol="0" anchor="ctr"/>
-          <a:lstStyle/>
-          <a:p>
-            <a:pPr algn="ctr"/>
-          </a:p>
-        </p:txBody>
-      </p:sp>
-      <p:sp>
-        <p:nvSpPr>
-          <p:cNvPr id="3" name="TextBox 2"/>
-          <p:cNvSpPr txBox="1"/>
-          <p:nvPr/>
-        </p:nvSpPr>
-        <p:spPr>
-          <a:xfrm>
-            <a:off x="1143000" y="393192"/>
-            <a:ext cx="8229600" cy="274320"/>
-          </a:xfrm>
-          <a:prstGeom prst="rect">
-            <a:avLst/>
-          </a:prstGeom>
-          <a:noFill/>
-        </p:spPr>
-        <p:txBody>
-          <a:bodyPr wrap="square" anchor="t" lIns="0" rIns="0" tIns="0" bIns="0">
-            <a:spAutoFit/>
-          </a:bodyPr>
-          <a:lstStyle/>
-          <a:p>
-            <a:pPr algn="l">
-              <a:spcAft>
-                <a:spcPts val="540"/>
-              </a:spcAft>
-            </a:pPr>
-            <a:r>
-              <a:rPr sz="1200" b="1" i="0">
-                <a:solidFill>
-                  <a:srgbClr val="5D5A54"/>
-                </a:solidFill>
-                <a:latin typeface="Inter Tight"/>
-              </a:rPr>
-              <a:t>THE COMPARISON TRAP</a:t>
-            </a:r>
-          </a:p>
-        </p:txBody>
-      </p:sp>
-      <p:sp>
-        <p:nvSpPr>
-          <p:cNvPr id="4" name="TextBox 3"/>
-          <p:cNvSpPr txBox="1"/>
-          <p:nvPr/>
-        </p:nvSpPr>
-        <p:spPr>
-          <a:xfrm>
-            <a:off x="8229600" y="6400800"/>
-            <a:ext cx="3410712" cy="274320"/>
-          </a:xfrm>
-          <a:prstGeom prst="rect">
-            <a:avLst/>
-          </a:prstGeom>
-          <a:noFill/>
-        </p:spPr>
-        <p:txBody>
-          <a:bodyPr wrap="square" anchor="t" lIns="0" rIns="0" tIns="0" bIns="0">
-            <a:spAutoFit/>
-          </a:bodyPr>
-          <a:lstStyle/>
-          <a:p>
-            <a:pPr algn="r">
-              <a:spcAft>
-                <a:spcPts val="450"/>
-              </a:spcAft>
-            </a:pPr>
-            <a:r>
-              <a:rPr sz="1000" b="0" i="0">
-                <a:solidFill>
-                  <a:srgbClr val="5D5A54"/>
-                </a:solidFill>
-                <a:latin typeface="Inter Tight"/>
-              </a:rPr>
-              <a:t>Beaver Counseling</a:t>
-            </a:r>
-          </a:p>
-        </p:txBody>
-      </p:sp>
-      <p:sp>
-        <p:nvSpPr>
-          <p:cNvPr id="5" name="TextBox 4"/>
-          <p:cNvSpPr txBox="1"/>
-          <p:nvPr/>
-        </p:nvSpPr>
-        <p:spPr>
-          <a:xfrm>
-            <a:off x="822960" y="2011680"/>
-            <a:ext cx="10515600" cy="1463040"/>
-          </a:xfrm>
-          <a:prstGeom prst="rect">
-            <a:avLst/>
-          </a:prstGeom>
-          <a:noFill/>
-        </p:spPr>
-        <p:txBody>
-          <a:bodyPr wrap="square" anchor="b" lIns="0" rIns="0" tIns="0" bIns="0">
-            <a:spAutoFit/>
-          </a:bodyPr>
-          <a:lstStyle/>
-          <a:p>
-            <a:pPr algn="l">
-              <a:spcAft>
-                <a:spcPts val="2700"/>
-              </a:spcAft>
-            </a:pPr>
-            <a:r>
-              <a:rPr sz="6000" b="1" i="0">
-                <a:solidFill>
-                  <a:srgbClr val="FFFFFF"/>
-                </a:solidFill>
-                <a:latin typeface="Source Serif 4"/>
-              </a:rPr>
-              <a:t>The Comparison Trap</a:t>
-            </a:r>
-          </a:p>
-        </p:txBody>
-      </p:sp>
-      <p:sp>
-        <p:nvSpPr>
-          <p:cNvPr id="6" name="TextBox 5"/>
-          <p:cNvSpPr txBox="1"/>
-          <p:nvPr/>
-        </p:nvSpPr>
-        <p:spPr>
-          <a:xfrm>
-            <a:off x="822960" y="3611880"/>
-            <a:ext cx="10515600" cy="914400"/>
-          </a:xfrm>
-          <a:prstGeom prst="rect">
-            <a:avLst/>
-          </a:prstGeom>
-          <a:noFill/>
-        </p:spPr>
-        <p:txBody>
-          <a:bodyPr wrap="square" anchor="t" lIns="0" rIns="0" tIns="0" bIns="0">
-            <a:spAutoFit/>
-          </a:bodyPr>
-          <a:lstStyle/>
-          <a:p>
-            <a:pPr algn="l">
-              <a:spcAft>
-                <a:spcPts val="1080"/>
-              </a:spcAft>
-            </a:pPr>
-            <a:r>
-              <a:rPr sz="2400" b="0" i="1">
-                <a:solidFill>
-                  <a:srgbClr val="E8E4DA"/>
-                </a:solidFill>
-                <a:latin typeface="Source Serif 4"/>
-              </a:rPr>
-              <a:t>You know feeds are highlight reels. It still lands. Here's why.</a:t>
-            </a:r>
-          </a:p>
-        </p:txBody>
-      </p:sp>
-      <p:sp>
-        <p:nvSpPr>
-          <p:cNvPr id="7" name="TextBox 6"/>
-          <p:cNvSpPr txBox="1"/>
-          <p:nvPr/>
-        </p:nvSpPr>
-        <p:spPr>
-          <a:xfrm>
-            <a:off x="822960" y="6035040"/>
-            <a:ext cx="7315200" cy="365760"/>
-          </a:xfrm>
-          <a:prstGeom prst="rect">
-            <a:avLst/>
-          </a:prstGeom>
-          <a:noFill/>
-        </p:spPr>
-        <p:txBody>
-          <a:bodyPr wrap="square" anchor="t" lIns="0" rIns="0" tIns="0" bIns="0">
-            <a:spAutoFit/>
-          </a:bodyPr>
-          <a:lstStyle/>
-          <a:p>
-            <a:pPr algn="l">
-              <a:spcAft>
-                <a:spcPts val="585"/>
-              </a:spcAft>
-            </a:pPr>
-            <a:r>
-              <a:rPr sz="1300" b="0" i="0">
-                <a:solidFill>
-                  <a:srgbClr val="E8E4DA"/>
-                </a:solidFill>
-                <a:latin typeface="Inter Tight"/>
-              </a:rPr>
-              <a:t>Beaver Upper School · Counseling</a:t>
+                <a:latin typeface="Source Serif 4"/>
+              </a:rPr>
+              <a:t>If an account reliably leaves you worse, that's worth acting on.</a:t>
             </a:r>
           </a:p>
         </p:txBody>
@@ -8184,7 +8597,7 @@
                 </a:solidFill>
                 <a:latin typeface="Inter Tight"/>
               </a:rPr>
-              <a:t>THE GUESS</a:t>
+              <a:t>TRY IT</a:t>
             </a:r>
           </a:p>
         </p:txBody>
@@ -8230,45 +8643,40 @@
       </p:sp>
       <p:sp>
         <p:nvSpPr>
-          <p:cNvPr id="5" name="Rectangle 4"/>
-          <p:cNvSpPr/>
+          <p:cNvPr id="5" name="TextBox 4"/>
+          <p:cNvSpPr txBox="1"/>
           <p:nvPr/>
         </p:nvSpPr>
         <p:spPr>
           <a:xfrm>
-            <a:off x="822960" y="1371600"/>
-            <a:ext cx="73152" cy="3566160"/>
-          </a:xfrm>
-          <a:prstGeom prst="rect">
-            <a:avLst/>
-          </a:prstGeom>
-          <a:solidFill>
-            <a:srgbClr val="F47B20"/>
-          </a:solidFill>
-          <a:ln>
-            <a:noFill/>
-          </a:ln>
-          <a:effectLst/>
-        </p:spPr>
-        <p:style>
-          <a:lnRef idx="1">
-            <a:schemeClr val="accent1"/>
-          </a:lnRef>
-          <a:fillRef idx="3">
-            <a:schemeClr val="accent1"/>
-          </a:fillRef>
-          <a:effectRef idx="2">
-            <a:schemeClr val="accent1"/>
-          </a:effectRef>
-          <a:fontRef idx="minor">
-            <a:schemeClr val="lt1"/>
-          </a:fontRef>
-        </p:style>
-        <p:txBody>
-          <a:bodyPr rtlCol="0" anchor="ctr"/>
-          <a:lstStyle/>
-          <a:p>
-            <a:pPr algn="ctr"/>
+            <a:off x="822960" y="1463040"/>
+            <a:ext cx="10515600" cy="3291840"/>
+          </a:xfrm>
+          <a:prstGeom prst="rect">
+            <a:avLst/>
+          </a:prstGeom>
+          <a:noFill/>
+        </p:spPr>
+        <p:txBody>
+          <a:bodyPr wrap="square" anchor="ctr" lIns="0" rIns="0" tIns="0" bIns="0">
+            <a:spAutoFit/>
+          </a:bodyPr>
+          <a:lstStyle/>
+          <a:p>
+            <a:pPr algn="l">
+              <a:spcAft>
+                <a:spcPts val="2070"/>
+              </a:spcAft>
+            </a:pPr>
+            <a:r>
+              <a:rPr sz="4600" b="1" i="0">
+                <a:solidFill>
+                  <a:srgbClr val="1C1B19"/>
+                </a:solidFill>
+                <a:latin typeface="Source Serif 4"/>
+              </a:rPr>
+              <a:t>"Got into my dream summer program!! So grateful 🙏"</a:t>
+            </a:r>
           </a:p>
         </p:txBody>
       </p:sp>
@@ -8280,47 +8688,8 @@
         </p:nvSpPr>
         <p:spPr>
           <a:xfrm>
-            <a:off x="1188720" y="1371600"/>
-            <a:ext cx="10058400" cy="3566160"/>
-          </a:xfrm>
-          <a:prstGeom prst="rect">
-            <a:avLst/>
-          </a:prstGeom>
-          <a:noFill/>
-        </p:spPr>
-        <p:txBody>
-          <a:bodyPr wrap="square" anchor="ctr" lIns="0" rIns="0" tIns="0" bIns="0">
-            <a:spAutoFit/>
-          </a:bodyPr>
-          <a:lstStyle/>
-          <a:p>
-            <a:pPr algn="l">
-              <a:spcAft>
-                <a:spcPts val="1800"/>
-              </a:spcAft>
-            </a:pPr>
-            <a:r>
-              <a:rPr sz="4000" b="0" i="1">
-                <a:solidFill>
-                  <a:srgbClr val="1C1B19"/>
-                </a:solidFill>
-                <a:latin typeface="Source Serif 4"/>
-              </a:rPr>
-              <a:t>How many people in this room felt left out or behind at least once this week?</a:t>
-            </a:r>
-          </a:p>
-        </p:txBody>
-      </p:sp>
-      <p:sp>
-        <p:nvSpPr>
-          <p:cNvPr id="7" name="TextBox 6"/>
-          <p:cNvSpPr txBox="1"/>
-          <p:nvPr/>
-        </p:nvSpPr>
-        <p:spPr>
-          <a:xfrm>
-            <a:off x="1188720" y="5120640"/>
-            <a:ext cx="10058400" cy="914400"/>
+            <a:off x="822960" y="4846320"/>
+            <a:ext cx="10515600" cy="1097280"/>
           </a:xfrm>
           <a:prstGeom prst="rect">
             <a:avLst/>
@@ -8335,17 +8704,17 @@
           <a:p>
             <a:pPr algn="l">
               <a:spcAft>
-                <a:spcPts val="810"/>
-              </a:spcAft>
-            </a:pPr>
-            <a:r>
-              <a:rPr sz="1800" b="0" i="0">
+                <a:spcPts val="990"/>
+              </a:spcAft>
+            </a:pPr>
+            <a:r>
+              <a:rPr sz="2200" b="0" i="1">
                 <a:solidFill>
                   <a:srgbClr val="5D5A54"/>
                 </a:solidFill>
-                <a:latin typeface="Inter Tight"/>
-              </a:rPr>
-              <a:t>Write your guess. Then, on a separate scrap, write yes or no for yourself. Fold it. No names.</a:t>
+                <a:latin typeface="Source Serif 4"/>
+              </a:rPr>
+              <a:t>A classmate's post. Run the four questions in your group.</a:t>
             </a:r>
           </a:p>
         </p:txBody>
@@ -8454,7 +8823,7 @@
                 </a:solidFill>
                 <a:latin typeface="Inter Tight"/>
               </a:rPr>
-              <a:t>THE HIGHLIGHT FILTER</a:t>
+              <a:t>PRIVATE ACCOUNT AUDIT</a:t>
             </a:r>
           </a:p>
         </p:txBody>
@@ -8532,7 +8901,7 @@
                 </a:solidFill>
                 <a:latin typeface="Source Serif 4"/>
               </a:rPr>
-              <a:t>Their outside, your inside</a:t>
+              <a:t>Think of the five accounts you see most.</a:t>
             </a:r>
           </a:p>
         </p:txBody>
@@ -8617,7 +8986,7 @@
                 </a:solidFill>
                 <a:latin typeface="Inter Tight"/>
               </a:rPr>
-              <a:t>WHAT YOU SEE OF THEM</a:t>
+              <a:t>KEEP</a:t>
             </a:r>
           </a:p>
         </p:txBody>
@@ -8656,7 +9025,7 @@
                 </a:solidFill>
                 <a:latin typeface="Source Serif 4"/>
               </a:rPr>
-              <a:t>The best take</a:t>
+              <a:t>Makes me laugh</a:t>
             </a:r>
           </a:p>
           <a:p>
@@ -8672,7 +9041,7 @@
                 </a:solidFill>
                 <a:latin typeface="Source Serif 4"/>
               </a:rPr>
-              <a:t>The good news</a:t>
+              <a:t>Teaches me something I use</a:t>
             </a:r>
           </a:p>
           <a:p>
@@ -8688,7 +9057,7 @@
                 </a:solidFill>
                 <a:latin typeface="Source Serif 4"/>
               </a:rPr>
-              <a:t>The trip, the win, the party</a:t>
+              <a:t>Real people, real life</a:t>
             </a:r>
           </a:p>
           <a:p>
@@ -8704,7 +9073,7 @@
                 </a:solidFill>
                 <a:latin typeface="Source Serif 4"/>
               </a:rPr>
-              <a:t>Edited and captioned</a:t>
+              <a:t>Makes me want to go do something</a:t>
             </a:r>
           </a:p>
         </p:txBody>
@@ -8789,7 +9158,7 @@
                 </a:solidFill>
                 <a:latin typeface="Inter Tight"/>
               </a:rPr>
-              <a:t>WHAT YOU KNOW ABOUT YOU</a:t>
+              <a:t>MUTE</a:t>
             </a:r>
           </a:p>
         </p:txBody>
@@ -8828,7 +9197,7 @@
                 </a:solidFill>
                 <a:latin typeface="Source Serif 4"/>
               </a:rPr>
-              <a:t>The doubts</a:t>
+              <a:t>Leaves me feeling not enough</a:t>
             </a:r>
           </a:p>
           <a:p>
@@ -8844,7 +9213,7 @@
                 </a:solidFill>
                 <a:latin typeface="Source Serif 4"/>
               </a:rPr>
-              <a:t>The bad days</a:t>
+              <a:t>Leaves me feeling left out</a:t>
             </a:r>
           </a:p>
           <a:p>
@@ -8860,7 +9229,7 @@
                 </a:solidFill>
                 <a:latin typeface="Source Serif 4"/>
               </a:rPr>
-              <a:t>The unfiltered face</a:t>
+              <a:t>Makes me want to buy something to fix myself</a:t>
             </a:r>
           </a:p>
           <a:p>
@@ -8876,7 +9245,7 @@
                 </a:solidFill>
                 <a:latin typeface="Source Serif 4"/>
               </a:rPr>
-              <a:t>Everything that didn't make the post</a:t>
+              <a:t>Leaves me anxious or angry</a:t>
             </a:r>
           </a:p>
         </p:txBody>
@@ -8985,7 +9354,7 @@
                 </a:solidFill>
                 <a:latin typeface="Inter Tight"/>
               </a:rPr>
-              <a:t>THE FOUR-QUESTION CHECK</a:t>
+              <a:t>THREE MOMENTS</a:t>
             </a:r>
           </a:p>
         </p:txBody>
@@ -9038,7 +9407,7 @@
         <p:spPr>
           <a:xfrm>
             <a:off x="822960" y="1005840"/>
-            <a:ext cx="10515600" cy="1097280"/>
+            <a:ext cx="10515600" cy="914400"/>
           </a:xfrm>
           <a:prstGeom prst="rect">
             <a:avLst/>
@@ -9053,31 +9422,77 @@
           <a:p>
             <a:pPr algn="l">
               <a:spcAft>
-                <a:spcPts val="1620"/>
-              </a:spcAft>
-            </a:pPr>
-            <a:r>
-              <a:rPr sz="3600" b="1" i="0">
+                <a:spcPts val="1530"/>
+              </a:spcAft>
+            </a:pPr>
+            <a:r>
+              <a:rPr sz="3400" b="1" i="0">
                 <a:solidFill>
                   <a:srgbClr val="1C1B19"/>
                 </a:solidFill>
                 <a:latin typeface="Source Serif 4"/>
               </a:rPr>
-              <a:t>When a post stings, ask:</a:t>
-            </a:r>
-          </a:p>
-        </p:txBody>
-      </p:sp>
-      <p:sp>
-        <p:nvSpPr>
-          <p:cNvPr id="6" name="TextBox 5"/>
+              <a:t>What helps most?</a:t>
+            </a:r>
+          </a:p>
+        </p:txBody>
+      </p:sp>
+      <p:sp>
+        <p:nvSpPr>
+          <p:cNvPr id="6" name="Rectangle 5"/>
+          <p:cNvSpPr/>
+          <p:nvPr/>
+        </p:nvSpPr>
+        <p:spPr>
+          <a:xfrm>
+            <a:off x="822960" y="2103120"/>
+            <a:ext cx="3322320" cy="3840480"/>
+          </a:xfrm>
+          <a:prstGeom prst="rect">
+            <a:avLst/>
+          </a:prstGeom>
+          <a:solidFill>
+            <a:srgbClr val="FFFFFF"/>
+          </a:solidFill>
+          <a:ln w="15875">
+            <a:solidFill>
+              <a:srgbClr val="D8D2C6"/>
+            </a:solidFill>
+          </a:ln>
+          <a:effectLst/>
+        </p:spPr>
+        <p:style>
+          <a:lnRef idx="1">
+            <a:schemeClr val="accent1"/>
+          </a:lnRef>
+          <a:fillRef idx="3">
+            <a:schemeClr val="accent1"/>
+          </a:fillRef>
+          <a:effectRef idx="2">
+            <a:schemeClr val="accent1"/>
+          </a:effectRef>
+          <a:fontRef idx="minor">
+            <a:schemeClr val="lt1"/>
+          </a:fontRef>
+        </p:style>
+        <p:txBody>
+          <a:bodyPr rtlCol="0" anchor="ctr"/>
+          <a:lstStyle/>
+          <a:p>
+            <a:pPr algn="ctr"/>
+          </a:p>
+        </p:txBody>
+      </p:sp>
+      <p:sp>
+        <p:nvSpPr>
+          <p:cNvPr id="7" name="TextBox 6"/>
           <p:cNvSpPr txBox="1"/>
           <p:nvPr/>
         </p:nvSpPr>
         <p:spPr>
           <a:xfrm>
-            <a:off x="822960" y="2194560"/>
-            <a:ext cx="548640" cy="1005840"/>
+            <a:off x="1051560" y="2286000"/>
+            <a:ext cx="2865120" cy="365760"/>
           </a:xfrm>
           <a:prstGeom prst="rect">
             <a:avLst/>
@@ -9092,31 +9507,31 @@
           <a:p>
             <a:pPr algn="l">
               <a:spcAft>
-                <a:spcPts val="1170"/>
-              </a:spcAft>
-            </a:pPr>
-            <a:r>
-              <a:rPr sz="2600" b="1" i="0">
-                <a:solidFill>
-                  <a:srgbClr val="F47B20"/>
-                </a:solidFill>
-                <a:latin typeface="Source Serif 4"/>
-              </a:rPr>
-              <a:t>1</a:t>
-            </a:r>
-          </a:p>
-        </p:txBody>
-      </p:sp>
-      <p:sp>
-        <p:nvSpPr>
-          <p:cNvPr id="7" name="TextBox 6"/>
+                <a:spcPts val="585"/>
+              </a:spcAft>
+            </a:pPr>
+            <a:r>
+              <a:rPr sz="1300" b="1" i="0">
+                <a:solidFill>
+                  <a:srgbClr val="0B2D5B"/>
+                </a:solidFill>
+                <a:latin typeface="Inter Tight"/>
+              </a:rPr>
+              <a:t>DECEMBER, SENIOR YEAR</a:t>
+            </a:r>
+          </a:p>
+        </p:txBody>
+      </p:sp>
+      <p:sp>
+        <p:nvSpPr>
+          <p:cNvPr id="8" name="TextBox 7"/>
           <p:cNvSpPr txBox="1"/>
           <p:nvPr/>
         </p:nvSpPr>
         <p:spPr>
           <a:xfrm>
-            <a:off x="1463040" y="2231136"/>
-            <a:ext cx="9875520" cy="1005840"/>
+            <a:off x="1051560" y="2743200"/>
+            <a:ext cx="2865120" cy="3017520"/>
           </a:xfrm>
           <a:prstGeom prst="rect">
             <a:avLst/>
@@ -9131,47 +9546,77 @@
           <a:p>
             <a:pPr algn="l">
               <a:spcAft>
-                <a:spcPts val="945"/>
-              </a:spcAft>
-            </a:pPr>
-            <a:r>
-              <a:rPr sz="2100" b="1" i="0">
+                <a:spcPts val="810"/>
+              </a:spcAft>
+            </a:pPr>
+            <a:r>
+              <a:rPr sz="1800" b="0" i="0">
                 <a:solidFill>
                   <a:srgbClr val="1C1B19"/>
                 </a:solidFill>
                 <a:latin typeface="Source Serif 4"/>
               </a:rPr>
-              <a:t>Is it real?</a:t>
-            </a:r>
-          </a:p>
-          <a:p>
-            <a:pPr algn="l">
-              <a:spcAft>
-                <a:spcPts val="945"/>
-              </a:spcAft>
-            </a:pPr>
-            <a:r>
-              <a:rPr sz="1600" b="0" i="0">
-                <a:solidFill>
-                  <a:srgbClr val="5D5A54"/>
-                </a:solidFill>
-                <a:latin typeface="Source Serif 4"/>
-              </a:rPr>
-              <a:t>How much is the best take, cropped and captioned?</a:t>
-            </a:r>
-          </a:p>
-        </p:txBody>
-      </p:sp>
-      <p:sp>
-        <p:nvSpPr>
-          <p:cNvPr id="8" name="TextBox 7"/>
+              <a:t>Your feed is wall-to-wall early decision acceptances. You haven't heard back yet.</a:t>
+            </a:r>
+          </a:p>
+        </p:txBody>
+      </p:sp>
+      <p:sp>
+        <p:nvSpPr>
+          <p:cNvPr id="9" name="Rectangle 8"/>
+          <p:cNvSpPr/>
+          <p:nvPr/>
+        </p:nvSpPr>
+        <p:spPr>
+          <a:xfrm>
+            <a:off x="4419600" y="2103120"/>
+            <a:ext cx="3322320" cy="3840480"/>
+          </a:xfrm>
+          <a:prstGeom prst="rect">
+            <a:avLst/>
+          </a:prstGeom>
+          <a:solidFill>
+            <a:srgbClr val="FFFFFF"/>
+          </a:solidFill>
+          <a:ln w="15875">
+            <a:solidFill>
+              <a:srgbClr val="D8D2C6"/>
+            </a:solidFill>
+          </a:ln>
+          <a:effectLst/>
+        </p:spPr>
+        <p:style>
+          <a:lnRef idx="1">
+            <a:schemeClr val="accent1"/>
+          </a:lnRef>
+          <a:fillRef idx="3">
+            <a:schemeClr val="accent1"/>
+          </a:fillRef>
+          <a:effectRef idx="2">
+            <a:schemeClr val="accent1"/>
+          </a:effectRef>
+          <a:fontRef idx="minor">
+            <a:schemeClr val="lt1"/>
+          </a:fontRef>
+        </p:style>
+        <p:txBody>
+          <a:bodyPr rtlCol="0" anchor="ctr"/>
+          <a:lstStyle/>
+          <a:p>
+            <a:pPr algn="ctr"/>
+          </a:p>
+        </p:txBody>
+      </p:sp>
+      <p:sp>
+        <p:nvSpPr>
+          <p:cNvPr id="10" name="TextBox 9"/>
           <p:cNvSpPr txBox="1"/>
           <p:nvPr/>
         </p:nvSpPr>
         <p:spPr>
           <a:xfrm>
-            <a:off x="822960" y="3200400"/>
-            <a:ext cx="548640" cy="1005840"/>
+            <a:off x="4648200" y="2286000"/>
+            <a:ext cx="2865120" cy="365760"/>
           </a:xfrm>
           <a:prstGeom prst="rect">
             <a:avLst/>
@@ -9186,31 +9631,31 @@
           <a:p>
             <a:pPr algn="l">
               <a:spcAft>
-                <a:spcPts val="1170"/>
-              </a:spcAft>
-            </a:pPr>
-            <a:r>
-              <a:rPr sz="2600" b="1" i="0">
-                <a:solidFill>
-                  <a:srgbClr val="F47B20"/>
-                </a:solidFill>
-                <a:latin typeface="Source Serif 4"/>
-              </a:rPr>
-              <a:t>2</a:t>
-            </a:r>
-          </a:p>
-        </p:txBody>
-      </p:sp>
-      <p:sp>
-        <p:nvSpPr>
-          <p:cNvPr id="9" name="TextBox 8"/>
+                <a:spcPts val="585"/>
+              </a:spcAft>
+            </a:pPr>
+            <a:r>
+              <a:rPr sz="1300" b="1" i="0">
+                <a:solidFill>
+                  <a:srgbClr val="0B2D5B"/>
+                </a:solidFill>
+                <a:latin typeface="Inter Tight"/>
+              </a:rPr>
+              <a:t>JAE</a:t>
+            </a:r>
+          </a:p>
+        </p:txBody>
+      </p:sp>
+      <p:sp>
+        <p:nvSpPr>
+          <p:cNvPr id="11" name="TextBox 10"/>
           <p:cNvSpPr txBox="1"/>
           <p:nvPr/>
         </p:nvSpPr>
         <p:spPr>
           <a:xfrm>
-            <a:off x="1463040" y="3236976"/>
-            <a:ext cx="9875520" cy="1005840"/>
+            <a:off x="4648200" y="2743200"/>
+            <a:ext cx="2865120" cy="3017520"/>
           </a:xfrm>
           <a:prstGeom prst="rect">
             <a:avLst/>
@@ -9225,47 +9670,77 @@
           <a:p>
             <a:pPr algn="l">
               <a:spcAft>
-                <a:spcPts val="945"/>
-              </a:spcAft>
-            </a:pPr>
-            <a:r>
-              <a:rPr sz="2100" b="1" i="0">
+                <a:spcPts val="810"/>
+              </a:spcAft>
+            </a:pPr>
+            <a:r>
+              <a:rPr sz="1800" b="0" i="0">
                 <a:solidFill>
                   <a:srgbClr val="1C1B19"/>
                 </a:solidFill>
                 <a:latin typeface="Source Serif 4"/>
               </a:rPr>
-              <a:t>Is it a fair match?</a:t>
-            </a:r>
-          </a:p>
-          <a:p>
-            <a:pPr algn="l">
-              <a:spcAft>
-                <a:spcPts val="945"/>
-              </a:spcAft>
-            </a:pPr>
-            <a:r>
-              <a:rPr sz="1600" b="0" i="0">
-                <a:solidFill>
-                  <a:srgbClr val="5D5A54"/>
-                </a:solidFill>
-                <a:latin typeface="Source Serif 4"/>
-              </a:rPr>
-              <a:t>Same starting line? Same money, time, help and luck?</a:t>
-            </a:r>
-          </a:p>
-        </p:txBody>
-      </p:sp>
-      <p:sp>
-        <p:nvSpPr>
-          <p:cNvPr id="10" name="TextBox 9"/>
+              <a:t>Sees a classmate's research internship. Jae spends summers working at his family's restaurant and suddenly feels behind.</a:t>
+            </a:r>
+          </a:p>
+        </p:txBody>
+      </p:sp>
+      <p:sp>
+        <p:nvSpPr>
+          <p:cNvPr id="12" name="Rectangle 11"/>
+          <p:cNvSpPr/>
+          <p:nvPr/>
+        </p:nvSpPr>
+        <p:spPr>
+          <a:xfrm>
+            <a:off x="8016239" y="2103120"/>
+            <a:ext cx="3322320" cy="3840480"/>
+          </a:xfrm>
+          <a:prstGeom prst="rect">
+            <a:avLst/>
+          </a:prstGeom>
+          <a:solidFill>
+            <a:srgbClr val="FFFFFF"/>
+          </a:solidFill>
+          <a:ln w="15875">
+            <a:solidFill>
+              <a:srgbClr val="D8D2C6"/>
+            </a:solidFill>
+          </a:ln>
+          <a:effectLst/>
+        </p:spPr>
+        <p:style>
+          <a:lnRef idx="1">
+            <a:schemeClr val="accent1"/>
+          </a:lnRef>
+          <a:fillRef idx="3">
+            <a:schemeClr val="accent1"/>
+          </a:fillRef>
+          <a:effectRef idx="2">
+            <a:schemeClr val="accent1"/>
+          </a:effectRef>
+          <a:fontRef idx="minor">
+            <a:schemeClr val="lt1"/>
+          </a:fontRef>
+        </p:style>
+        <p:txBody>
+          <a:bodyPr rtlCol="0" anchor="ctr"/>
+          <a:lstStyle/>
+          <a:p>
+            <a:pPr algn="ctr"/>
+          </a:p>
+        </p:txBody>
+      </p:sp>
+      <p:sp>
+        <p:nvSpPr>
+          <p:cNvPr id="13" name="TextBox 12"/>
           <p:cNvSpPr txBox="1"/>
           <p:nvPr/>
         </p:nvSpPr>
         <p:spPr>
           <a:xfrm>
-            <a:off x="822960" y="4206240"/>
-            <a:ext cx="548640" cy="1005840"/>
+            <a:off x="8244839" y="2286000"/>
+            <a:ext cx="2865120" cy="365760"/>
           </a:xfrm>
           <a:prstGeom prst="rect">
             <a:avLst/>
@@ -9280,31 +9755,31 @@
           <a:p>
             <a:pPr algn="l">
               <a:spcAft>
-                <a:spcPts val="1170"/>
-              </a:spcAft>
-            </a:pPr>
-            <a:r>
-              <a:rPr sz="2600" b="1" i="0">
-                <a:solidFill>
-                  <a:srgbClr val="F47B20"/>
-                </a:solidFill>
-                <a:latin typeface="Source Serif 4"/>
-              </a:rPr>
-              <a:t>3</a:t>
-            </a:r>
-          </a:p>
-        </p:txBody>
-      </p:sp>
-      <p:sp>
-        <p:nvSpPr>
-          <p:cNvPr id="11" name="TextBox 10"/>
+                <a:spcPts val="585"/>
+              </a:spcAft>
+            </a:pPr>
+            <a:r>
+              <a:rPr sz="1300" b="1" i="0">
+                <a:solidFill>
+                  <a:srgbClr val="0B2D5B"/>
+                </a:solidFill>
+                <a:latin typeface="Inter Tight"/>
+              </a:rPr>
+              <a:t>RILEY</a:t>
+            </a:r>
+          </a:p>
+        </p:txBody>
+      </p:sp>
+      <p:sp>
+        <p:nvSpPr>
+          <p:cNvPr id="14" name="TextBox 13"/>
           <p:cNvSpPr txBox="1"/>
           <p:nvPr/>
         </p:nvSpPr>
         <p:spPr>
           <a:xfrm>
-            <a:off x="1463040" y="4242816"/>
-            <a:ext cx="9875520" cy="1005840"/>
+            <a:off x="8244839" y="2743200"/>
+            <a:ext cx="2865120" cy="3017520"/>
           </a:xfrm>
           <a:prstGeom prst="rect">
             <a:avLst/>
@@ -9319,127 +9794,17 @@
           <a:p>
             <a:pPr algn="l">
               <a:spcAft>
-                <a:spcPts val="945"/>
-              </a:spcAft>
-            </a:pPr>
-            <a:r>
-              <a:rPr sz="2100" b="1" i="0">
+                <a:spcPts val="810"/>
+              </a:spcAft>
+            </a:pPr>
+            <a:r>
+              <a:rPr sz="1800" b="0" i="0">
                 <a:solidFill>
                   <a:srgbClr val="1C1B19"/>
                 </a:solidFill>
                 <a:latin typeface="Source Serif 4"/>
               </a:rPr>
-              <a:t>Is it useful?</a:t>
-            </a:r>
-          </a:p>
-          <a:p>
-            <a:pPr algn="l">
-              <a:spcAft>
-                <a:spcPts val="945"/>
-              </a:spcAft>
-            </a:pPr>
-            <a:r>
-              <a:rPr sz="1600" b="0" i="0">
-                <a:solidFill>
-                  <a:srgbClr val="5D5A54"/>
-                </a:solidFill>
-                <a:latin typeface="Source Serif 4"/>
-              </a:rPr>
-              <a:t>Anything to learn or act on? If not, it's noise that hurts.</a:t>
-            </a:r>
-          </a:p>
-        </p:txBody>
-      </p:sp>
-      <p:sp>
-        <p:nvSpPr>
-          <p:cNvPr id="12" name="TextBox 11"/>
-          <p:cNvSpPr txBox="1"/>
-          <p:nvPr/>
-        </p:nvSpPr>
-        <p:spPr>
-          <a:xfrm>
-            <a:off x="822960" y="5212080"/>
-            <a:ext cx="548640" cy="1005840"/>
-          </a:xfrm>
-          <a:prstGeom prst="rect">
-            <a:avLst/>
-          </a:prstGeom>
-          <a:noFill/>
-        </p:spPr>
-        <p:txBody>
-          <a:bodyPr wrap="square" anchor="t" lIns="0" rIns="0" tIns="0" bIns="0">
-            <a:spAutoFit/>
-          </a:bodyPr>
-          <a:lstStyle/>
-          <a:p>
-            <a:pPr algn="l">
-              <a:spcAft>
-                <a:spcPts val="1170"/>
-              </a:spcAft>
-            </a:pPr>
-            <a:r>
-              <a:rPr sz="2600" b="1" i="0">
-                <a:solidFill>
-                  <a:srgbClr val="F47B20"/>
-                </a:solidFill>
-                <a:latin typeface="Source Serif 4"/>
-              </a:rPr>
-              <a:t>4</a:t>
-            </a:r>
-          </a:p>
-        </p:txBody>
-      </p:sp>
-      <p:sp>
-        <p:nvSpPr>
-          <p:cNvPr id="13" name="TextBox 12"/>
-          <p:cNvSpPr txBox="1"/>
-          <p:nvPr/>
-        </p:nvSpPr>
-        <p:spPr>
-          <a:xfrm>
-            <a:off x="1463040" y="5248656"/>
-            <a:ext cx="9875520" cy="1005840"/>
-          </a:xfrm>
-          <a:prstGeom prst="rect">
-            <a:avLst/>
-          </a:prstGeom>
-          <a:noFill/>
-        </p:spPr>
-        <p:txBody>
-          <a:bodyPr wrap="square" anchor="t" lIns="0" rIns="0" tIns="0" bIns="0">
-            <a:spAutoFit/>
-          </a:bodyPr>
-          <a:lstStyle/>
-          <a:p>
-            <a:pPr algn="l">
-              <a:spcAft>
-                <a:spcPts val="945"/>
-              </a:spcAft>
-            </a:pPr>
-            <a:r>
-              <a:rPr sz="2100" b="1" i="0">
-                <a:solidFill>
-                  <a:srgbClr val="1C1B19"/>
-                </a:solidFill>
-                <a:latin typeface="Source Serif 4"/>
-              </a:rPr>
-              <a:t>What's the after-feeling?</a:t>
-            </a:r>
-          </a:p>
-          <a:p>
-            <a:pPr algn="l">
-              <a:spcAft>
-                <a:spcPts val="945"/>
-              </a:spcAft>
-            </a:pPr>
-            <a:r>
-              <a:rPr sz="1600" b="0" i="0">
-                <a:solidFill>
-                  <a:srgbClr val="5D5A54"/>
-                </a:solidFill>
-                <a:latin typeface="Source Serif 4"/>
-              </a:rPr>
-              <a:t>If an account reliably leaves you worse, that's worth acting on.</a:t>
+              <a:t>Follows fitness creators. Every video leaves her feeling like her body is wrong, but she says it's motivation.</a:t>
             </a:r>
           </a:p>
         </p:txBody>
@@ -9548,7 +9913,7 @@
                 </a:solidFill>
                 <a:latin typeface="Inter Tight"/>
               </a:rPr>
-              <a:t>TRY IT</a:t>
+              <a:t>COMPARISON YOU DIDN'T PICK</a:t>
             </a:r>
           </a:p>
         </p:txBody>
@@ -9594,14 +9959,58 @@
       </p:sp>
       <p:sp>
         <p:nvSpPr>
-          <p:cNvPr id="5" name="TextBox 4"/>
+          <p:cNvPr id="5" name="Rectangle 4"/>
+          <p:cNvSpPr/>
+          <p:nvPr/>
+        </p:nvSpPr>
+        <p:spPr>
+          <a:xfrm>
+            <a:off x="822960" y="1371600"/>
+            <a:ext cx="73152" cy="3566160"/>
+          </a:xfrm>
+          <a:prstGeom prst="rect">
+            <a:avLst/>
+          </a:prstGeom>
+          <a:solidFill>
+            <a:srgbClr val="F47B20"/>
+          </a:solidFill>
+          <a:ln>
+            <a:noFill/>
+          </a:ln>
+          <a:effectLst/>
+        </p:spPr>
+        <p:style>
+          <a:lnRef idx="1">
+            <a:schemeClr val="accent1"/>
+          </a:lnRef>
+          <a:fillRef idx="3">
+            <a:schemeClr val="accent1"/>
+          </a:fillRef>
+          <a:effectRef idx="2">
+            <a:schemeClr val="accent1"/>
+          </a:effectRef>
+          <a:fontRef idx="minor">
+            <a:schemeClr val="lt1"/>
+          </a:fontRef>
+        </p:style>
+        <p:txBody>
+          <a:bodyPr rtlCol="0" anchor="ctr"/>
+          <a:lstStyle/>
+          <a:p>
+            <a:pPr algn="ctr"/>
+          </a:p>
+        </p:txBody>
+      </p:sp>
+      <p:sp>
+        <p:nvSpPr>
+          <p:cNvPr id="6" name="TextBox 5"/>
           <p:cNvSpPr txBox="1"/>
           <p:nvPr/>
         </p:nvSpPr>
         <p:spPr>
           <a:xfrm>
-            <a:off x="822960" y="1463040"/>
-            <a:ext cx="10515600" cy="3291840"/>
+            <a:off x="1188720" y="1371600"/>
+            <a:ext cx="10058400" cy="3566160"/>
           </a:xfrm>
           <a:prstGeom prst="rect">
             <a:avLst/>
@@ -9616,31 +10025,31 @@
           <a:p>
             <a:pPr algn="l">
               <a:spcAft>
-                <a:spcPts val="2070"/>
-              </a:spcAft>
-            </a:pPr>
-            <a:r>
-              <a:rPr sz="4600" b="1" i="0">
+                <a:spcPts val="1800"/>
+              </a:spcAft>
+            </a:pPr>
+            <a:r>
+              <a:rPr sz="4000" b="0" i="1">
                 <a:solidFill>
                   <a:srgbClr val="1C1B19"/>
                 </a:solidFill>
                 <a:latin typeface="Source Serif 4"/>
               </a:rPr>
-              <a:t>"Got into my dream summer program!! So grateful 🙏"</a:t>
-            </a:r>
-          </a:p>
-        </p:txBody>
-      </p:sp>
-      <p:sp>
-        <p:nvSpPr>
-          <p:cNvPr id="6" name="TextBox 5"/>
+              <a:t>How does comparing work in your family? What part do you want to keep, and what part do you want to set down?</a:t>
+            </a:r>
+          </a:p>
+        </p:txBody>
+      </p:sp>
+      <p:sp>
+        <p:nvSpPr>
+          <p:cNvPr id="7" name="TextBox 6"/>
           <p:cNvSpPr txBox="1"/>
           <p:nvPr/>
         </p:nvSpPr>
         <p:spPr>
           <a:xfrm>
-            <a:off x="822960" y="4846320"/>
-            <a:ext cx="10515600" cy="1097280"/>
+            <a:off x="1188720" y="5120640"/>
+            <a:ext cx="10058400" cy="914400"/>
           </a:xfrm>
           <a:prstGeom prst="rect">
             <a:avLst/>
@@ -9655,17 +10064,17 @@
           <a:p>
             <a:pPr algn="l">
               <a:spcAft>
-                <a:spcPts val="990"/>
-              </a:spcAft>
-            </a:pPr>
-            <a:r>
-              <a:rPr sz="2200" b="0" i="1">
+                <a:spcPts val="810"/>
+              </a:spcAft>
+            </a:pPr>
+            <a:r>
+              <a:rPr sz="1800" b="0" i="0">
                 <a:solidFill>
                   <a:srgbClr val="5D5A54"/>
                 </a:solidFill>
-                <a:latin typeface="Source Serif 4"/>
-              </a:rPr>
-              <a:t>A classmate's post. Run the four questions in your group.</a:t>
+                <a:latin typeface="Inter Tight"/>
+              </a:rPr>
+              <a:t>Private. Write it for yourself.</a:t>
             </a:r>
           </a:p>
         </p:txBody>

--- a/decks/the-comparison-trap-lesson-v2.pptx
+++ b/decks/the-comparison-trap-lesson-v2.pptx
@@ -7125,6 +7125,45 @@
                 <a:latin typeface="Inter Tight"/>
               </a:rPr>
               <a:t>Beaver Upper School · Counseling</a:t>
+            </a:r>
+          </a:p>
+        </p:txBody>
+      </p:sp>
+      <p:sp>
+        <p:nvSpPr>
+          <p:cNvPr id="8" name="TextBox 7"/>
+          <p:cNvSpPr txBox="1"/>
+          <p:nvPr/>
+        </p:nvSpPr>
+        <p:spPr>
+          <a:xfrm>
+            <a:off x="6766560" y="5897880"/>
+            <a:ext cx="4846320" cy="640080"/>
+          </a:xfrm>
+          <a:prstGeom prst="rect">
+            <a:avLst/>
+          </a:prstGeom>
+          <a:noFill/>
+        </p:spPr>
+        <p:txBody>
+          <a:bodyPr wrap="square" anchor="t" lIns="0" rIns="0" tIns="0" bIns="0">
+            <a:spAutoFit/>
+          </a:bodyPr>
+          <a:lstStyle/>
+          <a:p>
+            <a:pPr algn="r">
+              <a:spcAft>
+                <a:spcPts val="495"/>
+              </a:spcAft>
+            </a:pPr>
+            <a:r>
+              <a:rPr sz="1100" b="0" i="0">
+                <a:solidFill>
+                  <a:srgbClr val="E8E4DA"/>
+                </a:solidFill>
+                <a:latin typeface="Inter Tight"/>
+              </a:rPr>
+              <a:t>Written by Dr. Rick Wilson, with AI-assisted drafting. Every lesson is reviewed and edited by Dr. Wilson.</a:t>
             </a:r>
           </a:p>
         </p:txBody>
